--- a/黒崎/AI研修一覧/Gemini/P-03_営業企画効率化/スライド.pptx
+++ b/黒崎/AI研修一覧/Gemini/P-03_営業企画効率化/スライド.pptx
@@ -12,9 +12,14 @@
     <p:sldId id="260" r:id="rId6"/>
     <p:sldId id="261" r:id="rId7"/>
     <p:sldId id="262" r:id="rId8"/>
+    <p:sldId id="263" r:id="rId9"/>
+    <p:sldId id="264" r:id="rId10"/>
+    <p:sldId id="265" r:id="rId11"/>
+    <p:sldId id="266" r:id="rId12"/>
+    <p:sldId id="267" r:id="rId13"/>
   </p:sldIdLst>
   <p:notesMasterIdLst>
-    <p:notesMasterId r:id="rId9"/>
+    <p:notesMasterId r:id="rId14"/>
   </p:notesMasterIdLst>
   <p:sldSz cx="9144000" cy="5143500"/>
   <p:notesSz cx="5143500" cy="9144000"/>
@@ -550,6 +555,270 @@
 </p:notes>
 </file>
 
+<file path=ppt/notesSlides/notesSlide10.xml><?xml version="1.0" encoding="utf-8"?>
+<p:notes xmlns:a="http://schemas.openxmlformats.org/drawingml/2006/main" xmlns:r="http://schemas.openxmlformats.org/officeDocument/2006/relationships" xmlns:p="http://schemas.openxmlformats.org/presentationml/2006/main">
+  <p:cSld>
+    <p:spTree>
+      <p:nvGrpSpPr>
+        <p:cNvPr id="1" name=""/>
+        <p:cNvGrpSpPr/>
+        <p:nvPr/>
+      </p:nvGrpSpPr>
+      <p:grpSpPr>
+        <a:xfrm>
+          <a:off x="0" y="0"/>
+          <a:ext cx="0" cy="0"/>
+          <a:chOff x="0" y="0"/>
+          <a:chExt cx="0" cy="0"/>
+        </a:xfrm>
+      </p:grpSpPr>
+      <p:sp>
+        <p:nvSpPr>
+          <p:cNvPr id="2" name="Slide Image Placeholder 1"/>
+          <p:cNvSpPr>
+            <a:spLocks noGrp="1" noRot="1" noChangeAspect="1"/>
+          </p:cNvSpPr>
+          <p:nvPr>
+            <p:ph type="sldImg"/>
+          </p:nvPr>
+        </p:nvSpPr>
+        <p:spPr/>
+      </p:sp>
+      <p:sp>
+        <p:nvSpPr>
+          <p:cNvPr id="3" name="Notes Placeholder 2"/>
+          <p:cNvSpPr>
+            <a:spLocks noGrp="1"/>
+          </p:cNvSpPr>
+          <p:nvPr>
+            <p:ph type="body" idx="1"/>
+          </p:nvPr>
+        </p:nvSpPr>
+        <p:spPr/>
+        <p:txBody>
+          <a:bodyPr/>
+          <a:lstStyle/>
+          <a:p>
+            <a:r>
+              <a:rPr lang="en-US" dirty="0"/>
+              <a:t/>
+            </a:r>
+            <a:endParaRPr lang="en-US" dirty="0"/>
+          </a:p>
+        </p:txBody>
+      </p:sp>
+      <p:sp>
+        <p:nvSpPr>
+          <p:cNvPr id="4" name="Slide Number Placeholder 3"/>
+          <p:cNvSpPr>
+            <a:spLocks noGrp="1"/>
+          </p:cNvSpPr>
+          <p:nvPr>
+            <p:ph type="sldNum" sz="quarter" idx="10"/>
+          </p:nvPr>
+        </p:nvSpPr>
+        <p:spPr/>
+        <p:txBody>
+          <a:bodyPr/>
+          <a:lstStyle/>
+          <a:p>
+            <a:fld id="{F7021451-1387-4CA6-816F-3879F97B5CBC}" type="slidenum">
+              <a:rPr lang="en-US"/>
+              <a:t>10</a:t>
+            </a:fld>
+            <a:endParaRPr lang="en-US"/>
+          </a:p>
+        </p:txBody>
+      </p:sp>
+    </p:spTree>
+    <p:extLst>
+      <p:ext uri="{BB962C8B-B14F-4D97-AF65-F5344CB8AC3E}">
+        <p14:creationId xmlns:p14="http://schemas.microsoft.com/office/powerpoint/2010/main" val="1024086991"/>
+      </p:ext>
+    </p:extLst>
+  </p:cSld>
+  <p:clrMapOvr>
+    <a:masterClrMapping/>
+  </p:clrMapOvr>
+</p:notes>
+</file>
+
+<file path=ppt/notesSlides/notesSlide11.xml><?xml version="1.0" encoding="utf-8"?>
+<p:notes xmlns:a="http://schemas.openxmlformats.org/drawingml/2006/main" xmlns:r="http://schemas.openxmlformats.org/officeDocument/2006/relationships" xmlns:p="http://schemas.openxmlformats.org/presentationml/2006/main">
+  <p:cSld>
+    <p:spTree>
+      <p:nvGrpSpPr>
+        <p:cNvPr id="1" name=""/>
+        <p:cNvGrpSpPr/>
+        <p:nvPr/>
+      </p:nvGrpSpPr>
+      <p:grpSpPr>
+        <a:xfrm>
+          <a:off x="0" y="0"/>
+          <a:ext cx="0" cy="0"/>
+          <a:chOff x="0" y="0"/>
+          <a:chExt cx="0" cy="0"/>
+        </a:xfrm>
+      </p:grpSpPr>
+      <p:sp>
+        <p:nvSpPr>
+          <p:cNvPr id="2" name="Slide Image Placeholder 1"/>
+          <p:cNvSpPr>
+            <a:spLocks noGrp="1" noRot="1" noChangeAspect="1"/>
+          </p:cNvSpPr>
+          <p:nvPr>
+            <p:ph type="sldImg"/>
+          </p:nvPr>
+        </p:nvSpPr>
+        <p:spPr/>
+      </p:sp>
+      <p:sp>
+        <p:nvSpPr>
+          <p:cNvPr id="3" name="Notes Placeholder 2"/>
+          <p:cNvSpPr>
+            <a:spLocks noGrp="1"/>
+          </p:cNvSpPr>
+          <p:nvPr>
+            <p:ph type="body" idx="1"/>
+          </p:nvPr>
+        </p:nvSpPr>
+        <p:spPr/>
+        <p:txBody>
+          <a:bodyPr/>
+          <a:lstStyle/>
+          <a:p>
+            <a:r>
+              <a:rPr lang="en-US" dirty="0"/>
+              <a:t/>
+            </a:r>
+            <a:endParaRPr lang="en-US" dirty="0"/>
+          </a:p>
+        </p:txBody>
+      </p:sp>
+      <p:sp>
+        <p:nvSpPr>
+          <p:cNvPr id="4" name="Slide Number Placeholder 3"/>
+          <p:cNvSpPr>
+            <a:spLocks noGrp="1"/>
+          </p:cNvSpPr>
+          <p:nvPr>
+            <p:ph type="sldNum" sz="quarter" idx="10"/>
+          </p:nvPr>
+        </p:nvSpPr>
+        <p:spPr/>
+        <p:txBody>
+          <a:bodyPr/>
+          <a:lstStyle/>
+          <a:p>
+            <a:fld id="{F7021451-1387-4CA6-816F-3879F97B5CBC}" type="slidenum">
+              <a:rPr lang="en-US"/>
+              <a:t>11</a:t>
+            </a:fld>
+            <a:endParaRPr lang="en-US"/>
+          </a:p>
+        </p:txBody>
+      </p:sp>
+    </p:spTree>
+    <p:extLst>
+      <p:ext uri="{BB962C8B-B14F-4D97-AF65-F5344CB8AC3E}">
+        <p14:creationId xmlns:p14="http://schemas.microsoft.com/office/powerpoint/2010/main" val="1024086991"/>
+      </p:ext>
+    </p:extLst>
+  </p:cSld>
+  <p:clrMapOvr>
+    <a:masterClrMapping/>
+  </p:clrMapOvr>
+</p:notes>
+</file>
+
+<file path=ppt/notesSlides/notesSlide12.xml><?xml version="1.0" encoding="utf-8"?>
+<p:notes xmlns:a="http://schemas.openxmlformats.org/drawingml/2006/main" xmlns:r="http://schemas.openxmlformats.org/officeDocument/2006/relationships" xmlns:p="http://schemas.openxmlformats.org/presentationml/2006/main">
+  <p:cSld>
+    <p:spTree>
+      <p:nvGrpSpPr>
+        <p:cNvPr id="1" name=""/>
+        <p:cNvGrpSpPr/>
+        <p:nvPr/>
+      </p:nvGrpSpPr>
+      <p:grpSpPr>
+        <a:xfrm>
+          <a:off x="0" y="0"/>
+          <a:ext cx="0" cy="0"/>
+          <a:chOff x="0" y="0"/>
+          <a:chExt cx="0" cy="0"/>
+        </a:xfrm>
+      </p:grpSpPr>
+      <p:sp>
+        <p:nvSpPr>
+          <p:cNvPr id="2" name="Slide Image Placeholder 1"/>
+          <p:cNvSpPr>
+            <a:spLocks noGrp="1" noRot="1" noChangeAspect="1"/>
+          </p:cNvSpPr>
+          <p:nvPr>
+            <p:ph type="sldImg"/>
+          </p:nvPr>
+        </p:nvSpPr>
+        <p:spPr/>
+      </p:sp>
+      <p:sp>
+        <p:nvSpPr>
+          <p:cNvPr id="3" name="Notes Placeholder 2"/>
+          <p:cNvSpPr>
+            <a:spLocks noGrp="1"/>
+          </p:cNvSpPr>
+          <p:nvPr>
+            <p:ph type="body" idx="1"/>
+          </p:nvPr>
+        </p:nvSpPr>
+        <p:spPr/>
+        <p:txBody>
+          <a:bodyPr/>
+          <a:lstStyle/>
+          <a:p>
+            <a:r>
+              <a:rPr lang="en-US" dirty="0"/>
+              <a:t/>
+            </a:r>
+            <a:endParaRPr lang="en-US" dirty="0"/>
+          </a:p>
+        </p:txBody>
+      </p:sp>
+      <p:sp>
+        <p:nvSpPr>
+          <p:cNvPr id="4" name="Slide Number Placeholder 3"/>
+          <p:cNvSpPr>
+            <a:spLocks noGrp="1"/>
+          </p:cNvSpPr>
+          <p:nvPr>
+            <p:ph type="sldNum" sz="quarter" idx="10"/>
+          </p:nvPr>
+        </p:nvSpPr>
+        <p:spPr/>
+        <p:txBody>
+          <a:bodyPr/>
+          <a:lstStyle/>
+          <a:p>
+            <a:fld id="{F7021451-1387-4CA6-816F-3879F97B5CBC}" type="slidenum">
+              <a:rPr lang="en-US"/>
+              <a:t>12</a:t>
+            </a:fld>
+            <a:endParaRPr lang="en-US"/>
+          </a:p>
+        </p:txBody>
+      </p:sp>
+    </p:spTree>
+    <p:extLst>
+      <p:ext uri="{BB962C8B-B14F-4D97-AF65-F5344CB8AC3E}">
+        <p14:creationId xmlns:p14="http://schemas.microsoft.com/office/powerpoint/2010/main" val="1024086991"/>
+      </p:ext>
+    </p:extLst>
+  </p:cSld>
+  <p:clrMapOvr>
+    <a:masterClrMapping/>
+  </p:clrMapOvr>
+</p:notes>
+</file>
+
 <file path=ppt/notesSlides/notesSlide2.xml><?xml version="1.0" encoding="utf-8"?>
 <p:notes xmlns:a="http://schemas.openxmlformats.org/drawingml/2006/main" xmlns:r="http://schemas.openxmlformats.org/officeDocument/2006/relationships" xmlns:p="http://schemas.openxmlformats.org/presentationml/2006/main">
   <p:cSld>
@@ -1060,6 +1329,182 @@
             <a:fld id="{F7021451-1387-4CA6-816F-3879F97B5CBC}" type="slidenum">
               <a:rPr lang="en-US"/>
               <a:t>7</a:t>
+            </a:fld>
+            <a:endParaRPr lang="en-US"/>
+          </a:p>
+        </p:txBody>
+      </p:sp>
+    </p:spTree>
+    <p:extLst>
+      <p:ext uri="{BB962C8B-B14F-4D97-AF65-F5344CB8AC3E}">
+        <p14:creationId xmlns:p14="http://schemas.microsoft.com/office/powerpoint/2010/main" val="1024086991"/>
+      </p:ext>
+    </p:extLst>
+  </p:cSld>
+  <p:clrMapOvr>
+    <a:masterClrMapping/>
+  </p:clrMapOvr>
+</p:notes>
+</file>
+
+<file path=ppt/notesSlides/notesSlide8.xml><?xml version="1.0" encoding="utf-8"?>
+<p:notes xmlns:a="http://schemas.openxmlformats.org/drawingml/2006/main" xmlns:r="http://schemas.openxmlformats.org/officeDocument/2006/relationships" xmlns:p="http://schemas.openxmlformats.org/presentationml/2006/main">
+  <p:cSld>
+    <p:spTree>
+      <p:nvGrpSpPr>
+        <p:cNvPr id="1" name=""/>
+        <p:cNvGrpSpPr/>
+        <p:nvPr/>
+      </p:nvGrpSpPr>
+      <p:grpSpPr>
+        <a:xfrm>
+          <a:off x="0" y="0"/>
+          <a:ext cx="0" cy="0"/>
+          <a:chOff x="0" y="0"/>
+          <a:chExt cx="0" cy="0"/>
+        </a:xfrm>
+      </p:grpSpPr>
+      <p:sp>
+        <p:nvSpPr>
+          <p:cNvPr id="2" name="Slide Image Placeholder 1"/>
+          <p:cNvSpPr>
+            <a:spLocks noGrp="1" noRot="1" noChangeAspect="1"/>
+          </p:cNvSpPr>
+          <p:nvPr>
+            <p:ph type="sldImg"/>
+          </p:nvPr>
+        </p:nvSpPr>
+        <p:spPr/>
+      </p:sp>
+      <p:sp>
+        <p:nvSpPr>
+          <p:cNvPr id="3" name="Notes Placeholder 2"/>
+          <p:cNvSpPr>
+            <a:spLocks noGrp="1"/>
+          </p:cNvSpPr>
+          <p:nvPr>
+            <p:ph type="body" idx="1"/>
+          </p:nvPr>
+        </p:nvSpPr>
+        <p:spPr/>
+        <p:txBody>
+          <a:bodyPr/>
+          <a:lstStyle/>
+          <a:p>
+            <a:r>
+              <a:rPr lang="en-US" dirty="0"/>
+              <a:t/>
+            </a:r>
+            <a:endParaRPr lang="en-US" dirty="0"/>
+          </a:p>
+        </p:txBody>
+      </p:sp>
+      <p:sp>
+        <p:nvSpPr>
+          <p:cNvPr id="4" name="Slide Number Placeholder 3"/>
+          <p:cNvSpPr>
+            <a:spLocks noGrp="1"/>
+          </p:cNvSpPr>
+          <p:nvPr>
+            <p:ph type="sldNum" sz="quarter" idx="10"/>
+          </p:nvPr>
+        </p:nvSpPr>
+        <p:spPr/>
+        <p:txBody>
+          <a:bodyPr/>
+          <a:lstStyle/>
+          <a:p>
+            <a:fld id="{F7021451-1387-4CA6-816F-3879F97B5CBC}" type="slidenum">
+              <a:rPr lang="en-US"/>
+              <a:t>8</a:t>
+            </a:fld>
+            <a:endParaRPr lang="en-US"/>
+          </a:p>
+        </p:txBody>
+      </p:sp>
+    </p:spTree>
+    <p:extLst>
+      <p:ext uri="{BB962C8B-B14F-4D97-AF65-F5344CB8AC3E}">
+        <p14:creationId xmlns:p14="http://schemas.microsoft.com/office/powerpoint/2010/main" val="1024086991"/>
+      </p:ext>
+    </p:extLst>
+  </p:cSld>
+  <p:clrMapOvr>
+    <a:masterClrMapping/>
+  </p:clrMapOvr>
+</p:notes>
+</file>
+
+<file path=ppt/notesSlides/notesSlide9.xml><?xml version="1.0" encoding="utf-8"?>
+<p:notes xmlns:a="http://schemas.openxmlformats.org/drawingml/2006/main" xmlns:r="http://schemas.openxmlformats.org/officeDocument/2006/relationships" xmlns:p="http://schemas.openxmlformats.org/presentationml/2006/main">
+  <p:cSld>
+    <p:spTree>
+      <p:nvGrpSpPr>
+        <p:cNvPr id="1" name=""/>
+        <p:cNvGrpSpPr/>
+        <p:nvPr/>
+      </p:nvGrpSpPr>
+      <p:grpSpPr>
+        <a:xfrm>
+          <a:off x="0" y="0"/>
+          <a:ext cx="0" cy="0"/>
+          <a:chOff x="0" y="0"/>
+          <a:chExt cx="0" cy="0"/>
+        </a:xfrm>
+      </p:grpSpPr>
+      <p:sp>
+        <p:nvSpPr>
+          <p:cNvPr id="2" name="Slide Image Placeholder 1"/>
+          <p:cNvSpPr>
+            <a:spLocks noGrp="1" noRot="1" noChangeAspect="1"/>
+          </p:cNvSpPr>
+          <p:nvPr>
+            <p:ph type="sldImg"/>
+          </p:nvPr>
+        </p:nvSpPr>
+        <p:spPr/>
+      </p:sp>
+      <p:sp>
+        <p:nvSpPr>
+          <p:cNvPr id="3" name="Notes Placeholder 2"/>
+          <p:cNvSpPr>
+            <a:spLocks noGrp="1"/>
+          </p:cNvSpPr>
+          <p:nvPr>
+            <p:ph type="body" idx="1"/>
+          </p:nvPr>
+        </p:nvSpPr>
+        <p:spPr/>
+        <p:txBody>
+          <a:bodyPr/>
+          <a:lstStyle/>
+          <a:p>
+            <a:r>
+              <a:rPr lang="en-US" dirty="0"/>
+              <a:t/>
+            </a:r>
+            <a:endParaRPr lang="en-US" dirty="0"/>
+          </a:p>
+        </p:txBody>
+      </p:sp>
+      <p:sp>
+        <p:nvSpPr>
+          <p:cNvPr id="4" name="Slide Number Placeholder 3"/>
+          <p:cNvSpPr>
+            <a:spLocks noGrp="1"/>
+          </p:cNvSpPr>
+          <p:nvPr>
+            <p:ph type="sldNum" sz="quarter" idx="10"/>
+          </p:nvPr>
+        </p:nvSpPr>
+        <p:spPr/>
+        <p:txBody>
+          <a:bodyPr/>
+          <a:lstStyle/>
+          <a:p>
+            <a:fld id="{F7021451-1387-4CA6-816F-3879F97B5CBC}" type="slidenum">
+              <a:rPr lang="en-US"/>
+              <a:t>9</a:t>
             </a:fld>
             <a:endParaRPr lang="en-US"/>
           </a:p>
@@ -1417,24 +1862,861 @@
         </p:nvSpPr>
         <p:spPr>
           <a:xfrm>
-            <a:off x="685800" y="1371600"/>
-            <a:ext cx="7772400" cy="1097280"/>
-          </a:xfrm>
-          <a:prstGeom prst="rect">
-            <a:avLst/>
-          </a:prstGeom>
-          <a:noFill/>
-          <a:ln/>
-        </p:spPr>
-        <p:txBody>
-          <a:bodyPr wrap="square" rtlCol="0" anchor="ctr"/>
+            <a:off x="457200" y="1371600"/>
+            <a:ext cx="8229600" cy="731520"/>
+          </a:xfrm>
+          <a:prstGeom prst="rect">
+            <a:avLst/>
+          </a:prstGeom>
+          <a:noFill/>
+          <a:ln/>
+        </p:spPr>
+        <p:txBody>
+          <a:bodyPr wrap="square" rtlCol="0" anchor="ctr">
+            <a:normAutofit/>
+          </a:bodyPr>
+          <a:lstStyle/>
+          <a:p>
+            <a:pPr algn="ctr" indent="0" marL="0">
+              <a:buNone/>
+            </a:pPr>
+            <a:r>
+              <a:rPr lang="en-US" sz="4000" b="1" dirty="0">
+                <a:solidFill>
+                  <a:srgbClr val="FFFFFF"/>
+                </a:solidFill>
+                <a:latin typeface="Calibri" pitchFamily="34" charset="0"/>
+                <a:ea typeface="Calibri" pitchFamily="34" charset="-122"/>
+                <a:cs typeface="Calibri" pitchFamily="34" charset="-120"/>
+              </a:rPr>
+              <a:t>営業企画効率化実演</a:t>
+            </a:r>
+            <a:endParaRPr lang="en-US" sz="4000" dirty="0"/>
+          </a:p>
+        </p:txBody>
+      </p:sp>
+      <p:sp>
+        <p:nvSpPr>
+          <p:cNvPr id="3" name="Shape 1"/>
+          <p:cNvSpPr/>
+          <p:nvPr/>
+        </p:nvSpPr>
+        <p:spPr>
+          <a:xfrm>
+            <a:off x="3200400" y="2240280"/>
+            <a:ext cx="2743200" cy="0"/>
+          </a:xfrm>
+          <a:prstGeom prst="line">
+            <a:avLst/>
+          </a:prstGeom>
+          <a:noFill/>
+          <a:ln w="19050">
+            <a:solidFill>
+              <a:srgbClr val="93C5FD"/>
+            </a:solidFill>
+            <a:prstDash val="solid"/>
+          </a:ln>
+        </p:spPr>
+      </p:sp>
+      <p:sp>
+        <p:nvSpPr>
+          <p:cNvPr id="4" name="Text 2"/>
+          <p:cNvSpPr/>
+          <p:nvPr/>
+        </p:nvSpPr>
+        <p:spPr>
+          <a:xfrm>
+            <a:off x="457200" y="2423160"/>
+            <a:ext cx="8229600" cy="411480"/>
+          </a:xfrm>
+          <a:prstGeom prst="rect">
+            <a:avLst/>
+          </a:prstGeom>
+          <a:noFill/>
+          <a:ln/>
+        </p:spPr>
+        <p:txBody>
+          <a:bodyPr wrap="square" rtlCol="0" anchor="ctr">
+            <a:normAutofit/>
+          </a:bodyPr>
+          <a:lstStyle/>
+          <a:p>
+            <a:pPr algn="ctr" indent="0" marL="0">
+              <a:buNone/>
+            </a:pPr>
+            <a:r>
+              <a:rPr lang="en-US" sz="2000" dirty="0">
+                <a:solidFill>
+                  <a:srgbClr val="93C5FD"/>
+                </a:solidFill>
+                <a:latin typeface="Calibri" pitchFamily="34" charset="0"/>
+                <a:ea typeface="Calibri" pitchFamily="34" charset="-122"/>
+                <a:cs typeface="Calibri" pitchFamily="34" charset="-120"/>
+              </a:rPr>
+              <a:t>提案書作成が数分で完成</a:t>
+            </a:r>
+            <a:endParaRPr lang="en-US" sz="2000" dirty="0"/>
+          </a:p>
+        </p:txBody>
+      </p:sp>
+      <p:sp>
+        <p:nvSpPr>
+          <p:cNvPr id="5" name="Text 3"/>
+          <p:cNvSpPr/>
+          <p:nvPr/>
+        </p:nvSpPr>
+        <p:spPr>
+          <a:xfrm>
+            <a:off x="457200" y="3474720"/>
+            <a:ext cx="8229600" cy="320040"/>
+          </a:xfrm>
+          <a:prstGeom prst="rect">
+            <a:avLst/>
+          </a:prstGeom>
+          <a:noFill/>
+          <a:ln/>
+        </p:spPr>
+        <p:txBody>
+          <a:bodyPr wrap="square" rtlCol="0" anchor="ctr">
+            <a:normAutofit/>
+          </a:bodyPr>
+          <a:lstStyle/>
+          <a:p>
+            <a:pPr algn="ctr" indent="0" marL="0">
+              <a:buNone/>
+            </a:pPr>
+            <a:r>
+              <a:rPr lang="en-US" sz="1200" dirty="0">
+                <a:solidFill>
+                  <a:srgbClr val="9CA3AF"/>
+                </a:solidFill>
+                <a:latin typeface="Calibri" pitchFamily="34" charset="0"/>
+                <a:ea typeface="Calibri" pitchFamily="34" charset="-122"/>
+                <a:cs typeface="Calibri" pitchFamily="34" charset="-120"/>
+              </a:rPr>
+              <a:t>P-03  |  営業部向け  |  12分</a:t>
+            </a:r>
+            <a:endParaRPr lang="en-US" sz="1200" dirty="0"/>
+          </a:p>
+        </p:txBody>
+      </p:sp>
+    </p:spTree>
+  </p:cSld>
+  <p:clrMapOvr>
+    <a:masterClrMapping/>
+  </p:clrMapOvr>
+</p:sld>
+</file>
+
+<file path=ppt/slides/slide10.xml><?xml version="1.0" encoding="utf-8"?>
+<p:sld xmlns:a="http://schemas.openxmlformats.org/drawingml/2006/main" xmlns:r="http://schemas.openxmlformats.org/officeDocument/2006/relationships" xmlns:p="http://schemas.openxmlformats.org/presentationml/2006/main">
+  <p:cSld name="Slide 10">
+    <p:bg>
+      <p:bgPr>
+        <a:solidFill>
+          <a:srgbClr val="FFFFFF"/>
+        </a:solidFill>
+      </p:bgPr>
+    </p:bg>
+    <p:spTree>
+      <p:nvGrpSpPr>
+        <p:cNvPr id="1" name=""/>
+        <p:cNvGrpSpPr/>
+        <p:nvPr/>
+      </p:nvGrpSpPr>
+      <p:grpSpPr>
+        <a:xfrm>
+          <a:off x="0" y="0"/>
+          <a:ext cx="0" cy="0"/>
+          <a:chOff x="0" y="0"/>
+          <a:chExt cx="0" cy="0"/>
+        </a:xfrm>
+      </p:grpSpPr>
+      <p:sp>
+        <p:nvSpPr>
+          <p:cNvPr id="2" name="Shape 0"/>
+          <p:cNvSpPr/>
+          <p:nvPr/>
+        </p:nvSpPr>
+        <p:spPr>
+          <a:xfrm>
+            <a:off x="0" y="0"/>
+            <a:ext cx="9144000" cy="32004"/>
+          </a:xfrm>
+          <a:prstGeom prst="rect">
+            <a:avLst/>
+          </a:prstGeom>
+          <a:solidFill>
+            <a:srgbClr val="2563EB"/>
+          </a:solidFill>
+          <a:ln/>
+        </p:spPr>
+      </p:sp>
+      <p:sp>
+        <p:nvSpPr>
+          <p:cNvPr id="3" name="Shape 1"/>
+          <p:cNvSpPr/>
+          <p:nvPr/>
+        </p:nvSpPr>
+        <p:spPr>
+          <a:xfrm>
+            <a:off x="685800" y="137160"/>
+            <a:ext cx="1463040" cy="256032"/>
+          </a:xfrm>
+          <a:prstGeom prst="rect">
+            <a:avLst>
+              <a:gd name="adj" fmla="val 17857"/>
+            </a:avLst>
+          </a:prstGeom>
+          <a:solidFill>
+            <a:srgbClr val="DBEAFE"/>
+          </a:solidFill>
+          <a:ln/>
+        </p:spPr>
+      </p:sp>
+      <p:sp>
+        <p:nvSpPr>
+          <p:cNvPr id="4" name="Text 2"/>
+          <p:cNvSpPr/>
+          <p:nvPr/>
+        </p:nvSpPr>
+        <p:spPr>
+          <a:xfrm>
+            <a:off x="685800" y="137160"/>
+            <a:ext cx="1463040" cy="256032"/>
+          </a:xfrm>
+          <a:prstGeom prst="rect">
+            <a:avLst/>
+          </a:prstGeom>
+          <a:noFill/>
+          <a:ln/>
+        </p:spPr>
+        <p:txBody>
+          <a:bodyPr wrap="square" rtlCol="0" anchor="ctr">
+            <a:normAutofit/>
+          </a:bodyPr>
+          <a:lstStyle/>
+          <a:p>
+            <a:pPr algn="ctr" indent="0" marL="0">
+              <a:buNone/>
+            </a:pPr>
+            <a:r>
+              <a:rPr lang="en-US" sz="1000" b="1" dirty="0">
+                <a:solidFill>
+                  <a:srgbClr val="2563EB"/>
+                </a:solidFill>
+                <a:latin typeface="Calibri" pitchFamily="34" charset="0"/>
+                <a:ea typeface="Calibri" pitchFamily="34" charset="-122"/>
+                <a:cs typeface="Calibri" pitchFamily="34" charset="-120"/>
+              </a:rPr>
+              <a:t>NEXT STEPS</a:t>
+            </a:r>
+            <a:endParaRPr lang="en-US" sz="1000" dirty="0"/>
+          </a:p>
+        </p:txBody>
+      </p:sp>
+      <p:sp>
+        <p:nvSpPr>
+          <p:cNvPr id="5" name="Text 3"/>
+          <p:cNvSpPr/>
+          <p:nvPr/>
+        </p:nvSpPr>
+        <p:spPr>
+          <a:xfrm>
+            <a:off x="685800" y="457200"/>
+            <a:ext cx="7772400" cy="411480"/>
+          </a:xfrm>
+          <a:prstGeom prst="rect">
+            <a:avLst/>
+          </a:prstGeom>
+          <a:noFill/>
+          <a:ln/>
+        </p:spPr>
+        <p:txBody>
+          <a:bodyPr wrap="square" rtlCol="0" anchor="ctr">
+            <a:normAutofit/>
+          </a:bodyPr>
+          <a:lstStyle/>
+          <a:p>
+            <a:pPr indent="0" marL="0">
+              <a:buNone/>
+            </a:pPr>
+            <a:r>
+              <a:rPr lang="en-US" sz="2400" b="1" dirty="0">
+                <a:solidFill>
+                  <a:srgbClr val="111827"/>
+                </a:solidFill>
+                <a:latin typeface="Calibri" pitchFamily="34" charset="0"/>
+                <a:ea typeface="Calibri" pitchFamily="34" charset="-122"/>
+                <a:cs typeface="Calibri" pitchFamily="34" charset="-120"/>
+              </a:rPr>
+              <a:t>営業チームが今からやること</a:t>
+            </a:r>
+            <a:endParaRPr lang="en-US" sz="2400" dirty="0"/>
+          </a:p>
+        </p:txBody>
+      </p:sp>
+      <p:sp>
+        <p:nvSpPr>
+          <p:cNvPr id="6" name="Shape 4"/>
+          <p:cNvSpPr/>
+          <p:nvPr/>
+        </p:nvSpPr>
+        <p:spPr>
+          <a:xfrm>
+            <a:off x="685800" y="4777740"/>
+            <a:ext cx="7772400" cy="0"/>
+          </a:xfrm>
+          <a:prstGeom prst="line">
+            <a:avLst/>
+          </a:prstGeom>
+          <a:noFill/>
+          <a:ln w="6350">
+            <a:solidFill>
+              <a:srgbClr val="E5E7EB"/>
+            </a:solidFill>
+            <a:prstDash val="solid"/>
+          </a:ln>
+        </p:spPr>
+      </p:sp>
+      <p:sp>
+        <p:nvSpPr>
+          <p:cNvPr id="7" name="Text 5"/>
+          <p:cNvSpPr/>
+          <p:nvPr/>
+        </p:nvSpPr>
+        <p:spPr>
+          <a:xfrm>
+            <a:off x="7772400" y="4796028"/>
+            <a:ext cx="1097280" cy="274320"/>
+          </a:xfrm>
+          <a:prstGeom prst="rect">
+            <a:avLst/>
+          </a:prstGeom>
+          <a:noFill/>
+          <a:ln/>
+        </p:spPr>
+        <p:txBody>
+          <a:bodyPr wrap="square" rtlCol="0" anchor="ctr">
+            <a:normAutofit/>
+          </a:bodyPr>
+          <a:lstStyle/>
+          <a:p>
+            <a:pPr algn="r" indent="0" marL="0">
+              <a:buNone/>
+            </a:pPr>
+            <a:r>
+              <a:rPr lang="en-US" sz="1000" dirty="0">
+                <a:solidFill>
+                  <a:srgbClr val="9CA3AF"/>
+                </a:solidFill>
+                <a:latin typeface="Calibri" pitchFamily="34" charset="0"/>
+                <a:ea typeface="Calibri" pitchFamily="34" charset="-122"/>
+                <a:cs typeface="Calibri" pitchFamily="34" charset="-120"/>
+              </a:rPr>
+              <a:t>10 / 12</a:t>
+            </a:r>
+            <a:endParaRPr lang="en-US" sz="1000" dirty="0"/>
+          </a:p>
+        </p:txBody>
+      </p:sp>
+      <p:sp>
+        <p:nvSpPr>
+          <p:cNvPr id="8" name="Text 6"/>
+          <p:cNvSpPr/>
+          <p:nvPr/>
+        </p:nvSpPr>
+        <p:spPr>
+          <a:xfrm>
+            <a:off x="685800" y="4796028"/>
+            <a:ext cx="1828800" cy="274320"/>
+          </a:xfrm>
+          <a:prstGeom prst="rect">
+            <a:avLst/>
+          </a:prstGeom>
+          <a:noFill/>
+          <a:ln/>
+        </p:spPr>
+        <p:txBody>
+          <a:bodyPr wrap="square" rtlCol="0" anchor="ctr">
+            <a:normAutofit/>
+          </a:bodyPr>
           <a:lstStyle/>
           <a:p>
             <a:pPr algn="l" indent="0" marL="0">
               <a:buNone/>
             </a:pPr>
             <a:r>
-              <a:rPr lang="en-US" sz="4400" b="1" dirty="0">
+              <a:rPr lang="en-US" sz="1000" dirty="0">
+                <a:solidFill>
+                  <a:srgbClr val="9CA3AF"/>
+                </a:solidFill>
+                <a:latin typeface="Calibri" pitchFamily="34" charset="0"/>
+                <a:ea typeface="Calibri" pitchFamily="34" charset="-122"/>
+                <a:cs typeface="Calibri" pitchFamily="34" charset="-120"/>
+              </a:rPr>
+              <a:t>P-03</a:t>
+            </a:r>
+            <a:endParaRPr lang="en-US" sz="1000" dirty="0"/>
+          </a:p>
+        </p:txBody>
+      </p:sp>
+      <p:sp>
+        <p:nvSpPr>
+          <p:cNvPr id="9" name="Shape 7"/>
+          <p:cNvSpPr/>
+          <p:nvPr/>
+        </p:nvSpPr>
+        <p:spPr>
+          <a:xfrm>
+            <a:off x="868680" y="914400"/>
+            <a:ext cx="2286000" cy="1828800"/>
+          </a:xfrm>
+          <a:prstGeom prst="rect">
+            <a:avLst>
+              <a:gd name="adj" fmla="val 2500"/>
+            </a:avLst>
+          </a:prstGeom>
+          <a:solidFill>
+            <a:srgbClr val="DBEAFE"/>
+          </a:solidFill>
+          <a:ln w="12700">
+            <a:solidFill>
+              <a:srgbClr val="2563EB"/>
+            </a:solidFill>
+            <a:prstDash val="solid"/>
+          </a:ln>
+        </p:spPr>
+      </p:sp>
+      <p:sp>
+        <p:nvSpPr>
+          <p:cNvPr id="10" name="Text 8"/>
+          <p:cNvSpPr/>
+          <p:nvPr/>
+        </p:nvSpPr>
+        <p:spPr>
+          <a:xfrm>
+            <a:off x="868680" y="1143000"/>
+            <a:ext cx="2286000" cy="320040"/>
+          </a:xfrm>
+          <a:prstGeom prst="rect">
+            <a:avLst/>
+          </a:prstGeom>
+          <a:noFill/>
+          <a:ln/>
+        </p:spPr>
+        <p:txBody>
+          <a:bodyPr wrap="square" rtlCol="0" anchor="ctr">
+            <a:normAutofit/>
+          </a:bodyPr>
+          <a:lstStyle/>
+          <a:p>
+            <a:pPr algn="ctr" indent="0" marL="0">
+              <a:buNone/>
+            </a:pPr>
+            <a:r>
+              <a:rPr lang="en-US" sz="1600" b="1" dirty="0">
+                <a:solidFill>
+                  <a:srgbClr val="2563EB"/>
+                </a:solidFill>
+                <a:latin typeface="Calibri" pitchFamily="34" charset="0"/>
+                <a:ea typeface="Calibri" pitchFamily="34" charset="-122"/>
+                <a:cs typeface="Calibri" pitchFamily="34" charset="-120"/>
+              </a:rPr>
+              <a:t>Step 1</a:t>
+            </a:r>
+            <a:endParaRPr lang="en-US" sz="1600" dirty="0"/>
+          </a:p>
+        </p:txBody>
+      </p:sp>
+      <p:sp>
+        <p:nvSpPr>
+          <p:cNvPr id="11" name="Text 9"/>
+          <p:cNvSpPr/>
+          <p:nvPr/>
+        </p:nvSpPr>
+        <p:spPr>
+          <a:xfrm>
+            <a:off x="1005840" y="1508760"/>
+            <a:ext cx="2011680" cy="1051560"/>
+          </a:xfrm>
+          <a:prstGeom prst="rect">
+            <a:avLst/>
+          </a:prstGeom>
+          <a:noFill/>
+          <a:ln/>
+        </p:spPr>
+        <p:txBody>
+          <a:bodyPr wrap="square" rtlCol="0" anchor="ctr">
+            <a:normAutofit/>
+          </a:bodyPr>
+          <a:lstStyle/>
+          <a:p>
+            <a:pPr algn="ctr" indent="0" marL="0">
+              <a:lnSpc>
+                <a:spcPct val="130000"/>
+              </a:lnSpc>
+              <a:buNone/>
+            </a:pPr>
+            <a:r>
+              <a:rPr lang="en-US" sz="1400" dirty="0">
+                <a:solidFill>
+                  <a:srgbClr val="374151"/>
+                </a:solidFill>
+                <a:latin typeface="Calibri" pitchFamily="34" charset="0"/>
+                <a:ea typeface="Calibri" pitchFamily="34" charset="-122"/>
+                <a:cs typeface="Calibri" pitchFamily="34" charset="-120"/>
+              </a:rPr>
+              <a:t>成功提案書を</a:t>
+            </a:r>
+            <a:endParaRPr lang="en-US" sz="1400" dirty="0"/>
+          </a:p>
+          <a:p>
+            <a:pPr algn="ctr" indent="0" marL="0">
+              <a:lnSpc>
+                <a:spcPct val="130000"/>
+              </a:lnSpc>
+              <a:buNone/>
+            </a:pPr>
+            <a:r>
+              <a:rPr lang="en-US" sz="1400" dirty="0">
+                <a:solidFill>
+                  <a:srgbClr val="374151"/>
+                </a:solidFill>
+                <a:latin typeface="Calibri" pitchFamily="34" charset="0"/>
+                <a:ea typeface="Calibri" pitchFamily="34" charset="-122"/>
+                <a:cs typeface="Calibri" pitchFamily="34" charset="-120"/>
+              </a:rPr>
+              <a:t>ドライブにまとめる</a:t>
+            </a:r>
+            <a:endParaRPr lang="en-US" sz="1400" dirty="0"/>
+          </a:p>
+        </p:txBody>
+      </p:sp>
+      <p:sp>
+        <p:nvSpPr>
+          <p:cNvPr id="12" name="Shape 10"/>
+          <p:cNvSpPr/>
+          <p:nvPr/>
+        </p:nvSpPr>
+        <p:spPr>
+          <a:xfrm>
+            <a:off x="3429000" y="914400"/>
+            <a:ext cx="2286000" cy="1828800"/>
+          </a:xfrm>
+          <a:prstGeom prst="rect">
+            <a:avLst>
+              <a:gd name="adj" fmla="val 2500"/>
+            </a:avLst>
+          </a:prstGeom>
+          <a:solidFill>
+            <a:srgbClr val="D1FAE5"/>
+          </a:solidFill>
+          <a:ln w="12700">
+            <a:solidFill>
+              <a:srgbClr val="059669"/>
+            </a:solidFill>
+            <a:prstDash val="solid"/>
+          </a:ln>
+        </p:spPr>
+      </p:sp>
+      <p:sp>
+        <p:nvSpPr>
+          <p:cNvPr id="13" name="Text 11"/>
+          <p:cNvSpPr/>
+          <p:nvPr/>
+        </p:nvSpPr>
+        <p:spPr>
+          <a:xfrm>
+            <a:off x="3429000" y="1143000"/>
+            <a:ext cx="2286000" cy="320040"/>
+          </a:xfrm>
+          <a:prstGeom prst="rect">
+            <a:avLst/>
+          </a:prstGeom>
+          <a:noFill/>
+          <a:ln/>
+        </p:spPr>
+        <p:txBody>
+          <a:bodyPr wrap="square" rtlCol="0" anchor="ctr">
+            <a:normAutofit/>
+          </a:bodyPr>
+          <a:lstStyle/>
+          <a:p>
+            <a:pPr algn="ctr" indent="0" marL="0">
+              <a:buNone/>
+            </a:pPr>
+            <a:r>
+              <a:rPr lang="en-US" sz="1600" b="1" dirty="0">
+                <a:solidFill>
+                  <a:srgbClr val="059669"/>
+                </a:solidFill>
+                <a:latin typeface="Calibri" pitchFamily="34" charset="0"/>
+                <a:ea typeface="Calibri" pitchFamily="34" charset="-122"/>
+                <a:cs typeface="Calibri" pitchFamily="34" charset="-120"/>
+              </a:rPr>
+              <a:t>Step 2</a:t>
+            </a:r>
+            <a:endParaRPr lang="en-US" sz="1600" dirty="0"/>
+          </a:p>
+        </p:txBody>
+      </p:sp>
+      <p:sp>
+        <p:nvSpPr>
+          <p:cNvPr id="14" name="Text 12"/>
+          <p:cNvSpPr/>
+          <p:nvPr/>
+        </p:nvSpPr>
+        <p:spPr>
+          <a:xfrm>
+            <a:off x="3566160" y="1508760"/>
+            <a:ext cx="2011680" cy="1051560"/>
+          </a:xfrm>
+          <a:prstGeom prst="rect">
+            <a:avLst/>
+          </a:prstGeom>
+          <a:noFill/>
+          <a:ln/>
+        </p:spPr>
+        <p:txBody>
+          <a:bodyPr wrap="square" rtlCol="0" anchor="ctr">
+            <a:normAutofit/>
+          </a:bodyPr>
+          <a:lstStyle/>
+          <a:p>
+            <a:pPr algn="ctr" indent="0" marL="0">
+              <a:lnSpc>
+                <a:spcPct val="130000"/>
+              </a:lnSpc>
+              <a:buNone/>
+            </a:pPr>
+            <a:r>
+              <a:rPr lang="en-US" sz="1400" dirty="0">
+                <a:solidFill>
+                  <a:srgbClr val="374151"/>
+                </a:solidFill>
+                <a:latin typeface="Calibri" pitchFamily="34" charset="0"/>
+                <a:ea typeface="Calibri" pitchFamily="34" charset="-122"/>
+                <a:cs typeface="Calibri" pitchFamily="34" charset="-120"/>
+              </a:rPr>
+              <a:t>テンプレートを</a:t>
+            </a:r>
+            <a:endParaRPr lang="en-US" sz="1400" dirty="0"/>
+          </a:p>
+          <a:p>
+            <a:pPr algn="ctr" indent="0" marL="0">
+              <a:lnSpc>
+                <a:spcPct val="130000"/>
+              </a:lnSpc>
+              <a:buNone/>
+            </a:pPr>
+            <a:r>
+              <a:rPr lang="en-US" sz="1400" dirty="0">
+                <a:solidFill>
+                  <a:srgbClr val="374151"/>
+                </a:solidFill>
+                <a:latin typeface="Calibri" pitchFamily="34" charset="0"/>
+                <a:ea typeface="Calibri" pitchFamily="34" charset="-122"/>
+                <a:cs typeface="Calibri" pitchFamily="34" charset="-120"/>
+              </a:rPr>
+              <a:t>Gemini に学習させる</a:t>
+            </a:r>
+            <a:endParaRPr lang="en-US" sz="1400" dirty="0"/>
+          </a:p>
+        </p:txBody>
+      </p:sp>
+      <p:sp>
+        <p:nvSpPr>
+          <p:cNvPr id="15" name="Shape 13"/>
+          <p:cNvSpPr/>
+          <p:nvPr/>
+        </p:nvSpPr>
+        <p:spPr>
+          <a:xfrm>
+            <a:off x="5989320" y="914400"/>
+            <a:ext cx="2286000" cy="1828800"/>
+          </a:xfrm>
+          <a:prstGeom prst="rect">
+            <a:avLst>
+              <a:gd name="adj" fmla="val 2500"/>
+            </a:avLst>
+          </a:prstGeom>
+          <a:solidFill>
+            <a:srgbClr val="FEF3C7"/>
+          </a:solidFill>
+          <a:ln w="12700">
+            <a:solidFill>
+              <a:srgbClr val="D97706"/>
+            </a:solidFill>
+            <a:prstDash val="solid"/>
+          </a:ln>
+        </p:spPr>
+      </p:sp>
+      <p:sp>
+        <p:nvSpPr>
+          <p:cNvPr id="16" name="Text 14"/>
+          <p:cNvSpPr/>
+          <p:nvPr/>
+        </p:nvSpPr>
+        <p:spPr>
+          <a:xfrm>
+            <a:off x="5989320" y="1143000"/>
+            <a:ext cx="2286000" cy="320040"/>
+          </a:xfrm>
+          <a:prstGeom prst="rect">
+            <a:avLst/>
+          </a:prstGeom>
+          <a:noFill/>
+          <a:ln/>
+        </p:spPr>
+        <p:txBody>
+          <a:bodyPr wrap="square" rtlCol="0" anchor="ctr">
+            <a:normAutofit/>
+          </a:bodyPr>
+          <a:lstStyle/>
+          <a:p>
+            <a:pPr algn="ctr" indent="0" marL="0">
+              <a:buNone/>
+            </a:pPr>
+            <a:r>
+              <a:rPr lang="en-US" sz="1600" b="1" dirty="0">
+                <a:solidFill>
+                  <a:srgbClr val="D97706"/>
+                </a:solidFill>
+                <a:latin typeface="Calibri" pitchFamily="34" charset="0"/>
+                <a:ea typeface="Calibri" pitchFamily="34" charset="-122"/>
+                <a:cs typeface="Calibri" pitchFamily="34" charset="-120"/>
+              </a:rPr>
+              <a:t>Step 3</a:t>
+            </a:r>
+            <a:endParaRPr lang="en-US" sz="1600" dirty="0"/>
+          </a:p>
+        </p:txBody>
+      </p:sp>
+      <p:sp>
+        <p:nvSpPr>
+          <p:cNvPr id="17" name="Text 15"/>
+          <p:cNvSpPr/>
+          <p:nvPr/>
+        </p:nvSpPr>
+        <p:spPr>
+          <a:xfrm>
+            <a:off x="6126480" y="1508760"/>
+            <a:ext cx="2011680" cy="1051560"/>
+          </a:xfrm>
+          <a:prstGeom prst="rect">
+            <a:avLst/>
+          </a:prstGeom>
+          <a:noFill/>
+          <a:ln/>
+        </p:spPr>
+        <p:txBody>
+          <a:bodyPr wrap="square" rtlCol="0" anchor="ctr">
+            <a:normAutofit/>
+          </a:bodyPr>
+          <a:lstStyle/>
+          <a:p>
+            <a:pPr algn="ctr" indent="0" marL="0">
+              <a:lnSpc>
+                <a:spcPct val="130000"/>
+              </a:lnSpc>
+              <a:buNone/>
+            </a:pPr>
+            <a:r>
+              <a:rPr lang="en-US" sz="1400" dirty="0">
+                <a:solidFill>
+                  <a:srgbClr val="374151"/>
+                </a:solidFill>
+                <a:latin typeface="Calibri" pitchFamily="34" charset="0"/>
+                <a:ea typeface="Calibri" pitchFamily="34" charset="-122"/>
+                <a:cs typeface="Calibri" pitchFamily="34" charset="-120"/>
+              </a:rPr>
+              <a:t>小さく試しながら</a:t>
+            </a:r>
+            <a:endParaRPr lang="en-US" sz="1400" dirty="0"/>
+          </a:p>
+          <a:p>
+            <a:pPr algn="ctr" indent="0" marL="0">
+              <a:lnSpc>
+                <a:spcPct val="130000"/>
+              </a:lnSpc>
+              <a:buNone/>
+            </a:pPr>
+            <a:r>
+              <a:rPr lang="en-US" sz="1400" dirty="0">
+                <a:solidFill>
+                  <a:srgbClr val="374151"/>
+                </a:solidFill>
+                <a:latin typeface="Calibri" pitchFamily="34" charset="0"/>
+                <a:ea typeface="Calibri" pitchFamily="34" charset="-122"/>
+                <a:cs typeface="Calibri" pitchFamily="34" charset="-120"/>
+              </a:rPr>
+              <a:t>プロセスを最適化</a:t>
+            </a:r>
+            <a:endParaRPr lang="en-US" sz="1400" dirty="0"/>
+          </a:p>
+        </p:txBody>
+      </p:sp>
+    </p:spTree>
+  </p:cSld>
+  <p:clrMapOvr>
+    <a:masterClrMapping/>
+  </p:clrMapOvr>
+</p:sld>
+</file>
+
+<file path=ppt/slides/slide11.xml><?xml version="1.0" encoding="utf-8"?>
+<p:sld xmlns:a="http://schemas.openxmlformats.org/drawingml/2006/main" xmlns:r="http://schemas.openxmlformats.org/officeDocument/2006/relationships" xmlns:p="http://schemas.openxmlformats.org/presentationml/2006/main">
+  <p:cSld name="Slide 11">
+    <p:bg>
+      <p:bgPr>
+        <a:solidFill>
+          <a:srgbClr val="1B2A4A"/>
+        </a:solidFill>
+      </p:bgPr>
+    </p:bg>
+    <p:spTree>
+      <p:nvGrpSpPr>
+        <p:cNvPr id="1" name=""/>
+        <p:cNvGrpSpPr/>
+        <p:nvPr/>
+      </p:nvGrpSpPr>
+      <p:grpSpPr>
+        <a:xfrm>
+          <a:off x="0" y="0"/>
+          <a:ext cx="0" cy="0"/>
+          <a:chOff x="0" y="0"/>
+          <a:chExt cx="0" cy="0"/>
+        </a:xfrm>
+      </p:grpSpPr>
+      <p:sp>
+        <p:nvSpPr>
+          <p:cNvPr id="2" name="Text 0"/>
+          <p:cNvSpPr/>
+          <p:nvPr/>
+        </p:nvSpPr>
+        <p:spPr>
+          <a:xfrm>
+            <a:off x="457200" y="457200"/>
+            <a:ext cx="8229600" cy="548640"/>
+          </a:xfrm>
+          <a:prstGeom prst="rect">
+            <a:avLst/>
+          </a:prstGeom>
+          <a:noFill/>
+          <a:ln/>
+        </p:spPr>
+        <p:txBody>
+          <a:bodyPr wrap="square" rtlCol="0" anchor="ctr">
+            <a:normAutofit/>
+          </a:bodyPr>
+          <a:lstStyle/>
+          <a:p>
+            <a:pPr algn="ctr" indent="0" marL="0">
+              <a:buNone/>
+            </a:pPr>
+            <a:r>
+              <a:rPr lang="en-US" sz="2400" b="1" dirty="0">
                 <a:solidFill>
                   <a:srgbClr val="FFFFFF"/>
                 </a:solidFill>
@@ -1442,9 +2724,9 @@
                 <a:ea typeface="Calibri" pitchFamily="34" charset="-122"/>
                 <a:cs typeface="Calibri" pitchFamily="34" charset="-120"/>
               </a:rPr>
-              <a:t>営業・企画業務の効率化</a:t>
-            </a:r>
-            <a:endParaRPr lang="en-US" sz="4400" dirty="0"/>
+              <a:t>まとめ</a:t>
+            </a:r>
+            <a:endParaRPr lang="en-US" sz="2400" dirty="0"/>
           </a:p>
         </p:txBody>
       </p:sp>
@@ -1456,36 +2738,491 @@
         </p:nvSpPr>
         <p:spPr>
           <a:xfrm>
-            <a:off x="685800" y="2560320"/>
-            <a:ext cx="7772400" cy="914400"/>
-          </a:xfrm>
-          <a:prstGeom prst="rect">
-            <a:avLst/>
-          </a:prstGeom>
-          <a:noFill/>
-          <a:ln/>
-        </p:spPr>
-        <p:txBody>
-          <a:bodyPr wrap="square" rtlCol="0" anchor="ctr"/>
+            <a:off x="2286000" y="1371600"/>
+            <a:ext cx="457200" cy="457200"/>
+          </a:xfrm>
+          <a:prstGeom prst="ellipse">
+            <a:avLst/>
+          </a:prstGeom>
+          <a:solidFill>
+            <a:srgbClr val="93C5FD"/>
+          </a:solidFill>
+          <a:ln/>
+        </p:spPr>
+        <p:txBody>
+          <a:bodyPr wrap="square" rtlCol="0" anchor="ctr">
+            <a:normAutofit/>
+          </a:bodyPr>
+          <a:lstStyle/>
+          <a:p>
+            <a:pPr algn="ctr" indent="0" marL="0">
+              <a:buNone/>
+            </a:pPr>
+            <a:r>
+              <a:rPr lang="en-US" sz="2000" b="1" dirty="0">
+                <a:solidFill>
+                  <a:srgbClr val="1B2A4A"/>
+                </a:solidFill>
+                <a:latin typeface="Calibri" pitchFamily="34" charset="0"/>
+                <a:ea typeface="Calibri" pitchFamily="34" charset="-122"/>
+                <a:cs typeface="Calibri" pitchFamily="34" charset="-120"/>
+              </a:rPr>
+              <a:t>1</a:t>
+            </a:r>
+            <a:endParaRPr lang="en-US" sz="2000" dirty="0"/>
+          </a:p>
+        </p:txBody>
+      </p:sp>
+      <p:sp>
+        <p:nvSpPr>
+          <p:cNvPr id="4" name="Text 2"/>
+          <p:cNvSpPr/>
+          <p:nvPr/>
+        </p:nvSpPr>
+        <p:spPr>
+          <a:xfrm>
+            <a:off x="2926080" y="1371600"/>
+            <a:ext cx="4572000" cy="457200"/>
+          </a:xfrm>
+          <a:prstGeom prst="rect">
+            <a:avLst/>
+          </a:prstGeom>
+          <a:noFill/>
+          <a:ln/>
+        </p:spPr>
+        <p:txBody>
+          <a:bodyPr wrap="square" rtlCol="0" anchor="ctr">
+            <a:normAutofit/>
+          </a:bodyPr>
+          <a:lstStyle/>
+          <a:p>
+            <a:pPr indent="0" marL="0">
+              <a:buNone/>
+            </a:pPr>
+            <a:r>
+              <a:rPr lang="en-US" sz="1600" dirty="0">
+                <a:solidFill>
+                  <a:srgbClr val="FFFFFF"/>
+                </a:solidFill>
+                <a:latin typeface="Calibri" pitchFamily="34" charset="0"/>
+                <a:ea typeface="Calibri" pitchFamily="34" charset="-122"/>
+                <a:cs typeface="Calibri" pitchFamily="34" charset="-120"/>
+              </a:rPr>
+              <a:t>提案書作成が 3 日 → 数分に短縮。営業が顧客対応に時間を使える</a:t>
+            </a:r>
+            <a:endParaRPr lang="en-US" sz="1600" dirty="0"/>
+          </a:p>
+        </p:txBody>
+      </p:sp>
+      <p:sp>
+        <p:nvSpPr>
+          <p:cNvPr id="5" name="Text 3"/>
+          <p:cNvSpPr/>
+          <p:nvPr/>
+        </p:nvSpPr>
+        <p:spPr>
+          <a:xfrm>
+            <a:off x="2286000" y="2286000"/>
+            <a:ext cx="457200" cy="457200"/>
+          </a:xfrm>
+          <a:prstGeom prst="ellipse">
+            <a:avLst/>
+          </a:prstGeom>
+          <a:solidFill>
+            <a:srgbClr val="93C5FD"/>
+          </a:solidFill>
+          <a:ln/>
+        </p:spPr>
+        <p:txBody>
+          <a:bodyPr wrap="square" rtlCol="0" anchor="ctr">
+            <a:normAutofit/>
+          </a:bodyPr>
+          <a:lstStyle/>
+          <a:p>
+            <a:pPr algn="ctr" indent="0" marL="0">
+              <a:buNone/>
+            </a:pPr>
+            <a:r>
+              <a:rPr lang="en-US" sz="2000" b="1" dirty="0">
+                <a:solidFill>
+                  <a:srgbClr val="1B2A4A"/>
+                </a:solidFill>
+                <a:latin typeface="Calibri" pitchFamily="34" charset="0"/>
+                <a:ea typeface="Calibri" pitchFamily="34" charset="-122"/>
+                <a:cs typeface="Calibri" pitchFamily="34" charset="-120"/>
+              </a:rPr>
+              <a:t>2</a:t>
+            </a:r>
+            <a:endParaRPr lang="en-US" sz="2000" dirty="0"/>
+          </a:p>
+        </p:txBody>
+      </p:sp>
+      <p:sp>
+        <p:nvSpPr>
+          <p:cNvPr id="6" name="Text 4"/>
+          <p:cNvSpPr/>
+          <p:nvPr/>
+        </p:nvSpPr>
+        <p:spPr>
+          <a:xfrm>
+            <a:off x="2926080" y="2286000"/>
+            <a:ext cx="4572000" cy="457200"/>
+          </a:xfrm>
+          <a:prstGeom prst="rect">
+            <a:avLst/>
+          </a:prstGeom>
+          <a:noFill/>
+          <a:ln/>
+        </p:spPr>
+        <p:txBody>
+          <a:bodyPr wrap="square" rtlCol="0" anchor="ctr">
+            <a:normAutofit/>
+          </a:bodyPr>
+          <a:lstStyle/>
+          <a:p>
+            <a:pPr indent="0" marL="0">
+              <a:buNone/>
+            </a:pPr>
+            <a:r>
+              <a:rPr lang="en-US" sz="1600" dirty="0">
+                <a:solidFill>
+                  <a:srgbClr val="FFFFFF"/>
+                </a:solidFill>
+                <a:latin typeface="Calibri" pitchFamily="34" charset="0"/>
+                <a:ea typeface="Calibri" pitchFamily="34" charset="-122"/>
+                <a:cs typeface="Calibri" pitchFamily="34" charset="-120"/>
+              </a:rPr>
+              <a:t>テンプレート品質が高いほど、AI の提案精度が向上</a:t>
+            </a:r>
+            <a:endParaRPr lang="en-US" sz="1600" dirty="0"/>
+          </a:p>
+        </p:txBody>
+      </p:sp>
+      <p:sp>
+        <p:nvSpPr>
+          <p:cNvPr id="7" name="Text 5"/>
+          <p:cNvSpPr/>
+          <p:nvPr/>
+        </p:nvSpPr>
+        <p:spPr>
+          <a:xfrm>
+            <a:off x="2286000" y="3200400"/>
+            <a:ext cx="457200" cy="457200"/>
+          </a:xfrm>
+          <a:prstGeom prst="ellipse">
+            <a:avLst/>
+          </a:prstGeom>
+          <a:solidFill>
+            <a:srgbClr val="93C5FD"/>
+          </a:solidFill>
+          <a:ln/>
+        </p:spPr>
+        <p:txBody>
+          <a:bodyPr wrap="square" rtlCol="0" anchor="ctr">
+            <a:normAutofit/>
+          </a:bodyPr>
+          <a:lstStyle/>
+          <a:p>
+            <a:pPr algn="ctr" indent="0" marL="0">
+              <a:buNone/>
+            </a:pPr>
+            <a:r>
+              <a:rPr lang="en-US" sz="2000" b="1" dirty="0">
+                <a:solidFill>
+                  <a:srgbClr val="1B2A4A"/>
+                </a:solidFill>
+                <a:latin typeface="Calibri" pitchFamily="34" charset="0"/>
+                <a:ea typeface="Calibri" pitchFamily="34" charset="-122"/>
+                <a:cs typeface="Calibri" pitchFamily="34" charset="-120"/>
+              </a:rPr>
+              <a:t>3</a:t>
+            </a:r>
+            <a:endParaRPr lang="en-US" sz="2000" dirty="0"/>
+          </a:p>
+        </p:txBody>
+      </p:sp>
+      <p:sp>
+        <p:nvSpPr>
+          <p:cNvPr id="8" name="Text 6"/>
+          <p:cNvSpPr/>
+          <p:nvPr/>
+        </p:nvSpPr>
+        <p:spPr>
+          <a:xfrm>
+            <a:off x="2926080" y="3200400"/>
+            <a:ext cx="4572000" cy="457200"/>
+          </a:xfrm>
+          <a:prstGeom prst="rect">
+            <a:avLst/>
+          </a:prstGeom>
+          <a:noFill/>
+          <a:ln/>
+        </p:spPr>
+        <p:txBody>
+          <a:bodyPr wrap="square" rtlCol="0" anchor="ctr">
+            <a:normAutofit/>
+          </a:bodyPr>
+          <a:lstStyle/>
+          <a:p>
+            <a:pPr indent="0" marL="0">
+              <a:buNone/>
+            </a:pPr>
+            <a:r>
+              <a:rPr lang="en-US" sz="1600" dirty="0">
+                <a:solidFill>
+                  <a:srgbClr val="FFFFFF"/>
+                </a:solidFill>
+                <a:latin typeface="Calibri" pitchFamily="34" charset="0"/>
+                <a:ea typeface="Calibri" pitchFamily="34" charset="-122"/>
+                <a:cs typeface="Calibri" pitchFamily="34" charset="-120"/>
+              </a:rPr>
+              <a:t>同じ営業人数で 2.5 倍の提案件数を作成可能 → 売上 15% 向上</a:t>
+            </a:r>
+            <a:endParaRPr lang="en-US" sz="1600" dirty="0"/>
+          </a:p>
+        </p:txBody>
+      </p:sp>
+      <p:sp>
+        <p:nvSpPr>
+          <p:cNvPr id="9" name="Shape 7"/>
+          <p:cNvSpPr/>
+          <p:nvPr/>
+        </p:nvSpPr>
+        <p:spPr>
+          <a:xfrm>
+            <a:off x="685800" y="4777740"/>
+            <a:ext cx="7772400" cy="0"/>
+          </a:xfrm>
+          <a:prstGeom prst="line">
+            <a:avLst/>
+          </a:prstGeom>
+          <a:noFill/>
+          <a:ln w="6350">
+            <a:solidFill>
+              <a:srgbClr val="E5E7EB"/>
+            </a:solidFill>
+            <a:prstDash val="solid"/>
+          </a:ln>
+        </p:spPr>
+      </p:sp>
+      <p:sp>
+        <p:nvSpPr>
+          <p:cNvPr id="10" name="Text 8"/>
+          <p:cNvSpPr/>
+          <p:nvPr/>
+        </p:nvSpPr>
+        <p:spPr>
+          <a:xfrm>
+            <a:off x="7772400" y="4796028"/>
+            <a:ext cx="1097280" cy="274320"/>
+          </a:xfrm>
+          <a:prstGeom prst="rect">
+            <a:avLst/>
+          </a:prstGeom>
+          <a:noFill/>
+          <a:ln/>
+        </p:spPr>
+        <p:txBody>
+          <a:bodyPr wrap="square" rtlCol="0" anchor="ctr">
+            <a:normAutofit/>
+          </a:bodyPr>
+          <a:lstStyle/>
+          <a:p>
+            <a:pPr algn="r" indent="0" marL="0">
+              <a:buNone/>
+            </a:pPr>
+            <a:r>
+              <a:rPr lang="en-US" sz="1000" dirty="0">
+                <a:solidFill>
+                  <a:srgbClr val="9CA3AF"/>
+                </a:solidFill>
+                <a:latin typeface="Calibri" pitchFamily="34" charset="0"/>
+                <a:ea typeface="Calibri" pitchFamily="34" charset="-122"/>
+                <a:cs typeface="Calibri" pitchFamily="34" charset="-120"/>
+              </a:rPr>
+              <a:t>11 / 12</a:t>
+            </a:r>
+            <a:endParaRPr lang="en-US" sz="1000" dirty="0"/>
+          </a:p>
+        </p:txBody>
+      </p:sp>
+      <p:sp>
+        <p:nvSpPr>
+          <p:cNvPr id="11" name="Text 9"/>
+          <p:cNvSpPr/>
+          <p:nvPr/>
+        </p:nvSpPr>
+        <p:spPr>
+          <a:xfrm>
+            <a:off x="685800" y="4796028"/>
+            <a:ext cx="1828800" cy="274320"/>
+          </a:xfrm>
+          <a:prstGeom prst="rect">
+            <a:avLst/>
+          </a:prstGeom>
+          <a:noFill/>
+          <a:ln/>
+        </p:spPr>
+        <p:txBody>
+          <a:bodyPr wrap="square" rtlCol="0" anchor="ctr">
+            <a:normAutofit/>
+          </a:bodyPr>
           <a:lstStyle/>
           <a:p>
             <a:pPr algn="l" indent="0" marL="0">
               <a:buNone/>
             </a:pPr>
             <a:r>
-              <a:rPr lang="en-US" sz="2200" dirty="0">
-                <a:solidFill>
-                  <a:srgbClr val="DBEAFE"/>
-                </a:solidFill>
-                <a:latin typeface="Calibri" pitchFamily="34" charset="0"/>
-                <a:ea typeface="Calibri" pitchFamily="34" charset="-122"/>
-                <a:cs typeface="Calibri" pitchFamily="34" charset="-120"/>
-              </a:rPr>
-              <a:t>Gemini Enterprise で提案書を自動生成する</a:t>
-            </a:r>
-            <a:endParaRPr lang="en-US" sz="2200" dirty="0"/>
-          </a:p>
-        </p:txBody>
+              <a:rPr lang="en-US" sz="1000" dirty="0">
+                <a:solidFill>
+                  <a:srgbClr val="9CA3AF"/>
+                </a:solidFill>
+                <a:latin typeface="Calibri" pitchFamily="34" charset="0"/>
+                <a:ea typeface="Calibri" pitchFamily="34" charset="-122"/>
+                <a:cs typeface="Calibri" pitchFamily="34" charset="-120"/>
+              </a:rPr>
+              <a:t>P-03</a:t>
+            </a:r>
+            <a:endParaRPr lang="en-US" sz="1000" dirty="0"/>
+          </a:p>
+        </p:txBody>
+      </p:sp>
+      <p:sp>
+        <p:nvSpPr>
+          <p:cNvPr id="12" name="Text 10"/>
+          <p:cNvSpPr/>
+          <p:nvPr/>
+        </p:nvSpPr>
+        <p:spPr>
+          <a:xfrm>
+            <a:off x="685800" y="4796028"/>
+            <a:ext cx="1828800" cy="274320"/>
+          </a:xfrm>
+          <a:prstGeom prst="rect">
+            <a:avLst/>
+          </a:prstGeom>
+          <a:noFill/>
+          <a:ln/>
+        </p:spPr>
+        <p:txBody>
+          <a:bodyPr wrap="square" rtlCol="0" anchor="ctr">
+            <a:normAutofit/>
+          </a:bodyPr>
+          <a:lstStyle/>
+          <a:p>
+            <a:pPr algn="l" indent="0" marL="0">
+              <a:buNone/>
+            </a:pPr>
+            <a:r>
+              <a:rPr lang="en-US" sz="1000" dirty="0">
+                <a:solidFill>
+                  <a:srgbClr val="9CA3AF"/>
+                </a:solidFill>
+                <a:latin typeface="Calibri" pitchFamily="34" charset="0"/>
+                <a:ea typeface="Calibri" pitchFamily="34" charset="-122"/>
+                <a:cs typeface="Calibri" pitchFamily="34" charset="-120"/>
+              </a:rPr>
+              <a:t>P-03</a:t>
+            </a:r>
+            <a:endParaRPr lang="en-US" sz="1000" dirty="0"/>
+          </a:p>
+        </p:txBody>
+      </p:sp>
+    </p:spTree>
+  </p:cSld>
+  <p:clrMapOvr>
+    <a:masterClrMapping/>
+  </p:clrMapOvr>
+</p:sld>
+</file>
+
+<file path=ppt/slides/slide12.xml><?xml version="1.0" encoding="utf-8"?>
+<p:sld xmlns:a="http://schemas.openxmlformats.org/drawingml/2006/main" xmlns:r="http://schemas.openxmlformats.org/officeDocument/2006/relationships" xmlns:p="http://schemas.openxmlformats.org/presentationml/2006/main">
+  <p:cSld name="Slide 12">
+    <p:bg>
+      <p:bgPr>
+        <a:solidFill>
+          <a:srgbClr val="1B2A4A"/>
+        </a:solidFill>
+      </p:bgPr>
+    </p:bg>
+    <p:spTree>
+      <p:nvGrpSpPr>
+        <p:cNvPr id="1" name=""/>
+        <p:cNvGrpSpPr/>
+        <p:nvPr/>
+      </p:nvGrpSpPr>
+      <p:grpSpPr>
+        <a:xfrm>
+          <a:off x="0" y="0"/>
+          <a:ext cx="0" cy="0"/>
+          <a:chOff x="0" y="0"/>
+          <a:chExt cx="0" cy="0"/>
+        </a:xfrm>
+      </p:grpSpPr>
+      <p:sp>
+        <p:nvSpPr>
+          <p:cNvPr id="2" name="Text 0"/>
+          <p:cNvSpPr/>
+          <p:nvPr/>
+        </p:nvSpPr>
+        <p:spPr>
+          <a:xfrm>
+            <a:off x="457200" y="1645920"/>
+            <a:ext cx="8229600" cy="640080"/>
+          </a:xfrm>
+          <a:prstGeom prst="rect">
+            <a:avLst/>
+          </a:prstGeom>
+          <a:noFill/>
+          <a:ln/>
+        </p:spPr>
+        <p:txBody>
+          <a:bodyPr wrap="square" rtlCol="0" anchor="ctr">
+            <a:normAutofit/>
+          </a:bodyPr>
+          <a:lstStyle/>
+          <a:p>
+            <a:pPr algn="ctr" indent="0" marL="0">
+              <a:buNone/>
+            </a:pPr>
+            <a:r>
+              <a:rPr lang="en-US" sz="4000" b="1" dirty="0">
+                <a:solidFill>
+                  <a:srgbClr val="FFFFFF"/>
+                </a:solidFill>
+                <a:latin typeface="Calibri" pitchFamily="34" charset="0"/>
+                <a:ea typeface="Calibri" pitchFamily="34" charset="-122"/>
+                <a:cs typeface="Calibri" pitchFamily="34" charset="-120"/>
+              </a:rPr>
+              <a:t>P-03 修了</a:t>
+            </a:r>
+            <a:endParaRPr lang="en-US" sz="4000" dirty="0"/>
+          </a:p>
+        </p:txBody>
+      </p:sp>
+      <p:sp>
+        <p:nvSpPr>
+          <p:cNvPr id="3" name="Shape 1"/>
+          <p:cNvSpPr/>
+          <p:nvPr/>
+        </p:nvSpPr>
+        <p:spPr>
+          <a:xfrm>
+            <a:off x="3200400" y="2423160"/>
+            <a:ext cx="2743200" cy="0"/>
+          </a:xfrm>
+          <a:prstGeom prst="line">
+            <a:avLst/>
+          </a:prstGeom>
+          <a:noFill/>
+          <a:ln w="19050">
+            <a:solidFill>
+              <a:srgbClr val="93C5FD"/>
+            </a:solidFill>
+            <a:prstDash val="solid"/>
+          </a:ln>
+        </p:spPr>
       </p:sp>
       <p:sp>
         <p:nvSpPr>
@@ -1495,34 +3232,77 @@
         </p:nvSpPr>
         <p:spPr>
           <a:xfrm>
-            <a:off x="685800" y="4389120"/>
-            <a:ext cx="7772400" cy="457200"/>
-          </a:xfrm>
-          <a:prstGeom prst="rect">
-            <a:avLst/>
-          </a:prstGeom>
-          <a:noFill/>
-          <a:ln/>
-        </p:spPr>
-        <p:txBody>
-          <a:bodyPr wrap="square" rtlCol="0" anchor="ctr"/>
-          <a:lstStyle/>
-          <a:p>
-            <a:pPr algn="l" indent="0" marL="0">
-              <a:buNone/>
-            </a:pPr>
-            <a:r>
-              <a:rPr lang="en-US" sz="1300" dirty="0">
-                <a:solidFill>
-                  <a:srgbClr val="FFFFFF"/>
-                </a:solidFill>
-                <a:latin typeface="Calibri" pitchFamily="34" charset="0"/>
-                <a:ea typeface="Calibri" pitchFamily="34" charset="-122"/>
-                <a:cs typeface="Calibri" pitchFamily="34" charset="-120"/>
-              </a:rPr>
-              <a:t>P-03 | 営業・企画職向け実践 | 12分</a:t>
-            </a:r>
-            <a:endParaRPr lang="en-US" sz="1300" dirty="0"/>
+            <a:off x="457200" y="2560320"/>
+            <a:ext cx="8229600" cy="411480"/>
+          </a:xfrm>
+          <a:prstGeom prst="rect">
+            <a:avLst/>
+          </a:prstGeom>
+          <a:noFill/>
+          <a:ln/>
+        </p:spPr>
+        <p:txBody>
+          <a:bodyPr wrap="square" rtlCol="0" anchor="ctr">
+            <a:normAutofit/>
+          </a:bodyPr>
+          <a:lstStyle/>
+          <a:p>
+            <a:pPr algn="ctr" indent="0" marL="0">
+              <a:buNone/>
+            </a:pPr>
+            <a:r>
+              <a:rPr lang="en-US" sz="2000" dirty="0">
+                <a:solidFill>
+                  <a:srgbClr val="93C5FD"/>
+                </a:solidFill>
+                <a:latin typeface="Calibri" pitchFamily="34" charset="0"/>
+                <a:ea typeface="Calibri" pitchFamily="34" charset="-122"/>
+                <a:cs typeface="Calibri" pitchFamily="34" charset="-120"/>
+              </a:rPr>
+              <a:t>営業効率化は、すぐそこまで来ている</a:t>
+            </a:r>
+            <a:endParaRPr lang="en-US" sz="2000" dirty="0"/>
+          </a:p>
+        </p:txBody>
+      </p:sp>
+      <p:sp>
+        <p:nvSpPr>
+          <p:cNvPr id="5" name="Text 3"/>
+          <p:cNvSpPr/>
+          <p:nvPr/>
+        </p:nvSpPr>
+        <p:spPr>
+          <a:xfrm>
+            <a:off x="457200" y="3474720"/>
+            <a:ext cx="8229600" cy="320040"/>
+          </a:xfrm>
+          <a:prstGeom prst="rect">
+            <a:avLst/>
+          </a:prstGeom>
+          <a:noFill/>
+          <a:ln/>
+        </p:spPr>
+        <p:txBody>
+          <a:bodyPr wrap="square" rtlCol="0" anchor="ctr">
+            <a:normAutofit/>
+          </a:bodyPr>
+          <a:lstStyle/>
+          <a:p>
+            <a:pPr algn="ctr" indent="0" marL="0">
+              <a:buNone/>
+            </a:pPr>
+            <a:r>
+              <a:rPr lang="en-US" sz="1200" dirty="0">
+                <a:solidFill>
+                  <a:srgbClr val="9CA3AF"/>
+                </a:solidFill>
+                <a:latin typeface="Calibri" pitchFamily="34" charset="0"/>
+                <a:ea typeface="Calibri" pitchFamily="34" charset="-122"/>
+                <a:cs typeface="Calibri" pitchFamily="34" charset="-120"/>
+              </a:rPr>
+              <a:t>NEXT → P-04 セキュリティ・対象者ガイド</a:t>
+            </a:r>
+            <a:endParaRPr lang="en-US" sz="1200" dirty="0"/>
           </a:p>
         </p:txBody>
       </p:sp>
@@ -1567,13 +3347,13 @@
         <p:spPr>
           <a:xfrm>
             <a:off x="0" y="0"/>
-            <a:ext cx="9144000" cy="731520"/>
+            <a:ext cx="9144000" cy="32004"/>
           </a:xfrm>
           <a:prstGeom prst="rect">
             <a:avLst/>
           </a:prstGeom>
           <a:solidFill>
-            <a:srgbClr val="1B2A4A"/>
+            <a:srgbClr val="2563EB"/>
           </a:solidFill>
           <a:ln/>
         </p:spPr>
@@ -1587,23 +3367,173 @@
         <p:spPr>
           <a:xfrm>
             <a:off x="685800" y="137160"/>
-            <a:ext cx="7772400" cy="457200"/>
-          </a:xfrm>
-          <a:prstGeom prst="rect">
-            <a:avLst/>
-          </a:prstGeom>
-          <a:noFill/>
-          <a:ln/>
-        </p:spPr>
-        <p:txBody>
-          <a:bodyPr wrap="square" rtlCol="0" anchor="ctr"/>
+            <a:ext cx="7772400" cy="411480"/>
+          </a:xfrm>
+          <a:prstGeom prst="rect">
+            <a:avLst/>
+          </a:prstGeom>
+          <a:noFill/>
+          <a:ln/>
+        </p:spPr>
+        <p:txBody>
+          <a:bodyPr wrap="square" rtlCol="0" anchor="ctr">
+            <a:normAutofit/>
+          </a:bodyPr>
+          <a:lstStyle/>
+          <a:p>
+            <a:pPr indent="0" marL="0">
+              <a:buNone/>
+            </a:pPr>
+            <a:r>
+              <a:rPr lang="en-US" sz="2400" b="1" dirty="0">
+                <a:solidFill>
+                  <a:srgbClr val="111827"/>
+                </a:solidFill>
+                <a:latin typeface="Calibri" pitchFamily="34" charset="0"/>
+                <a:ea typeface="Calibri" pitchFamily="34" charset="-122"/>
+                <a:cs typeface="Calibri" pitchFamily="34" charset="-120"/>
+              </a:rPr>
+              <a:t>今日のゴール</a:t>
+            </a:r>
+            <a:endParaRPr lang="en-US" sz="2400" dirty="0"/>
+          </a:p>
+        </p:txBody>
+      </p:sp>
+      <p:sp>
+        <p:nvSpPr>
+          <p:cNvPr id="4" name="Shape 2"/>
+          <p:cNvSpPr/>
+          <p:nvPr/>
+        </p:nvSpPr>
+        <p:spPr>
+          <a:xfrm>
+            <a:off x="685800" y="4777740"/>
+            <a:ext cx="7772400" cy="0"/>
+          </a:xfrm>
+          <a:prstGeom prst="line">
+            <a:avLst/>
+          </a:prstGeom>
+          <a:noFill/>
+          <a:ln w="6350">
+            <a:solidFill>
+              <a:srgbClr val="E5E7EB"/>
+            </a:solidFill>
+            <a:prstDash val="solid"/>
+          </a:ln>
+        </p:spPr>
+      </p:sp>
+      <p:sp>
+        <p:nvSpPr>
+          <p:cNvPr id="5" name="Text 3"/>
+          <p:cNvSpPr/>
+          <p:nvPr/>
+        </p:nvSpPr>
+        <p:spPr>
+          <a:xfrm>
+            <a:off x="7772400" y="4796028"/>
+            <a:ext cx="1097280" cy="274320"/>
+          </a:xfrm>
+          <a:prstGeom prst="rect">
+            <a:avLst/>
+          </a:prstGeom>
+          <a:noFill/>
+          <a:ln/>
+        </p:spPr>
+        <p:txBody>
+          <a:bodyPr wrap="square" rtlCol="0" anchor="ctr">
+            <a:normAutofit/>
+          </a:bodyPr>
+          <a:lstStyle/>
+          <a:p>
+            <a:pPr algn="r" indent="0" marL="0">
+              <a:buNone/>
+            </a:pPr>
+            <a:r>
+              <a:rPr lang="en-US" sz="1000" dirty="0">
+                <a:solidFill>
+                  <a:srgbClr val="9CA3AF"/>
+                </a:solidFill>
+                <a:latin typeface="Calibri" pitchFamily="34" charset="0"/>
+                <a:ea typeface="Calibri" pitchFamily="34" charset="-122"/>
+                <a:cs typeface="Calibri" pitchFamily="34" charset="-120"/>
+              </a:rPr>
+              <a:t>2 / 12</a:t>
+            </a:r>
+            <a:endParaRPr lang="en-US" sz="1000" dirty="0"/>
+          </a:p>
+        </p:txBody>
+      </p:sp>
+      <p:sp>
+        <p:nvSpPr>
+          <p:cNvPr id="6" name="Text 4"/>
+          <p:cNvSpPr/>
+          <p:nvPr/>
+        </p:nvSpPr>
+        <p:spPr>
+          <a:xfrm>
+            <a:off x="685800" y="4796028"/>
+            <a:ext cx="1828800" cy="274320"/>
+          </a:xfrm>
+          <a:prstGeom prst="rect">
+            <a:avLst/>
+          </a:prstGeom>
+          <a:noFill/>
+          <a:ln/>
+        </p:spPr>
+        <p:txBody>
+          <a:bodyPr wrap="square" rtlCol="0" anchor="ctr">
+            <a:normAutofit/>
+          </a:bodyPr>
           <a:lstStyle/>
           <a:p>
             <a:pPr algn="l" indent="0" marL="0">
               <a:buNone/>
             </a:pPr>
             <a:r>
-              <a:rPr lang="en-US" sz="3200" b="1" dirty="0">
+              <a:rPr lang="en-US" sz="1000" dirty="0">
+                <a:solidFill>
+                  <a:srgbClr val="9CA3AF"/>
+                </a:solidFill>
+                <a:latin typeface="Calibri" pitchFamily="34" charset="0"/>
+                <a:ea typeface="Calibri" pitchFamily="34" charset="-122"/>
+                <a:cs typeface="Calibri" pitchFamily="34" charset="-120"/>
+              </a:rPr>
+              <a:t>P-03</a:t>
+            </a:r>
+            <a:endParaRPr lang="en-US" sz="1000" dirty="0"/>
+          </a:p>
+        </p:txBody>
+      </p:sp>
+      <p:sp>
+        <p:nvSpPr>
+          <p:cNvPr id="7" name="Text 5"/>
+          <p:cNvSpPr/>
+          <p:nvPr/>
+        </p:nvSpPr>
+        <p:spPr>
+          <a:xfrm>
+            <a:off x="685800" y="960120"/>
+            <a:ext cx="457200" cy="457200"/>
+          </a:xfrm>
+          <a:prstGeom prst="ellipse">
+            <a:avLst/>
+          </a:prstGeom>
+          <a:solidFill>
+            <a:srgbClr val="2563EB"/>
+          </a:solidFill>
+          <a:ln/>
+        </p:spPr>
+        <p:txBody>
+          <a:bodyPr wrap="square" rtlCol="0" anchor="ctr">
+            <a:normAutofit/>
+          </a:bodyPr>
+          <a:lstStyle/>
+          <a:p>
+            <a:pPr algn="ctr" indent="0" marL="0">
+              <a:buNone/>
+            </a:pPr>
+            <a:r>
+              <a:rPr lang="en-US" sz="2000" b="1" dirty="0">
                 <a:solidFill>
                   <a:srgbClr val="FFFFFF"/>
                 </a:solidFill>
@@ -1611,38 +3541,40 @@
                 <a:ea typeface="Calibri" pitchFamily="34" charset="-122"/>
                 <a:cs typeface="Calibri" pitchFamily="34" charset="-120"/>
               </a:rPr>
-              <a:t>なぜ提案書作成に時間がかかる？</a:t>
-            </a:r>
-            <a:endParaRPr lang="en-US" sz="3200" dirty="0"/>
-          </a:p>
-        </p:txBody>
-      </p:sp>
-      <p:sp>
-        <p:nvSpPr>
-          <p:cNvPr id="4" name="Text 2"/>
-          <p:cNvSpPr/>
-          <p:nvPr/>
-        </p:nvSpPr>
-        <p:spPr>
-          <a:xfrm>
-            <a:off x="685800" y="1097280"/>
-            <a:ext cx="7772400" cy="365760"/>
-          </a:xfrm>
-          <a:prstGeom prst="rect">
-            <a:avLst/>
-          </a:prstGeom>
-          <a:noFill/>
-          <a:ln/>
-        </p:spPr>
-        <p:txBody>
-          <a:bodyPr wrap="square" rtlCol="0" anchor="ctr"/>
-          <a:lstStyle/>
-          <a:p>
-            <a:pPr algn="l" indent="0" marL="0">
-              <a:buNone/>
-            </a:pPr>
-            <a:r>
-              <a:rPr lang="en-US" sz="1800" b="1" dirty="0">
+              <a:t>1</a:t>
+            </a:r>
+            <a:endParaRPr lang="en-US" sz="2000" dirty="0"/>
+          </a:p>
+        </p:txBody>
+      </p:sp>
+      <p:sp>
+        <p:nvSpPr>
+          <p:cNvPr id="8" name="Text 6"/>
+          <p:cNvSpPr/>
+          <p:nvPr/>
+        </p:nvSpPr>
+        <p:spPr>
+          <a:xfrm>
+            <a:off x="1325880" y="914400"/>
+            <a:ext cx="6858000" cy="548640"/>
+          </a:xfrm>
+          <a:prstGeom prst="rect">
+            <a:avLst/>
+          </a:prstGeom>
+          <a:noFill/>
+          <a:ln/>
+        </p:spPr>
+        <p:txBody>
+          <a:bodyPr wrap="square" rtlCol="0" anchor="ctr">
+            <a:normAutofit/>
+          </a:bodyPr>
+          <a:lstStyle/>
+          <a:p>
+            <a:pPr indent="0" marL="0">
+              <a:buNone/>
+            </a:pPr>
+            <a:r>
+              <a:rPr lang="en-US" sz="1600" dirty="0">
                 <a:solidFill>
                   <a:srgbClr val="111827"/>
                 </a:solidFill>
@@ -1650,46 +3582,114 @@
                 <a:ea typeface="Calibri" pitchFamily="34" charset="-122"/>
                 <a:cs typeface="Calibri" pitchFamily="34" charset="-120"/>
               </a:rPr>
-              <a:t>主な課題</a:t>
-            </a:r>
-            <a:endParaRPr lang="en-US" sz="1800" dirty="0"/>
-          </a:p>
-        </p:txBody>
-      </p:sp>
-      <p:sp>
-        <p:nvSpPr>
-          <p:cNvPr id="5" name="Text 3"/>
-          <p:cNvSpPr/>
-          <p:nvPr/>
-        </p:nvSpPr>
-        <p:spPr>
-          <a:xfrm>
-            <a:off x="1097280" y="1554480"/>
-            <a:ext cx="7315200" cy="457200"/>
-          </a:xfrm>
-          <a:prstGeom prst="rect">
-            <a:avLst/>
-          </a:prstGeom>
-          <a:noFill/>
-          <a:ln/>
-        </p:spPr>
-        <p:txBody>
-          <a:bodyPr wrap="square" rtlCol="0" anchor="t"/>
-          <a:lstStyle/>
-          <a:p>
-            <a:pPr algn="l" indent="0" marL="0">
+              <a:t>提案書作成が 70-80% 削減される仕組みを理解する</a:t>
+            </a:r>
+            <a:endParaRPr lang="en-US" sz="1600" dirty="0"/>
+          </a:p>
+        </p:txBody>
+      </p:sp>
+      <p:sp>
+        <p:nvSpPr>
+          <p:cNvPr id="9" name="Shape 7"/>
+          <p:cNvSpPr/>
+          <p:nvPr/>
+        </p:nvSpPr>
+        <p:spPr>
+          <a:xfrm>
+            <a:off x="685800" y="1645920"/>
+            <a:ext cx="7772400" cy="0"/>
+          </a:xfrm>
+          <a:prstGeom prst="line">
+            <a:avLst/>
+          </a:prstGeom>
+          <a:noFill/>
+          <a:ln w="6350">
+            <a:solidFill>
+              <a:srgbClr val="E5E7EB"/>
+            </a:solidFill>
+            <a:prstDash val="solid"/>
+          </a:ln>
+        </p:spPr>
+      </p:sp>
+      <p:sp>
+        <p:nvSpPr>
+          <p:cNvPr id="10" name="Text 8"/>
+          <p:cNvSpPr/>
+          <p:nvPr/>
+        </p:nvSpPr>
+        <p:spPr>
+          <a:xfrm>
+            <a:off x="685800" y="2011680"/>
+            <a:ext cx="457200" cy="457200"/>
+          </a:xfrm>
+          <a:prstGeom prst="ellipse">
+            <a:avLst/>
+          </a:prstGeom>
+          <a:solidFill>
+            <a:srgbClr val="2563EB"/>
+          </a:solidFill>
+          <a:ln/>
+        </p:spPr>
+        <p:txBody>
+          <a:bodyPr wrap="square" rtlCol="0" anchor="ctr">
+            <a:normAutofit/>
+          </a:bodyPr>
+          <a:lstStyle/>
+          <a:p>
+            <a:pPr algn="ctr" indent="0" marL="0">
+              <a:buNone/>
+            </a:pPr>
+            <a:r>
+              <a:rPr lang="en-US" sz="2000" b="1" dirty="0">
+                <a:solidFill>
+                  <a:srgbClr val="FFFFFF"/>
+                </a:solidFill>
+                <a:latin typeface="Calibri" pitchFamily="34" charset="0"/>
+                <a:ea typeface="Calibri" pitchFamily="34" charset="-122"/>
+                <a:cs typeface="Calibri" pitchFamily="34" charset="-120"/>
+              </a:rPr>
+              <a:t>2</a:t>
+            </a:r>
+            <a:endParaRPr lang="en-US" sz="2000" dirty="0"/>
+          </a:p>
+        </p:txBody>
+      </p:sp>
+      <p:sp>
+        <p:nvSpPr>
+          <p:cNvPr id="11" name="Text 9"/>
+          <p:cNvSpPr/>
+          <p:nvPr/>
+        </p:nvSpPr>
+        <p:spPr>
+          <a:xfrm>
+            <a:off x="1325880" y="1965960"/>
+            <a:ext cx="6858000" cy="548640"/>
+          </a:xfrm>
+          <a:prstGeom prst="rect">
+            <a:avLst/>
+          </a:prstGeom>
+          <a:noFill/>
+          <a:ln/>
+        </p:spPr>
+        <p:txBody>
+          <a:bodyPr wrap="square" rtlCol="0" anchor="ctr">
+            <a:normAutofit/>
+          </a:bodyPr>
+          <a:lstStyle/>
+          <a:p>
+            <a:pPr indent="0" marL="0">
               <a:buNone/>
             </a:pPr>
             <a:r>
               <a:rPr lang="en-US" sz="1600" dirty="0">
                 <a:solidFill>
-                  <a:srgbClr val="374151"/>
-                </a:solidFill>
-                <a:latin typeface="Calibri" pitchFamily="34" charset="0"/>
-                <a:ea typeface="Calibri" pitchFamily="34" charset="-122"/>
-                <a:cs typeface="Calibri" pitchFamily="34" charset="-120"/>
-              </a:rPr>
-              <a:t>顧客情報の整理・分析（1～2時間）</a:t>
+                  <a:srgbClr val="111827"/>
+                </a:solidFill>
+                <a:latin typeface="Calibri" pitchFamily="34" charset="0"/>
+                <a:ea typeface="Calibri" pitchFamily="34" charset="-122"/>
+                <a:cs typeface="Calibri" pitchFamily="34" charset="-120"/>
+              </a:rPr>
+              <a:t>既存テンプレートから新規提案書を自動生成する流れを習得する</a:t>
             </a:r>
             <a:endParaRPr lang="en-US" sz="1600" dirty="0"/>
           </a:p>
@@ -1697,157 +3697,108 @@
       </p:sp>
       <p:sp>
         <p:nvSpPr>
-          <p:cNvPr id="6" name="Text 4"/>
-          <p:cNvSpPr/>
-          <p:nvPr/>
-        </p:nvSpPr>
-        <p:spPr>
-          <a:xfrm>
-            <a:off x="1097280" y="2148840"/>
-            <a:ext cx="7315200" cy="457200"/>
-          </a:xfrm>
-          <a:prstGeom prst="rect">
-            <a:avLst/>
-          </a:prstGeom>
-          <a:noFill/>
-          <a:ln/>
-        </p:spPr>
-        <p:txBody>
-          <a:bodyPr wrap="square" rtlCol="0" anchor="t"/>
-          <a:lstStyle/>
-          <a:p>
-            <a:pPr algn="l" indent="0" marL="0">
+          <p:cNvPr id="12" name="Shape 10"/>
+          <p:cNvSpPr/>
+          <p:nvPr/>
+        </p:nvSpPr>
+        <p:spPr>
+          <a:xfrm>
+            <a:off x="685800" y="2697480"/>
+            <a:ext cx="7772400" cy="0"/>
+          </a:xfrm>
+          <a:prstGeom prst="line">
+            <a:avLst/>
+          </a:prstGeom>
+          <a:noFill/>
+          <a:ln w="6350">
+            <a:solidFill>
+              <a:srgbClr val="E5E7EB"/>
+            </a:solidFill>
+            <a:prstDash val="solid"/>
+          </a:ln>
+        </p:spPr>
+      </p:sp>
+      <p:sp>
+        <p:nvSpPr>
+          <p:cNvPr id="13" name="Text 11"/>
+          <p:cNvSpPr/>
+          <p:nvPr/>
+        </p:nvSpPr>
+        <p:spPr>
+          <a:xfrm>
+            <a:off x="685800" y="3063240"/>
+            <a:ext cx="457200" cy="457200"/>
+          </a:xfrm>
+          <a:prstGeom prst="ellipse">
+            <a:avLst/>
+          </a:prstGeom>
+          <a:solidFill>
+            <a:srgbClr val="2563EB"/>
+          </a:solidFill>
+          <a:ln/>
+        </p:spPr>
+        <p:txBody>
+          <a:bodyPr wrap="square" rtlCol="0" anchor="ctr">
+            <a:normAutofit/>
+          </a:bodyPr>
+          <a:lstStyle/>
+          <a:p>
+            <a:pPr algn="ctr" indent="0" marL="0">
+              <a:buNone/>
+            </a:pPr>
+            <a:r>
+              <a:rPr lang="en-US" sz="2000" b="1" dirty="0">
+                <a:solidFill>
+                  <a:srgbClr val="FFFFFF"/>
+                </a:solidFill>
+                <a:latin typeface="Calibri" pitchFamily="34" charset="0"/>
+                <a:ea typeface="Calibri" pitchFamily="34" charset="-122"/>
+                <a:cs typeface="Calibri" pitchFamily="34" charset="-120"/>
+              </a:rPr>
+              <a:t>3</a:t>
+            </a:r>
+            <a:endParaRPr lang="en-US" sz="2000" dirty="0"/>
+          </a:p>
+        </p:txBody>
+      </p:sp>
+      <p:sp>
+        <p:nvSpPr>
+          <p:cNvPr id="14" name="Text 12"/>
+          <p:cNvSpPr/>
+          <p:nvPr/>
+        </p:nvSpPr>
+        <p:spPr>
+          <a:xfrm>
+            <a:off x="1325880" y="3017520"/>
+            <a:ext cx="6858000" cy="548640"/>
+          </a:xfrm>
+          <a:prstGeom prst="rect">
+            <a:avLst/>
+          </a:prstGeom>
+          <a:noFill/>
+          <a:ln/>
+        </p:spPr>
+        <p:txBody>
+          <a:bodyPr wrap="square" rtlCol="0" anchor="ctr">
+            <a:normAutofit/>
+          </a:bodyPr>
+          <a:lstStyle/>
+          <a:p>
+            <a:pPr indent="0" marL="0">
               <a:buNone/>
             </a:pPr>
             <a:r>
               <a:rPr lang="en-US" sz="1600" dirty="0">
                 <a:solidFill>
-                  <a:srgbClr val="374151"/>
-                </a:solidFill>
-                <a:latin typeface="Calibri" pitchFamily="34" charset="0"/>
-                <a:ea typeface="Calibri" pitchFamily="34" charset="-122"/>
-                <a:cs typeface="Calibri" pitchFamily="34" charset="-120"/>
-              </a:rPr>
-              <a:t>テンプレートのカスタマイズと文章作成</a:t>
+                  <a:srgbClr val="111827"/>
+                </a:solidFill>
+                <a:latin typeface="Calibri" pitchFamily="34" charset="0"/>
+                <a:ea typeface="Calibri" pitchFamily="34" charset="-122"/>
+                <a:cs typeface="Calibri" pitchFamily="34" charset="-120"/>
+              </a:rPr>
+              <a:t>営業効率化による売上向上の実例を学ぶ</a:t>
             </a:r>
             <a:endParaRPr lang="en-US" sz="1600" dirty="0"/>
-          </a:p>
-        </p:txBody>
-      </p:sp>
-      <p:sp>
-        <p:nvSpPr>
-          <p:cNvPr id="7" name="Text 5"/>
-          <p:cNvSpPr/>
-          <p:nvPr/>
-        </p:nvSpPr>
-        <p:spPr>
-          <a:xfrm>
-            <a:off x="1097280" y="2743200"/>
-            <a:ext cx="7315200" cy="457200"/>
-          </a:xfrm>
-          <a:prstGeom prst="rect">
-            <a:avLst/>
-          </a:prstGeom>
-          <a:noFill/>
-          <a:ln/>
-        </p:spPr>
-        <p:txBody>
-          <a:bodyPr wrap="square" rtlCol="0" anchor="t"/>
-          <a:lstStyle/>
-          <a:p>
-            <a:pPr algn="l" indent="0" marL="0">
-              <a:buNone/>
-            </a:pPr>
-            <a:r>
-              <a:rPr lang="en-US" sz="1600" dirty="0">
-                <a:solidFill>
-                  <a:srgbClr val="374151"/>
-                </a:solidFill>
-                <a:latin typeface="Calibri" pitchFamily="34" charset="0"/>
-                <a:ea typeface="Calibri" pitchFamily="34" charset="-122"/>
-                <a:cs typeface="Calibri" pitchFamily="34" charset="-120"/>
-              </a:rPr>
-              <a:t>修正・校正の手作業</a:t>
-            </a:r>
-            <a:endParaRPr lang="en-US" sz="1600" dirty="0"/>
-          </a:p>
-        </p:txBody>
-      </p:sp>
-      <p:sp>
-        <p:nvSpPr>
-          <p:cNvPr id="8" name="Text 6"/>
-          <p:cNvSpPr/>
-          <p:nvPr/>
-        </p:nvSpPr>
-        <p:spPr>
-          <a:xfrm>
-            <a:off x="1097280" y="3337560"/>
-            <a:ext cx="7315200" cy="457200"/>
-          </a:xfrm>
-          <a:prstGeom prst="rect">
-            <a:avLst/>
-          </a:prstGeom>
-          <a:noFill/>
-          <a:ln/>
-        </p:spPr>
-        <p:txBody>
-          <a:bodyPr wrap="square" rtlCol="0" anchor="t"/>
-          <a:lstStyle/>
-          <a:p>
-            <a:pPr algn="l" indent="0" marL="0">
-              <a:buNone/>
-            </a:pPr>
-            <a:r>
-              <a:rPr lang="en-US" sz="1600" dirty="0">
-                <a:solidFill>
-                  <a:srgbClr val="374151"/>
-                </a:solidFill>
-                <a:latin typeface="Calibri" pitchFamily="34" charset="0"/>
-                <a:ea typeface="Calibri" pitchFamily="34" charset="-122"/>
-                <a:cs typeface="Calibri" pitchFamily="34" charset="-120"/>
-              </a:rPr>
-              <a:t>複数案の検討・比較</a:t>
-            </a:r>
-            <a:endParaRPr lang="en-US" sz="1600" dirty="0"/>
-          </a:p>
-        </p:txBody>
-      </p:sp>
-      <p:sp>
-        <p:nvSpPr>
-          <p:cNvPr id="9" name="Text 7"/>
-          <p:cNvSpPr/>
-          <p:nvPr/>
-        </p:nvSpPr>
-        <p:spPr>
-          <a:xfrm>
-            <a:off x="685800" y="3931920"/>
-            <a:ext cx="7772400" cy="320040"/>
-          </a:xfrm>
-          <a:prstGeom prst="rect">
-            <a:avLst/>
-          </a:prstGeom>
-          <a:noFill/>
-          <a:ln/>
-        </p:spPr>
-        <p:txBody>
-          <a:bodyPr wrap="square" rtlCol="0" anchor="ctr"/>
-          <a:lstStyle/>
-          <a:p>
-            <a:pPr algn="l" indent="0" marL="0">
-              <a:buNone/>
-            </a:pPr>
-            <a:r>
-              <a:rPr lang="en-US" sz="1800" dirty="0">
-                <a:solidFill>
-                  <a:srgbClr val="2563EB"/>
-                </a:solidFill>
-                <a:latin typeface="Calibri" pitchFamily="34" charset="0"/>
-                <a:ea typeface="Calibri" pitchFamily="34" charset="-122"/>
-                <a:cs typeface="Calibri" pitchFamily="34" charset="-120"/>
-              </a:rPr>
-              <a:t>結果：初稿だけで 4～6時間（業務全体の 20～30%）</a:t>
-            </a:r>
-            <a:endParaRPr lang="en-US" sz="1800" dirty="0"/>
           </a:p>
         </p:txBody>
       </p:sp>
@@ -1892,121 +3843,325 @@
         <p:spPr>
           <a:xfrm>
             <a:off x="0" y="0"/>
-            <a:ext cx="9144000" cy="731520"/>
+            <a:ext cx="9144000" cy="32004"/>
           </a:xfrm>
           <a:prstGeom prst="rect">
             <a:avLst/>
           </a:prstGeom>
           <a:solidFill>
-            <a:srgbClr val="1B2A4A"/>
+            <a:srgbClr val="2563EB"/>
           </a:solidFill>
           <a:ln/>
         </p:spPr>
       </p:sp>
       <p:sp>
         <p:nvSpPr>
-          <p:cNvPr id="3" name="Text 1"/>
+          <p:cNvPr id="3" name="Shape 1"/>
           <p:cNvSpPr/>
           <p:nvPr/>
         </p:nvSpPr>
         <p:spPr>
           <a:xfrm>
             <a:off x="685800" y="137160"/>
-            <a:ext cx="7772400" cy="457200"/>
-          </a:xfrm>
-          <a:prstGeom prst="rect">
-            <a:avLst/>
-          </a:prstGeom>
-          <a:noFill/>
-          <a:ln/>
-        </p:spPr>
-        <p:txBody>
-          <a:bodyPr wrap="square" rtlCol="0" anchor="ctr"/>
+            <a:ext cx="1463040" cy="256032"/>
+          </a:xfrm>
+          <a:prstGeom prst="rect">
+            <a:avLst>
+              <a:gd name="adj" fmla="val 17857"/>
+            </a:avLst>
+          </a:prstGeom>
+          <a:solidFill>
+            <a:srgbClr val="DBEAFE"/>
+          </a:solidFill>
+          <a:ln/>
+        </p:spPr>
+      </p:sp>
+      <p:sp>
+        <p:nvSpPr>
+          <p:cNvPr id="4" name="Text 2"/>
+          <p:cNvSpPr/>
+          <p:nvPr/>
+        </p:nvSpPr>
+        <p:spPr>
+          <a:xfrm>
+            <a:off x="685800" y="137160"/>
+            <a:ext cx="1463040" cy="256032"/>
+          </a:xfrm>
+          <a:prstGeom prst="rect">
+            <a:avLst/>
+          </a:prstGeom>
+          <a:noFill/>
+          <a:ln/>
+        </p:spPr>
+        <p:txBody>
+          <a:bodyPr wrap="square" rtlCol="0" anchor="ctr">
+            <a:normAutofit/>
+          </a:bodyPr>
+          <a:lstStyle/>
+          <a:p>
+            <a:pPr algn="ctr" indent="0" marL="0">
+              <a:buNone/>
+            </a:pPr>
+            <a:r>
+              <a:rPr lang="en-US" sz="1000" b="1" dirty="0">
+                <a:solidFill>
+                  <a:srgbClr val="2563EB"/>
+                </a:solidFill>
+                <a:latin typeface="Calibri" pitchFamily="34" charset="0"/>
+                <a:ea typeface="Calibri" pitchFamily="34" charset="-122"/>
+                <a:cs typeface="Calibri" pitchFamily="34" charset="-120"/>
+              </a:rPr>
+              <a:t>CHALLENGES</a:t>
+            </a:r>
+            <a:endParaRPr lang="en-US" sz="1000" dirty="0"/>
+          </a:p>
+        </p:txBody>
+      </p:sp>
+      <p:sp>
+        <p:nvSpPr>
+          <p:cNvPr id="5" name="Text 3"/>
+          <p:cNvSpPr/>
+          <p:nvPr/>
+        </p:nvSpPr>
+        <p:spPr>
+          <a:xfrm>
+            <a:off x="685800" y="457200"/>
+            <a:ext cx="7772400" cy="411480"/>
+          </a:xfrm>
+          <a:prstGeom prst="rect">
+            <a:avLst/>
+          </a:prstGeom>
+          <a:noFill/>
+          <a:ln/>
+        </p:spPr>
+        <p:txBody>
+          <a:bodyPr wrap="square" rtlCol="0" anchor="ctr">
+            <a:normAutofit/>
+          </a:bodyPr>
+          <a:lstStyle/>
+          <a:p>
+            <a:pPr indent="0" marL="0">
+              <a:buNone/>
+            </a:pPr>
+            <a:r>
+              <a:rPr lang="en-US" sz="2400" b="1" dirty="0">
+                <a:solidFill>
+                  <a:srgbClr val="111827"/>
+                </a:solidFill>
+                <a:latin typeface="Calibri" pitchFamily="34" charset="0"/>
+                <a:ea typeface="Calibri" pitchFamily="34" charset="-122"/>
+                <a:cs typeface="Calibri" pitchFamily="34" charset="-120"/>
+              </a:rPr>
+              <a:t>営業の現場課題</a:t>
+            </a:r>
+            <a:endParaRPr lang="en-US" sz="2400" dirty="0"/>
+          </a:p>
+        </p:txBody>
+      </p:sp>
+      <p:sp>
+        <p:nvSpPr>
+          <p:cNvPr id="6" name="Shape 4"/>
+          <p:cNvSpPr/>
+          <p:nvPr/>
+        </p:nvSpPr>
+        <p:spPr>
+          <a:xfrm>
+            <a:off x="685800" y="4777740"/>
+            <a:ext cx="7772400" cy="0"/>
+          </a:xfrm>
+          <a:prstGeom prst="line">
+            <a:avLst/>
+          </a:prstGeom>
+          <a:noFill/>
+          <a:ln w="6350">
+            <a:solidFill>
+              <a:srgbClr val="E5E7EB"/>
+            </a:solidFill>
+            <a:prstDash val="solid"/>
+          </a:ln>
+        </p:spPr>
+      </p:sp>
+      <p:sp>
+        <p:nvSpPr>
+          <p:cNvPr id="7" name="Text 5"/>
+          <p:cNvSpPr/>
+          <p:nvPr/>
+        </p:nvSpPr>
+        <p:spPr>
+          <a:xfrm>
+            <a:off x="7772400" y="4796028"/>
+            <a:ext cx="1097280" cy="274320"/>
+          </a:xfrm>
+          <a:prstGeom prst="rect">
+            <a:avLst/>
+          </a:prstGeom>
+          <a:noFill/>
+          <a:ln/>
+        </p:spPr>
+        <p:txBody>
+          <a:bodyPr wrap="square" rtlCol="0" anchor="ctr">
+            <a:normAutofit/>
+          </a:bodyPr>
+          <a:lstStyle/>
+          <a:p>
+            <a:pPr algn="r" indent="0" marL="0">
+              <a:buNone/>
+            </a:pPr>
+            <a:r>
+              <a:rPr lang="en-US" sz="1000" dirty="0">
+                <a:solidFill>
+                  <a:srgbClr val="9CA3AF"/>
+                </a:solidFill>
+                <a:latin typeface="Calibri" pitchFamily="34" charset="0"/>
+                <a:ea typeface="Calibri" pitchFamily="34" charset="-122"/>
+                <a:cs typeface="Calibri" pitchFamily="34" charset="-120"/>
+              </a:rPr>
+              <a:t>3 / 12</a:t>
+            </a:r>
+            <a:endParaRPr lang="en-US" sz="1000" dirty="0"/>
+          </a:p>
+        </p:txBody>
+      </p:sp>
+      <p:sp>
+        <p:nvSpPr>
+          <p:cNvPr id="8" name="Text 6"/>
+          <p:cNvSpPr/>
+          <p:nvPr/>
+        </p:nvSpPr>
+        <p:spPr>
+          <a:xfrm>
+            <a:off x="685800" y="4796028"/>
+            <a:ext cx="1828800" cy="274320"/>
+          </a:xfrm>
+          <a:prstGeom prst="rect">
+            <a:avLst/>
+          </a:prstGeom>
+          <a:noFill/>
+          <a:ln/>
+        </p:spPr>
+        <p:txBody>
+          <a:bodyPr wrap="square" rtlCol="0" anchor="ctr">
+            <a:normAutofit/>
+          </a:bodyPr>
           <a:lstStyle/>
           <a:p>
             <a:pPr algn="l" indent="0" marL="0">
               <a:buNone/>
             </a:pPr>
             <a:r>
-              <a:rPr lang="en-US" sz="3200" b="1" dirty="0">
-                <a:solidFill>
-                  <a:srgbClr val="FFFFFF"/>
-                </a:solidFill>
-                <a:latin typeface="Calibri" pitchFamily="34" charset="0"/>
-                <a:ea typeface="Calibri" pitchFamily="34" charset="-122"/>
-                <a:cs typeface="Calibri" pitchFamily="34" charset="-120"/>
-              </a:rPr>
-              <a:t>Gemini での自動化戦略</a:t>
-            </a:r>
-            <a:endParaRPr lang="en-US" sz="3200" dirty="0"/>
-          </a:p>
-        </p:txBody>
-      </p:sp>
-      <p:sp>
-        <p:nvSpPr>
-          <p:cNvPr id="4" name="Text 2"/>
-          <p:cNvSpPr/>
-          <p:nvPr/>
-        </p:nvSpPr>
-        <p:spPr>
-          <a:xfrm>
-            <a:off x="685800" y="1097280"/>
-            <a:ext cx="7772400" cy="365760"/>
-          </a:xfrm>
-          <a:prstGeom prst="rect">
-            <a:avLst/>
-          </a:prstGeom>
-          <a:noFill/>
-          <a:ln/>
-        </p:spPr>
-        <p:txBody>
-          <a:bodyPr wrap="square" rtlCol="0" anchor="ctr"/>
-          <a:lstStyle/>
-          <a:p>
-            <a:pPr algn="l" indent="0" marL="0">
-              <a:buNone/>
-            </a:pPr>
-            <a:r>
-              <a:rPr lang="en-US" sz="1800" b="1" dirty="0">
-                <a:solidFill>
-                  <a:srgbClr val="111827"/>
-                </a:solidFill>
-                <a:latin typeface="Calibri" pitchFamily="34" charset="0"/>
-                <a:ea typeface="Calibri" pitchFamily="34" charset="-122"/>
-                <a:cs typeface="Calibri" pitchFamily="34" charset="-120"/>
-              </a:rPr>
-              <a:t>4つのステップ</a:t>
-            </a:r>
-            <a:endParaRPr lang="en-US" sz="1800" dirty="0"/>
-          </a:p>
-        </p:txBody>
-      </p:sp>
-      <p:sp>
-        <p:nvSpPr>
-          <p:cNvPr id="5" name="Text 3"/>
-          <p:cNvSpPr/>
-          <p:nvPr/>
-        </p:nvSpPr>
-        <p:spPr>
-          <a:xfrm>
-            <a:off x="1097280" y="1554480"/>
-            <a:ext cx="7315200" cy="457200"/>
-          </a:xfrm>
-          <a:prstGeom prst="rect">
-            <a:avLst/>
-          </a:prstGeom>
-          <a:noFill/>
-          <a:ln/>
-        </p:spPr>
-        <p:txBody>
-          <a:bodyPr wrap="square" rtlCol="0" anchor="t"/>
-          <a:lstStyle/>
-          <a:p>
-            <a:pPr algn="l" indent="0" marL="0">
-              <a:buNone/>
-            </a:pPr>
-            <a:r>
-              <a:rPr lang="en-US" sz="1600" dirty="0">
+              <a:rPr lang="en-US" sz="1000" dirty="0">
+                <a:solidFill>
+                  <a:srgbClr val="9CA3AF"/>
+                </a:solidFill>
+                <a:latin typeface="Calibri" pitchFamily="34" charset="0"/>
+                <a:ea typeface="Calibri" pitchFamily="34" charset="-122"/>
+                <a:cs typeface="Calibri" pitchFamily="34" charset="-120"/>
+              </a:rPr>
+              <a:t>P-03</a:t>
+            </a:r>
+            <a:endParaRPr lang="en-US" sz="1000" dirty="0"/>
+          </a:p>
+        </p:txBody>
+      </p:sp>
+      <p:sp>
+        <p:nvSpPr>
+          <p:cNvPr id="9" name="Shape 7"/>
+          <p:cNvSpPr/>
+          <p:nvPr/>
+        </p:nvSpPr>
+        <p:spPr>
+          <a:xfrm>
+            <a:off x="685800" y="868680"/>
+            <a:ext cx="7772400" cy="1097280"/>
+          </a:xfrm>
+          <a:prstGeom prst="rect">
+            <a:avLst>
+              <a:gd name="adj" fmla="val 4167"/>
+            </a:avLst>
+          </a:prstGeom>
+          <a:solidFill>
+            <a:srgbClr val="FEE2E2"/>
+          </a:solidFill>
+          <a:ln w="12700">
+            <a:solidFill>
+              <a:srgbClr val="DC2626"/>
+            </a:solidFill>
+            <a:prstDash val="solid"/>
+          </a:ln>
+        </p:spPr>
+      </p:sp>
+      <p:sp>
+        <p:nvSpPr>
+          <p:cNvPr id="10" name="Text 8"/>
+          <p:cNvSpPr/>
+          <p:nvPr/>
+        </p:nvSpPr>
+        <p:spPr>
+          <a:xfrm>
+            <a:off x="960120" y="960120"/>
+            <a:ext cx="7680960" cy="274320"/>
+          </a:xfrm>
+          <a:prstGeom prst="rect">
+            <a:avLst/>
+          </a:prstGeom>
+          <a:noFill/>
+          <a:ln/>
+        </p:spPr>
+        <p:txBody>
+          <a:bodyPr wrap="square" rtlCol="0" anchor="ctr">
+            <a:normAutofit/>
+          </a:bodyPr>
+          <a:lstStyle/>
+          <a:p>
+            <a:pPr indent="0" marL="0">
+              <a:buNone/>
+            </a:pPr>
+            <a:r>
+              <a:rPr lang="en-US" sz="1600" b="1" dirty="0">
+                <a:solidFill>
+                  <a:srgbClr val="DC2626"/>
+                </a:solidFill>
+                <a:latin typeface="Calibri" pitchFamily="34" charset="0"/>
+                <a:ea typeface="Calibri" pitchFamily="34" charset="-122"/>
+                <a:cs typeface="Calibri" pitchFamily="34" charset="-120"/>
+              </a:rPr>
+              <a:t>提案書作成に膨大な時間</a:t>
+            </a:r>
+            <a:endParaRPr lang="en-US" sz="1600" dirty="0"/>
+          </a:p>
+        </p:txBody>
+      </p:sp>
+      <p:sp>
+        <p:nvSpPr>
+          <p:cNvPr id="11" name="Text 9"/>
+          <p:cNvSpPr/>
+          <p:nvPr/>
+        </p:nvSpPr>
+        <p:spPr>
+          <a:xfrm>
+            <a:off x="960120" y="1252728"/>
+            <a:ext cx="7680960" cy="594360"/>
+          </a:xfrm>
+          <a:prstGeom prst="rect">
+            <a:avLst/>
+          </a:prstGeom>
+          <a:noFill/>
+          <a:ln/>
+        </p:spPr>
+        <p:txBody>
+          <a:bodyPr wrap="square" rtlCol="0" anchor="ctr">
+            <a:normAutofit/>
+          </a:bodyPr>
+          <a:lstStyle/>
+          <a:p>
+            <a:pPr indent="0" marL="0">
+              <a:lnSpc>
+                <a:spcPct val="120000"/>
+              </a:lnSpc>
+              <a:buNone/>
+            </a:pPr>
+            <a:r>
+              <a:rPr lang="en-US" sz="1400" dirty="0">
                 <a:solidFill>
                   <a:srgbClr val="374151"/>
                 </a:solidFill>
@@ -2014,7 +4169,75 @@
                 <a:ea typeface="Calibri" pitchFamily="34" charset="-122"/>
                 <a:cs typeface="Calibri" pitchFamily="34" charset="-120"/>
               </a:rPr>
-              <a:t>ステップ 1: 顧客情報を詳しく入力 → Gemini が分析・整理</a:t>
+              <a:t>従来なら 3 日かかっていた。顧客対応に時間が割けない</a:t>
+            </a:r>
+            <a:endParaRPr lang="en-US" sz="1400" dirty="0"/>
+          </a:p>
+        </p:txBody>
+      </p:sp>
+      <p:sp>
+        <p:nvSpPr>
+          <p:cNvPr id="12" name="Shape 10"/>
+          <p:cNvSpPr/>
+          <p:nvPr/>
+        </p:nvSpPr>
+        <p:spPr>
+          <a:xfrm>
+            <a:off x="685800" y="2148840"/>
+            <a:ext cx="7772400" cy="1097280"/>
+          </a:xfrm>
+          <a:prstGeom prst="rect">
+            <a:avLst>
+              <a:gd name="adj" fmla="val 4167"/>
+            </a:avLst>
+          </a:prstGeom>
+          <a:solidFill>
+            <a:srgbClr val="FEE2E2"/>
+          </a:solidFill>
+          <a:ln w="12700">
+            <a:solidFill>
+              <a:srgbClr val="DC2626"/>
+            </a:solidFill>
+            <a:prstDash val="solid"/>
+          </a:ln>
+        </p:spPr>
+      </p:sp>
+      <p:sp>
+        <p:nvSpPr>
+          <p:cNvPr id="13" name="Text 11"/>
+          <p:cNvSpPr/>
+          <p:nvPr/>
+        </p:nvSpPr>
+        <p:spPr>
+          <a:xfrm>
+            <a:off x="960120" y="2240280"/>
+            <a:ext cx="7680960" cy="274320"/>
+          </a:xfrm>
+          <a:prstGeom prst="rect">
+            <a:avLst/>
+          </a:prstGeom>
+          <a:noFill/>
+          <a:ln/>
+        </p:spPr>
+        <p:txBody>
+          <a:bodyPr wrap="square" rtlCol="0" anchor="ctr">
+            <a:normAutofit/>
+          </a:bodyPr>
+          <a:lstStyle/>
+          <a:p>
+            <a:pPr indent="0" marL="0">
+              <a:buNone/>
+            </a:pPr>
+            <a:r>
+              <a:rPr lang="en-US" sz="1600" b="1" dirty="0">
+                <a:solidFill>
+                  <a:srgbClr val="DC2626"/>
+                </a:solidFill>
+                <a:latin typeface="Calibri" pitchFamily="34" charset="0"/>
+                <a:ea typeface="Calibri" pitchFamily="34" charset="-122"/>
+                <a:cs typeface="Calibri" pitchFamily="34" charset="-120"/>
+              </a:rPr>
+              <a:t>過去資料の管理が大変</a:t>
             </a:r>
             <a:endParaRPr lang="en-US" sz="1600" dirty="0"/>
           </a:p>
@@ -2022,30 +4245,35 @@
       </p:sp>
       <p:sp>
         <p:nvSpPr>
-          <p:cNvPr id="6" name="Text 4"/>
-          <p:cNvSpPr/>
-          <p:nvPr/>
-        </p:nvSpPr>
-        <p:spPr>
-          <a:xfrm>
-            <a:off x="1097280" y="2148840"/>
-            <a:ext cx="7315200" cy="457200"/>
-          </a:xfrm>
-          <a:prstGeom prst="rect">
-            <a:avLst/>
-          </a:prstGeom>
-          <a:noFill/>
-          <a:ln/>
-        </p:spPr>
-        <p:txBody>
-          <a:bodyPr wrap="square" rtlCol="0" anchor="t"/>
-          <a:lstStyle/>
-          <a:p>
-            <a:pPr algn="l" indent="0" marL="0">
-              <a:buNone/>
-            </a:pPr>
-            <a:r>
-              <a:rPr lang="en-US" sz="1600" dirty="0">
+          <p:cNvPr id="14" name="Text 12"/>
+          <p:cNvSpPr/>
+          <p:nvPr/>
+        </p:nvSpPr>
+        <p:spPr>
+          <a:xfrm>
+            <a:off x="960120" y="2532888"/>
+            <a:ext cx="7680960" cy="594360"/>
+          </a:xfrm>
+          <a:prstGeom prst="rect">
+            <a:avLst/>
+          </a:prstGeom>
+          <a:noFill/>
+          <a:ln/>
+        </p:spPr>
+        <p:txBody>
+          <a:bodyPr wrap="square" rtlCol="0" anchor="ctr">
+            <a:normAutofit/>
+          </a:bodyPr>
+          <a:lstStyle/>
+          <a:p>
+            <a:pPr indent="0" marL="0">
+              <a:lnSpc>
+                <a:spcPct val="120000"/>
+              </a:lnSpc>
+              <a:buNone/>
+            </a:pPr>
+            <a:r>
+              <a:rPr lang="en-US" sz="1400" dirty="0">
                 <a:solidFill>
                   <a:srgbClr val="374151"/>
                 </a:solidFill>
@@ -2053,7 +4281,75 @@
                 <a:ea typeface="Calibri" pitchFamily="34" charset="-122"/>
                 <a:cs typeface="Calibri" pitchFamily="34" charset="-120"/>
               </a:rPr>
-              <a:t>ステップ 2: 提案書の構成を指定 → 初稿を自動生成</a:t>
+              <a:t>成功案件の提案書が無数にある。どれを基にしたら？</a:t>
+            </a:r>
+            <a:endParaRPr lang="en-US" sz="1400" dirty="0"/>
+          </a:p>
+        </p:txBody>
+      </p:sp>
+      <p:sp>
+        <p:nvSpPr>
+          <p:cNvPr id="15" name="Shape 13"/>
+          <p:cNvSpPr/>
+          <p:nvPr/>
+        </p:nvSpPr>
+        <p:spPr>
+          <a:xfrm>
+            <a:off x="685800" y="3429000"/>
+            <a:ext cx="7772400" cy="1097280"/>
+          </a:xfrm>
+          <a:prstGeom prst="rect">
+            <a:avLst>
+              <a:gd name="adj" fmla="val 4167"/>
+            </a:avLst>
+          </a:prstGeom>
+          <a:solidFill>
+            <a:srgbClr val="FEE2E2"/>
+          </a:solidFill>
+          <a:ln w="12700">
+            <a:solidFill>
+              <a:srgbClr val="DC2626"/>
+            </a:solidFill>
+            <a:prstDash val="solid"/>
+          </a:ln>
+        </p:spPr>
+      </p:sp>
+      <p:sp>
+        <p:nvSpPr>
+          <p:cNvPr id="16" name="Text 14"/>
+          <p:cNvSpPr/>
+          <p:nvPr/>
+        </p:nvSpPr>
+        <p:spPr>
+          <a:xfrm>
+            <a:off x="960120" y="3520440"/>
+            <a:ext cx="7680960" cy="274320"/>
+          </a:xfrm>
+          <a:prstGeom prst="rect">
+            <a:avLst/>
+          </a:prstGeom>
+          <a:noFill/>
+          <a:ln/>
+        </p:spPr>
+        <p:txBody>
+          <a:bodyPr wrap="square" rtlCol="0" anchor="ctr">
+            <a:normAutofit/>
+          </a:bodyPr>
+          <a:lstStyle/>
+          <a:p>
+            <a:pPr indent="0" marL="0">
+              <a:buNone/>
+            </a:pPr>
+            <a:r>
+              <a:rPr lang="en-US" sz="1600" b="1" dirty="0">
+                <a:solidFill>
+                  <a:srgbClr val="DC2626"/>
+                </a:solidFill>
+                <a:latin typeface="Calibri" pitchFamily="34" charset="0"/>
+                <a:ea typeface="Calibri" pitchFamily="34" charset="-122"/>
+                <a:cs typeface="Calibri" pitchFamily="34" charset="-120"/>
+              </a:rPr>
+              <a:t>個人差が大きい</a:t>
             </a:r>
             <a:endParaRPr lang="en-US" sz="1600" dirty="0"/>
           </a:p>
@@ -2061,30 +4357,35 @@
       </p:sp>
       <p:sp>
         <p:nvSpPr>
-          <p:cNvPr id="7" name="Text 5"/>
-          <p:cNvSpPr/>
-          <p:nvPr/>
-        </p:nvSpPr>
-        <p:spPr>
-          <a:xfrm>
-            <a:off x="1097280" y="2743200"/>
-            <a:ext cx="7315200" cy="457200"/>
-          </a:xfrm>
-          <a:prstGeom prst="rect">
-            <a:avLst/>
-          </a:prstGeom>
-          <a:noFill/>
-          <a:ln/>
-        </p:spPr>
-        <p:txBody>
-          <a:bodyPr wrap="square" rtlCol="0" anchor="t"/>
-          <a:lstStyle/>
-          <a:p>
-            <a:pPr algn="l" indent="0" marL="0">
-              <a:buNone/>
-            </a:pPr>
-            <a:r>
-              <a:rPr lang="en-US" sz="1600" dirty="0">
+          <p:cNvPr id="17" name="Text 15"/>
+          <p:cNvSpPr/>
+          <p:nvPr/>
+        </p:nvSpPr>
+        <p:spPr>
+          <a:xfrm>
+            <a:off x="960120" y="3813048"/>
+            <a:ext cx="7680960" cy="594360"/>
+          </a:xfrm>
+          <a:prstGeom prst="rect">
+            <a:avLst/>
+          </a:prstGeom>
+          <a:noFill/>
+          <a:ln/>
+        </p:spPr>
+        <p:txBody>
+          <a:bodyPr wrap="square" rtlCol="0" anchor="ctr">
+            <a:normAutofit/>
+          </a:bodyPr>
+          <a:lstStyle/>
+          <a:p>
+            <a:pPr indent="0" marL="0">
+              <a:lnSpc>
+                <a:spcPct val="120000"/>
+              </a:lnSpc>
+              <a:buNone/>
+            </a:pPr>
+            <a:r>
+              <a:rPr lang="en-US" sz="1400" dirty="0">
                 <a:solidFill>
                   <a:srgbClr val="374151"/>
                 </a:solidFill>
@@ -2092,87 +4393,9 @@
                 <a:ea typeface="Calibri" pitchFamily="34" charset="-122"/>
                 <a:cs typeface="Calibri" pitchFamily="34" charset="-120"/>
               </a:rPr>
-              <a:t>ステップ 3: JSON 形式で出力 → 他ツール（Docs, PowerPoint）との連携</a:t>
-            </a:r>
-            <a:endParaRPr lang="en-US" sz="1600" dirty="0"/>
-          </a:p>
-        </p:txBody>
-      </p:sp>
-      <p:sp>
-        <p:nvSpPr>
-          <p:cNvPr id="8" name="Text 6"/>
-          <p:cNvSpPr/>
-          <p:nvPr/>
-        </p:nvSpPr>
-        <p:spPr>
-          <a:xfrm>
-            <a:off x="1097280" y="3337560"/>
-            <a:ext cx="7315200" cy="457200"/>
-          </a:xfrm>
-          <a:prstGeom prst="rect">
-            <a:avLst/>
-          </a:prstGeom>
-          <a:noFill/>
-          <a:ln/>
-        </p:spPr>
-        <p:txBody>
-          <a:bodyPr wrap="square" rtlCol="0" anchor="t"/>
-          <a:lstStyle/>
-          <a:p>
-            <a:pPr algn="l" indent="0" marL="0">
-              <a:buNone/>
-            </a:pPr>
-            <a:r>
-              <a:rPr lang="en-US" sz="1600" dirty="0">
-                <a:solidFill>
-                  <a:srgbClr val="374151"/>
-                </a:solidFill>
-                <a:latin typeface="Calibri" pitchFamily="34" charset="0"/>
-                <a:ea typeface="Calibri" pitchFamily="34" charset="-122"/>
-                <a:cs typeface="Calibri" pitchFamily="34" charset="-120"/>
-              </a:rPr>
-              <a:t>ステップ 4: 人間による創造的修正 → 最終提案へ</a:t>
-            </a:r>
-            <a:endParaRPr lang="en-US" sz="1600" dirty="0"/>
-          </a:p>
-        </p:txBody>
-      </p:sp>
-      <p:sp>
-        <p:nvSpPr>
-          <p:cNvPr id="9" name="Text 7"/>
-          <p:cNvSpPr/>
-          <p:nvPr/>
-        </p:nvSpPr>
-        <p:spPr>
-          <a:xfrm>
-            <a:off x="685800" y="3931920"/>
-            <a:ext cx="7772400" cy="320040"/>
-          </a:xfrm>
-          <a:prstGeom prst="rect">
-            <a:avLst/>
-          </a:prstGeom>
-          <a:noFill/>
-          <a:ln/>
-        </p:spPr>
-        <p:txBody>
-          <a:bodyPr wrap="square" rtlCol="0" anchor="ctr"/>
-          <a:lstStyle/>
-          <a:p>
-            <a:pPr algn="l" indent="0" marL="0">
-              <a:buNone/>
-            </a:pPr>
-            <a:r>
-              <a:rPr lang="en-US" sz="1800" dirty="0">
-                <a:solidFill>
-                  <a:srgbClr val="2563EB"/>
-                </a:solidFill>
-                <a:latin typeface="Calibri" pitchFamily="34" charset="0"/>
-                <a:ea typeface="Calibri" pitchFamily="34" charset="-122"/>
-                <a:cs typeface="Calibri" pitchFamily="34" charset="-120"/>
-              </a:rPr>
-              <a:t>初稿作成：従来 4～6時間 → わずか 30分以内</a:t>
-            </a:r>
-            <a:endParaRPr lang="en-US" sz="1800" dirty="0"/>
+              <a:t>経験者の提案は成約率高い。新人は0から書く羽目に</a:t>
+            </a:r>
+            <a:endParaRPr lang="en-US" sz="1400" dirty="0"/>
           </a:p>
         </p:txBody>
       </p:sp>
@@ -2217,121 +4440,325 @@
         <p:spPr>
           <a:xfrm>
             <a:off x="0" y="0"/>
-            <a:ext cx="9144000" cy="731520"/>
+            <a:ext cx="9144000" cy="32004"/>
           </a:xfrm>
           <a:prstGeom prst="rect">
             <a:avLst/>
           </a:prstGeom>
           <a:solidFill>
-            <a:srgbClr val="1B2A4A"/>
+            <a:srgbClr val="2563EB"/>
           </a:solidFill>
           <a:ln/>
         </p:spPr>
       </p:sp>
       <p:sp>
         <p:nvSpPr>
-          <p:cNvPr id="3" name="Text 1"/>
+          <p:cNvPr id="3" name="Shape 1"/>
           <p:cNvSpPr/>
           <p:nvPr/>
         </p:nvSpPr>
         <p:spPr>
           <a:xfrm>
             <a:off x="685800" y="137160"/>
-            <a:ext cx="7772400" cy="457200"/>
-          </a:xfrm>
-          <a:prstGeom prst="rect">
-            <a:avLst/>
-          </a:prstGeom>
-          <a:noFill/>
-          <a:ln/>
-        </p:spPr>
-        <p:txBody>
-          <a:bodyPr wrap="square" rtlCol="0" anchor="ctr"/>
+            <a:ext cx="1243584" cy="256032"/>
+          </a:xfrm>
+          <a:prstGeom prst="rect">
+            <a:avLst>
+              <a:gd name="adj" fmla="val 17857"/>
+            </a:avLst>
+          </a:prstGeom>
+          <a:solidFill>
+            <a:srgbClr val="DBEAFE"/>
+          </a:solidFill>
+          <a:ln/>
+        </p:spPr>
+      </p:sp>
+      <p:sp>
+        <p:nvSpPr>
+          <p:cNvPr id="4" name="Text 2"/>
+          <p:cNvSpPr/>
+          <p:nvPr/>
+        </p:nvSpPr>
+        <p:spPr>
+          <a:xfrm>
+            <a:off x="685800" y="137160"/>
+            <a:ext cx="1243584" cy="256032"/>
+          </a:xfrm>
+          <a:prstGeom prst="rect">
+            <a:avLst/>
+          </a:prstGeom>
+          <a:noFill/>
+          <a:ln/>
+        </p:spPr>
+        <p:txBody>
+          <a:bodyPr wrap="square" rtlCol="0" anchor="ctr">
+            <a:normAutofit/>
+          </a:bodyPr>
+          <a:lstStyle/>
+          <a:p>
+            <a:pPr algn="ctr" indent="0" marL="0">
+              <a:buNone/>
+            </a:pPr>
+            <a:r>
+              <a:rPr lang="en-US" sz="1000" b="1" dirty="0">
+                <a:solidFill>
+                  <a:srgbClr val="2563EB"/>
+                </a:solidFill>
+                <a:latin typeface="Calibri" pitchFamily="34" charset="0"/>
+                <a:ea typeface="Calibri" pitchFamily="34" charset="-122"/>
+                <a:cs typeface="Calibri" pitchFamily="34" charset="-120"/>
+              </a:rPr>
+              <a:t>SOLUTION</a:t>
+            </a:r>
+            <a:endParaRPr lang="en-US" sz="1000" dirty="0"/>
+          </a:p>
+        </p:txBody>
+      </p:sp>
+      <p:sp>
+        <p:nvSpPr>
+          <p:cNvPr id="5" name="Text 3"/>
+          <p:cNvSpPr/>
+          <p:nvPr/>
+        </p:nvSpPr>
+        <p:spPr>
+          <a:xfrm>
+            <a:off x="685800" y="457200"/>
+            <a:ext cx="7772400" cy="411480"/>
+          </a:xfrm>
+          <a:prstGeom prst="rect">
+            <a:avLst/>
+          </a:prstGeom>
+          <a:noFill/>
+          <a:ln/>
+        </p:spPr>
+        <p:txBody>
+          <a:bodyPr wrap="square" rtlCol="0" anchor="ctr">
+            <a:normAutofit/>
+          </a:bodyPr>
+          <a:lstStyle/>
+          <a:p>
+            <a:pPr indent="0" marL="0">
+              <a:buNone/>
+            </a:pPr>
+            <a:r>
+              <a:rPr lang="en-US" sz="2400" b="1" dirty="0">
+                <a:solidFill>
+                  <a:srgbClr val="111827"/>
+                </a:solidFill>
+                <a:latin typeface="Calibri" pitchFamily="34" charset="0"/>
+                <a:ea typeface="Calibri" pitchFamily="34" charset="-122"/>
+                <a:cs typeface="Calibri" pitchFamily="34" charset="-120"/>
+              </a:rPr>
+              <a:t>Gemini の解決策</a:t>
+            </a:r>
+            <a:endParaRPr lang="en-US" sz="2400" dirty="0"/>
+          </a:p>
+        </p:txBody>
+      </p:sp>
+      <p:sp>
+        <p:nvSpPr>
+          <p:cNvPr id="6" name="Shape 4"/>
+          <p:cNvSpPr/>
+          <p:nvPr/>
+        </p:nvSpPr>
+        <p:spPr>
+          <a:xfrm>
+            <a:off x="685800" y="4777740"/>
+            <a:ext cx="7772400" cy="0"/>
+          </a:xfrm>
+          <a:prstGeom prst="line">
+            <a:avLst/>
+          </a:prstGeom>
+          <a:noFill/>
+          <a:ln w="6350">
+            <a:solidFill>
+              <a:srgbClr val="E5E7EB"/>
+            </a:solidFill>
+            <a:prstDash val="solid"/>
+          </a:ln>
+        </p:spPr>
+      </p:sp>
+      <p:sp>
+        <p:nvSpPr>
+          <p:cNvPr id="7" name="Text 5"/>
+          <p:cNvSpPr/>
+          <p:nvPr/>
+        </p:nvSpPr>
+        <p:spPr>
+          <a:xfrm>
+            <a:off x="7772400" y="4796028"/>
+            <a:ext cx="1097280" cy="274320"/>
+          </a:xfrm>
+          <a:prstGeom prst="rect">
+            <a:avLst/>
+          </a:prstGeom>
+          <a:noFill/>
+          <a:ln/>
+        </p:spPr>
+        <p:txBody>
+          <a:bodyPr wrap="square" rtlCol="0" anchor="ctr">
+            <a:normAutofit/>
+          </a:bodyPr>
+          <a:lstStyle/>
+          <a:p>
+            <a:pPr algn="r" indent="0" marL="0">
+              <a:buNone/>
+            </a:pPr>
+            <a:r>
+              <a:rPr lang="en-US" sz="1000" dirty="0">
+                <a:solidFill>
+                  <a:srgbClr val="9CA3AF"/>
+                </a:solidFill>
+                <a:latin typeface="Calibri" pitchFamily="34" charset="0"/>
+                <a:ea typeface="Calibri" pitchFamily="34" charset="-122"/>
+                <a:cs typeface="Calibri" pitchFamily="34" charset="-120"/>
+              </a:rPr>
+              <a:t>4 / 12</a:t>
+            </a:r>
+            <a:endParaRPr lang="en-US" sz="1000" dirty="0"/>
+          </a:p>
+        </p:txBody>
+      </p:sp>
+      <p:sp>
+        <p:nvSpPr>
+          <p:cNvPr id="8" name="Text 6"/>
+          <p:cNvSpPr/>
+          <p:nvPr/>
+        </p:nvSpPr>
+        <p:spPr>
+          <a:xfrm>
+            <a:off x="685800" y="4796028"/>
+            <a:ext cx="1828800" cy="274320"/>
+          </a:xfrm>
+          <a:prstGeom prst="rect">
+            <a:avLst/>
+          </a:prstGeom>
+          <a:noFill/>
+          <a:ln/>
+        </p:spPr>
+        <p:txBody>
+          <a:bodyPr wrap="square" rtlCol="0" anchor="ctr">
+            <a:normAutofit/>
+          </a:bodyPr>
           <a:lstStyle/>
           <a:p>
             <a:pPr algn="l" indent="0" marL="0">
               <a:buNone/>
             </a:pPr>
             <a:r>
-              <a:rPr lang="en-US" sz="3200" b="1" dirty="0">
-                <a:solidFill>
-                  <a:srgbClr val="FFFFFF"/>
-                </a:solidFill>
-                <a:latin typeface="Calibri" pitchFamily="34" charset="0"/>
-                <a:ea typeface="Calibri" pitchFamily="34" charset="-122"/>
-                <a:cs typeface="Calibri" pitchFamily="34" charset="-120"/>
-              </a:rPr>
-              <a:t>実演で見るポイント</a:t>
-            </a:r>
-            <a:endParaRPr lang="en-US" sz="3200" dirty="0"/>
-          </a:p>
-        </p:txBody>
-      </p:sp>
-      <p:sp>
-        <p:nvSpPr>
-          <p:cNvPr id="4" name="Text 2"/>
-          <p:cNvSpPr/>
-          <p:nvPr/>
-        </p:nvSpPr>
-        <p:spPr>
-          <a:xfrm>
-            <a:off x="685800" y="1097280"/>
-            <a:ext cx="7772400" cy="365760"/>
-          </a:xfrm>
-          <a:prstGeom prst="rect">
-            <a:avLst/>
-          </a:prstGeom>
-          <a:noFill/>
-          <a:ln/>
-        </p:spPr>
-        <p:txBody>
-          <a:bodyPr wrap="square" rtlCol="0" anchor="ctr"/>
-          <a:lstStyle/>
-          <a:p>
-            <a:pPr algn="l" indent="0" marL="0">
-              <a:buNone/>
-            </a:pPr>
-            <a:r>
-              <a:rPr lang="en-US" sz="1800" b="1" dirty="0">
-                <a:solidFill>
-                  <a:srgbClr val="111827"/>
-                </a:solidFill>
-                <a:latin typeface="Calibri" pitchFamily="34" charset="0"/>
-                <a:ea typeface="Calibri" pitchFamily="34" charset="-122"/>
-                <a:cs typeface="Calibri" pitchFamily="34" charset="-120"/>
-              </a:rPr>
-              <a:t>5つの重要なポイント</a:t>
-            </a:r>
-            <a:endParaRPr lang="en-US" sz="1800" dirty="0"/>
-          </a:p>
-        </p:txBody>
-      </p:sp>
-      <p:sp>
-        <p:nvSpPr>
-          <p:cNvPr id="5" name="Text 3"/>
-          <p:cNvSpPr/>
-          <p:nvPr/>
-        </p:nvSpPr>
-        <p:spPr>
-          <a:xfrm>
-            <a:off x="1097280" y="1554480"/>
-            <a:ext cx="7315200" cy="457200"/>
-          </a:xfrm>
-          <a:prstGeom prst="rect">
-            <a:avLst/>
-          </a:prstGeom>
-          <a:noFill/>
-          <a:ln/>
-        </p:spPr>
-        <p:txBody>
-          <a:bodyPr wrap="square" rtlCol="0" anchor="t"/>
-          <a:lstStyle/>
-          <a:p>
-            <a:pPr algn="l" indent="0" marL="0">
-              <a:buNone/>
-            </a:pPr>
-            <a:r>
-              <a:rPr lang="en-US" sz="1600" dirty="0">
+              <a:rPr lang="en-US" sz="1000" dirty="0">
+                <a:solidFill>
+                  <a:srgbClr val="9CA3AF"/>
+                </a:solidFill>
+                <a:latin typeface="Calibri" pitchFamily="34" charset="0"/>
+                <a:ea typeface="Calibri" pitchFamily="34" charset="-122"/>
+                <a:cs typeface="Calibri" pitchFamily="34" charset="-120"/>
+              </a:rPr>
+              <a:t>P-03</a:t>
+            </a:r>
+            <a:endParaRPr lang="en-US" sz="1000" dirty="0"/>
+          </a:p>
+        </p:txBody>
+      </p:sp>
+      <p:sp>
+        <p:nvSpPr>
+          <p:cNvPr id="9" name="Shape 7"/>
+          <p:cNvSpPr/>
+          <p:nvPr/>
+        </p:nvSpPr>
+        <p:spPr>
+          <a:xfrm>
+            <a:off x="868680" y="914400"/>
+            <a:ext cx="2286000" cy="1828800"/>
+          </a:xfrm>
+          <a:prstGeom prst="rect">
+            <a:avLst>
+              <a:gd name="adj" fmla="val 2500"/>
+            </a:avLst>
+          </a:prstGeom>
+          <a:solidFill>
+            <a:srgbClr val="D1FAE5"/>
+          </a:solidFill>
+          <a:ln w="12700">
+            <a:solidFill>
+              <a:srgbClr val="059669"/>
+            </a:solidFill>
+            <a:prstDash val="solid"/>
+          </a:ln>
+        </p:spPr>
+      </p:sp>
+      <p:sp>
+        <p:nvSpPr>
+          <p:cNvPr id="10" name="Text 8"/>
+          <p:cNvSpPr/>
+          <p:nvPr/>
+        </p:nvSpPr>
+        <p:spPr>
+          <a:xfrm>
+            <a:off x="868680" y="1143000"/>
+            <a:ext cx="2286000" cy="320040"/>
+          </a:xfrm>
+          <a:prstGeom prst="rect">
+            <a:avLst/>
+          </a:prstGeom>
+          <a:noFill/>
+          <a:ln/>
+        </p:spPr>
+        <p:txBody>
+          <a:bodyPr wrap="square" rtlCol="0" anchor="ctr">
+            <a:normAutofit/>
+          </a:bodyPr>
+          <a:lstStyle/>
+          <a:p>
+            <a:pPr algn="ctr" indent="0" marL="0">
+              <a:buNone/>
+            </a:pPr>
+            <a:r>
+              <a:rPr lang="en-US" sz="1600" b="1" dirty="0">
+                <a:solidFill>
+                  <a:srgbClr val="059669"/>
+                </a:solidFill>
+                <a:latin typeface="Calibri" pitchFamily="34" charset="0"/>
+                <a:ea typeface="Calibri" pitchFamily="34" charset="-122"/>
+                <a:cs typeface="Calibri" pitchFamily="34" charset="-120"/>
+              </a:rPr>
+              <a:t>テンプレート活用</a:t>
+            </a:r>
+            <a:endParaRPr lang="en-US" sz="1600" dirty="0"/>
+          </a:p>
+        </p:txBody>
+      </p:sp>
+      <p:sp>
+        <p:nvSpPr>
+          <p:cNvPr id="11" name="Text 9"/>
+          <p:cNvSpPr/>
+          <p:nvPr/>
+        </p:nvSpPr>
+        <p:spPr>
+          <a:xfrm>
+            <a:off x="1005840" y="1508760"/>
+            <a:ext cx="2011680" cy="1051560"/>
+          </a:xfrm>
+          <a:prstGeom prst="rect">
+            <a:avLst/>
+          </a:prstGeom>
+          <a:noFill/>
+          <a:ln/>
+        </p:spPr>
+        <p:txBody>
+          <a:bodyPr wrap="square" rtlCol="0" anchor="ctr">
+            <a:normAutofit/>
+          </a:bodyPr>
+          <a:lstStyle/>
+          <a:p>
+            <a:pPr algn="ctr" indent="0" marL="0">
+              <a:lnSpc>
+                <a:spcPct val="130000"/>
+              </a:lnSpc>
+              <a:buNone/>
+            </a:pPr>
+            <a:r>
+              <a:rPr lang="en-US" sz="1400" dirty="0">
                 <a:solidFill>
                   <a:srgbClr val="374151"/>
                 </a:solidFill>
@@ -2339,7 +4766,95 @@
                 <a:ea typeface="Calibri" pitchFamily="34" charset="-122"/>
                 <a:cs typeface="Calibri" pitchFamily="34" charset="-120"/>
               </a:rPr>
-              <a:t>複雑な指示の与え方（プロンプトエンジニアリング）</a:t>
+              <a:t>成功した提案書を参照</a:t>
+            </a:r>
+            <a:endParaRPr lang="en-US" sz="1400" dirty="0"/>
+          </a:p>
+          <a:p>
+            <a:pPr algn="ctr" indent="0" marL="0">
+              <a:lnSpc>
+                <a:spcPct val="130000"/>
+              </a:lnSpc>
+              <a:buNone/>
+            </a:pPr>
+            <a:r>
+              <a:rPr lang="en-US" sz="1400" dirty="0">
+                <a:solidFill>
+                  <a:srgbClr val="374151"/>
+                </a:solidFill>
+                <a:latin typeface="Calibri" pitchFamily="34" charset="0"/>
+                <a:ea typeface="Calibri" pitchFamily="34" charset="-122"/>
+                <a:cs typeface="Calibri" pitchFamily="34" charset="-120"/>
+              </a:rPr>
+              <a:t>Gemini が似た構成で新規作成</a:t>
+            </a:r>
+            <a:endParaRPr lang="en-US" sz="1400" dirty="0"/>
+          </a:p>
+        </p:txBody>
+      </p:sp>
+      <p:sp>
+        <p:nvSpPr>
+          <p:cNvPr id="12" name="Shape 10"/>
+          <p:cNvSpPr/>
+          <p:nvPr/>
+        </p:nvSpPr>
+        <p:spPr>
+          <a:xfrm>
+            <a:off x="3429000" y="914400"/>
+            <a:ext cx="2286000" cy="1828800"/>
+          </a:xfrm>
+          <a:prstGeom prst="rect">
+            <a:avLst>
+              <a:gd name="adj" fmla="val 2500"/>
+            </a:avLst>
+          </a:prstGeom>
+          <a:solidFill>
+            <a:srgbClr val="DBEAFE"/>
+          </a:solidFill>
+          <a:ln w="12700">
+            <a:solidFill>
+              <a:srgbClr val="2563EB"/>
+            </a:solidFill>
+            <a:prstDash val="solid"/>
+          </a:ln>
+        </p:spPr>
+      </p:sp>
+      <p:sp>
+        <p:nvSpPr>
+          <p:cNvPr id="13" name="Text 11"/>
+          <p:cNvSpPr/>
+          <p:nvPr/>
+        </p:nvSpPr>
+        <p:spPr>
+          <a:xfrm>
+            <a:off x="3429000" y="1143000"/>
+            <a:ext cx="2286000" cy="320040"/>
+          </a:xfrm>
+          <a:prstGeom prst="rect">
+            <a:avLst/>
+          </a:prstGeom>
+          <a:noFill/>
+          <a:ln/>
+        </p:spPr>
+        <p:txBody>
+          <a:bodyPr wrap="square" rtlCol="0" anchor="ctr">
+            <a:normAutofit/>
+          </a:bodyPr>
+          <a:lstStyle/>
+          <a:p>
+            <a:pPr algn="ctr" indent="0" marL="0">
+              <a:buNone/>
+            </a:pPr>
+            <a:r>
+              <a:rPr lang="en-US" sz="1600" b="1" dirty="0">
+                <a:solidFill>
+                  <a:srgbClr val="2563EB"/>
+                </a:solidFill>
+                <a:latin typeface="Calibri" pitchFamily="34" charset="0"/>
+                <a:ea typeface="Calibri" pitchFamily="34" charset="-122"/>
+                <a:cs typeface="Calibri" pitchFamily="34" charset="-120"/>
+              </a:rPr>
+              <a:t>自動カスタマイズ</a:t>
             </a:r>
             <a:endParaRPr lang="en-US" sz="1600" dirty="0"/>
           </a:p>
@@ -2347,30 +4862,35 @@
       </p:sp>
       <p:sp>
         <p:nvSpPr>
-          <p:cNvPr id="6" name="Text 4"/>
-          <p:cNvSpPr/>
-          <p:nvPr/>
-        </p:nvSpPr>
-        <p:spPr>
-          <a:xfrm>
-            <a:off x="1097280" y="2148840"/>
-            <a:ext cx="7315200" cy="457200"/>
-          </a:xfrm>
-          <a:prstGeom prst="rect">
-            <a:avLst/>
-          </a:prstGeom>
-          <a:noFill/>
-          <a:ln/>
-        </p:spPr>
-        <p:txBody>
-          <a:bodyPr wrap="square" rtlCol="0" anchor="t"/>
-          <a:lstStyle/>
-          <a:p>
-            <a:pPr algn="l" indent="0" marL="0">
-              <a:buNone/>
-            </a:pPr>
-            <a:r>
-              <a:rPr lang="en-US" sz="1600" dirty="0">
+          <p:cNvPr id="14" name="Text 12"/>
+          <p:cNvSpPr/>
+          <p:nvPr/>
+        </p:nvSpPr>
+        <p:spPr>
+          <a:xfrm>
+            <a:off x="3566160" y="1508760"/>
+            <a:ext cx="2011680" cy="1051560"/>
+          </a:xfrm>
+          <a:prstGeom prst="rect">
+            <a:avLst/>
+          </a:prstGeom>
+          <a:noFill/>
+          <a:ln/>
+        </p:spPr>
+        <p:txBody>
+          <a:bodyPr wrap="square" rtlCol="0" anchor="ctr">
+            <a:normAutofit/>
+          </a:bodyPr>
+          <a:lstStyle/>
+          <a:p>
+            <a:pPr algn="ctr" indent="0" marL="0">
+              <a:lnSpc>
+                <a:spcPct val="130000"/>
+              </a:lnSpc>
+              <a:buNone/>
+            </a:pPr>
+            <a:r>
+              <a:rPr lang="en-US" sz="1400" dirty="0">
                 <a:solidFill>
                   <a:srgbClr val="374151"/>
                 </a:solidFill>
@@ -2378,7 +4898,95 @@
                 <a:ea typeface="Calibri" pitchFamily="34" charset="-122"/>
                 <a:cs typeface="Calibri" pitchFamily="34" charset="-120"/>
               </a:rPr>
-              <a:t>プロンプトの工夫による精度向上</a:t>
+              <a:t>顧客情報を入力</a:t>
+            </a:r>
+            <a:endParaRPr lang="en-US" sz="1400" dirty="0"/>
+          </a:p>
+          <a:p>
+            <a:pPr algn="ctr" indent="0" marL="0">
+              <a:lnSpc>
+                <a:spcPct val="130000"/>
+              </a:lnSpc>
+              <a:buNone/>
+            </a:pPr>
+            <a:r>
+              <a:rPr lang="en-US" sz="1400" dirty="0">
+                <a:solidFill>
+                  <a:srgbClr val="374151"/>
+                </a:solidFill>
+                <a:latin typeface="Calibri" pitchFamily="34" charset="0"/>
+                <a:ea typeface="Calibri" pitchFamily="34" charset="-122"/>
+                <a:cs typeface="Calibri" pitchFamily="34" charset="-120"/>
+              </a:rPr>
+              <a:t>AI が最適な提案を自動生成</a:t>
+            </a:r>
+            <a:endParaRPr lang="en-US" sz="1400" dirty="0"/>
+          </a:p>
+        </p:txBody>
+      </p:sp>
+      <p:sp>
+        <p:nvSpPr>
+          <p:cNvPr id="15" name="Shape 13"/>
+          <p:cNvSpPr/>
+          <p:nvPr/>
+        </p:nvSpPr>
+        <p:spPr>
+          <a:xfrm>
+            <a:off x="5989320" y="914400"/>
+            <a:ext cx="2286000" cy="1828800"/>
+          </a:xfrm>
+          <a:prstGeom prst="rect">
+            <a:avLst>
+              <a:gd name="adj" fmla="val 2500"/>
+            </a:avLst>
+          </a:prstGeom>
+          <a:solidFill>
+            <a:srgbClr val="D1FAE5"/>
+          </a:solidFill>
+          <a:ln w="12700">
+            <a:solidFill>
+              <a:srgbClr val="059669"/>
+            </a:solidFill>
+            <a:prstDash val="solid"/>
+          </a:ln>
+        </p:spPr>
+      </p:sp>
+      <p:sp>
+        <p:nvSpPr>
+          <p:cNvPr id="16" name="Text 14"/>
+          <p:cNvSpPr/>
+          <p:nvPr/>
+        </p:nvSpPr>
+        <p:spPr>
+          <a:xfrm>
+            <a:off x="5989320" y="1143000"/>
+            <a:ext cx="2286000" cy="320040"/>
+          </a:xfrm>
+          <a:prstGeom prst="rect">
+            <a:avLst/>
+          </a:prstGeom>
+          <a:noFill/>
+          <a:ln/>
+        </p:spPr>
+        <p:txBody>
+          <a:bodyPr wrap="square" rtlCol="0" anchor="ctr">
+            <a:normAutofit/>
+          </a:bodyPr>
+          <a:lstStyle/>
+          <a:p>
+            <a:pPr algn="ctr" indent="0" marL="0">
+              <a:buNone/>
+            </a:pPr>
+            <a:r>
+              <a:rPr lang="en-US" sz="1600" b="1" dirty="0">
+                <a:solidFill>
+                  <a:srgbClr val="059669"/>
+                </a:solidFill>
+                <a:latin typeface="Calibri" pitchFamily="34" charset="0"/>
+                <a:ea typeface="Calibri" pitchFamily="34" charset="-122"/>
+                <a:cs typeface="Calibri" pitchFamily="34" charset="-120"/>
+              </a:rPr>
+              <a:t>品質安定化</a:t>
             </a:r>
             <a:endParaRPr lang="en-US" sz="1600" dirty="0"/>
           </a:p>
@@ -2386,30 +4994,35 @@
       </p:sp>
       <p:sp>
         <p:nvSpPr>
-          <p:cNvPr id="7" name="Text 5"/>
-          <p:cNvSpPr/>
-          <p:nvPr/>
-        </p:nvSpPr>
-        <p:spPr>
-          <a:xfrm>
-            <a:off x="1097280" y="2743200"/>
-            <a:ext cx="7315200" cy="457200"/>
-          </a:xfrm>
-          <a:prstGeom prst="rect">
-            <a:avLst/>
-          </a:prstGeom>
-          <a:noFill/>
-          <a:ln/>
-        </p:spPr>
-        <p:txBody>
-          <a:bodyPr wrap="square" rtlCol="0" anchor="t"/>
-          <a:lstStyle/>
-          <a:p>
-            <a:pPr algn="l" indent="0" marL="0">
-              <a:buNone/>
-            </a:pPr>
-            <a:r>
-              <a:rPr lang="en-US" sz="1600" dirty="0">
+          <p:cNvPr id="17" name="Text 15"/>
+          <p:cNvSpPr/>
+          <p:nvPr/>
+        </p:nvSpPr>
+        <p:spPr>
+          <a:xfrm>
+            <a:off x="6126480" y="1508760"/>
+            <a:ext cx="2011680" cy="1051560"/>
+          </a:xfrm>
+          <a:prstGeom prst="rect">
+            <a:avLst/>
+          </a:prstGeom>
+          <a:noFill/>
+          <a:ln/>
+        </p:spPr>
+        <p:txBody>
+          <a:bodyPr wrap="square" rtlCol="0" anchor="ctr">
+            <a:normAutofit/>
+          </a:bodyPr>
+          <a:lstStyle/>
+          <a:p>
+            <a:pPr algn="ctr" indent="0" marL="0">
+              <a:lnSpc>
+                <a:spcPct val="130000"/>
+              </a:lnSpc>
+              <a:buNone/>
+            </a:pPr>
+            <a:r>
+              <a:rPr lang="en-US" sz="1400" dirty="0">
                 <a:solidFill>
                   <a:srgbClr val="374151"/>
                 </a:solidFill>
@@ -2417,38 +5030,19 @@
                 <a:ea typeface="Calibri" pitchFamily="34" charset="-122"/>
                 <a:cs typeface="Calibri" pitchFamily="34" charset="-120"/>
               </a:rPr>
-              <a:t>JSON 形式出力の効率性</a:t>
-            </a:r>
-            <a:endParaRPr lang="en-US" sz="1600" dirty="0"/>
-          </a:p>
-        </p:txBody>
-      </p:sp>
-      <p:sp>
-        <p:nvSpPr>
-          <p:cNvPr id="8" name="Text 6"/>
-          <p:cNvSpPr/>
-          <p:nvPr/>
-        </p:nvSpPr>
-        <p:spPr>
-          <a:xfrm>
-            <a:off x="1097280" y="3337560"/>
-            <a:ext cx="7315200" cy="457200"/>
-          </a:xfrm>
-          <a:prstGeom prst="rect">
-            <a:avLst/>
-          </a:prstGeom>
-          <a:noFill/>
-          <a:ln/>
-        </p:spPr>
-        <p:txBody>
-          <a:bodyPr wrap="square" rtlCol="0" anchor="t"/>
-          <a:lstStyle/>
-          <a:p>
-            <a:pPr algn="l" indent="0" marL="0">
-              <a:buNone/>
-            </a:pPr>
-            <a:r>
-              <a:rPr lang="en-US" sz="1600" dirty="0">
+              <a:t>経験の有無問わず</a:t>
+            </a:r>
+            <a:endParaRPr lang="en-US" sz="1400" dirty="0"/>
+          </a:p>
+          <a:p>
+            <a:pPr algn="ctr" indent="0" marL="0">
+              <a:lnSpc>
+                <a:spcPct val="130000"/>
+              </a:lnSpc>
+              <a:buNone/>
+            </a:pPr>
+            <a:r>
+              <a:rPr lang="en-US" sz="1400" dirty="0">
                 <a:solidFill>
                   <a:srgbClr val="374151"/>
                 </a:solidFill>
@@ -2456,48 +5050,9 @@
                 <a:ea typeface="Calibri" pitchFamily="34" charset="-122"/>
                 <a:cs typeface="Calibri" pitchFamily="34" charset="-120"/>
               </a:rPr>
-              <a:t>実績値：初稿作成が 30分以内に完成</a:t>
-            </a:r>
-            <a:endParaRPr lang="en-US" sz="1600" dirty="0"/>
-          </a:p>
-        </p:txBody>
-      </p:sp>
-      <p:sp>
-        <p:nvSpPr>
-          <p:cNvPr id="9" name="Text 7"/>
-          <p:cNvSpPr/>
-          <p:nvPr/>
-        </p:nvSpPr>
-        <p:spPr>
-          <a:xfrm>
-            <a:off x="1097280" y="3931920"/>
-            <a:ext cx="7315200" cy="457200"/>
-          </a:xfrm>
-          <a:prstGeom prst="rect">
-            <a:avLst/>
-          </a:prstGeom>
-          <a:noFill/>
-          <a:ln/>
-        </p:spPr>
-        <p:txBody>
-          <a:bodyPr wrap="square" rtlCol="0" anchor="t"/>
-          <a:lstStyle/>
-          <a:p>
-            <a:pPr algn="l" indent="0" marL="0">
-              <a:buNone/>
-            </a:pPr>
-            <a:r>
-              <a:rPr lang="en-US" sz="1600" dirty="0">
-                <a:solidFill>
-                  <a:srgbClr val="374151"/>
-                </a:solidFill>
-                <a:latin typeface="Calibri" pitchFamily="34" charset="0"/>
-                <a:ea typeface="Calibri" pitchFamily="34" charset="-122"/>
-                <a:cs typeface="Calibri" pitchFamily="34" charset="-120"/>
-              </a:rPr>
-              <a:t>時間短縮率：従来比 80～90% 削減</a:t>
-            </a:r>
-            <a:endParaRPr lang="en-US" sz="1600" dirty="0"/>
+              <a:t>一定水準の提案書が完成</a:t>
+            </a:r>
+            <a:endParaRPr lang="en-US" sz="1400" dirty="0"/>
           </a:p>
         </p:txBody>
       </p:sp>
@@ -2542,74 +5097,137 @@
         <p:spPr>
           <a:xfrm>
             <a:off x="0" y="0"/>
-            <a:ext cx="9144000" cy="731520"/>
+            <a:ext cx="9144000" cy="32004"/>
           </a:xfrm>
           <a:prstGeom prst="rect">
             <a:avLst/>
           </a:prstGeom>
           <a:solidFill>
-            <a:srgbClr val="1B2A4A"/>
+            <a:srgbClr val="2563EB"/>
           </a:solidFill>
           <a:ln/>
         </p:spPr>
       </p:sp>
       <p:sp>
         <p:nvSpPr>
-          <p:cNvPr id="3" name="Text 1"/>
+          <p:cNvPr id="3" name="Shape 1"/>
           <p:cNvSpPr/>
           <p:nvPr/>
         </p:nvSpPr>
         <p:spPr>
           <a:xfrm>
             <a:off x="685800" y="137160"/>
-            <a:ext cx="7772400" cy="457200"/>
-          </a:xfrm>
-          <a:prstGeom prst="rect">
-            <a:avLst/>
-          </a:prstGeom>
-          <a:noFill/>
-          <a:ln/>
-        </p:spPr>
-        <p:txBody>
-          <a:bodyPr wrap="square" rtlCol="0" anchor="ctr"/>
-          <a:lstStyle/>
-          <a:p>
-            <a:pPr algn="l" indent="0" marL="0">
-              <a:buNone/>
-            </a:pPr>
-            <a:r>
-              <a:rPr lang="en-US" sz="3200" b="1" dirty="0">
-                <a:solidFill>
-                  <a:srgbClr val="FFFFFF"/>
-                </a:solidFill>
-                <a:latin typeface="Calibri" pitchFamily="34" charset="0"/>
-                <a:ea typeface="Calibri" pitchFamily="34" charset="-122"/>
-                <a:cs typeface="Calibri" pitchFamily="34" charset="-120"/>
-              </a:rPr>
-              <a:t>実演：提案書自動生成デモ</a:t>
-            </a:r>
-            <a:endParaRPr lang="en-US" sz="3200" dirty="0"/>
-          </a:p>
-        </p:txBody>
-      </p:sp>
-      <p:sp>
-        <p:nvSpPr>
-          <p:cNvPr id="4" name="Shape 2"/>
-          <p:cNvSpPr/>
-          <p:nvPr/>
-        </p:nvSpPr>
-        <p:spPr>
-          <a:xfrm>
-            <a:off x="685800" y="1097280"/>
-            <a:ext cx="7772400" cy="3474720"/>
-          </a:xfrm>
-          <a:prstGeom prst="rect">
-            <a:avLst/>
+            <a:ext cx="1353312" cy="256032"/>
+          </a:xfrm>
+          <a:prstGeom prst="rect">
+            <a:avLst>
+              <a:gd name="adj" fmla="val 17857"/>
+            </a:avLst>
           </a:prstGeom>
           <a:solidFill>
-            <a:srgbClr val="000000"/>
+            <a:srgbClr val="DBEAFE"/>
           </a:solidFill>
-          <a:ln w="12700">
+          <a:ln/>
+        </p:spPr>
+      </p:sp>
+      <p:sp>
+        <p:nvSpPr>
+          <p:cNvPr id="4" name="Text 2"/>
+          <p:cNvSpPr/>
+          <p:nvPr/>
+        </p:nvSpPr>
+        <p:spPr>
+          <a:xfrm>
+            <a:off x="685800" y="137160"/>
+            <a:ext cx="1353312" cy="256032"/>
+          </a:xfrm>
+          <a:prstGeom prst="rect">
+            <a:avLst/>
+          </a:prstGeom>
+          <a:noFill/>
+          <a:ln/>
+        </p:spPr>
+        <p:txBody>
+          <a:bodyPr wrap="square" rtlCol="0" anchor="ctr">
+            <a:normAutofit/>
+          </a:bodyPr>
+          <a:lstStyle/>
+          <a:p>
+            <a:pPr algn="ctr" indent="0" marL="0">
+              <a:buNone/>
+            </a:pPr>
+            <a:r>
+              <a:rPr lang="en-US" sz="1000" b="1" dirty="0">
+                <a:solidFill>
+                  <a:srgbClr val="2563EB"/>
+                </a:solidFill>
+                <a:latin typeface="Calibri" pitchFamily="34" charset="0"/>
+                <a:ea typeface="Calibri" pitchFamily="34" charset="-122"/>
+                <a:cs typeface="Calibri" pitchFamily="34" charset="-120"/>
+              </a:rPr>
+              <a:t>DEMO PREP</a:t>
+            </a:r>
+            <a:endParaRPr lang="en-US" sz="1000" dirty="0"/>
+          </a:p>
+        </p:txBody>
+      </p:sp>
+      <p:sp>
+        <p:nvSpPr>
+          <p:cNvPr id="5" name="Text 3"/>
+          <p:cNvSpPr/>
+          <p:nvPr/>
+        </p:nvSpPr>
+        <p:spPr>
+          <a:xfrm>
+            <a:off x="685800" y="457200"/>
+            <a:ext cx="7772400" cy="411480"/>
+          </a:xfrm>
+          <a:prstGeom prst="rect">
+            <a:avLst/>
+          </a:prstGeom>
+          <a:noFill/>
+          <a:ln/>
+        </p:spPr>
+        <p:txBody>
+          <a:bodyPr wrap="square" rtlCol="0" anchor="ctr">
+            <a:normAutofit/>
+          </a:bodyPr>
+          <a:lstStyle/>
+          <a:p>
+            <a:pPr indent="0" marL="0">
+              <a:buNone/>
+            </a:pPr>
+            <a:r>
+              <a:rPr lang="en-US" sz="2400" b="1" dirty="0">
+                <a:solidFill>
+                  <a:srgbClr val="111827"/>
+                </a:solidFill>
+                <a:latin typeface="Calibri" pitchFamily="34" charset="0"/>
+                <a:ea typeface="Calibri" pitchFamily="34" charset="-122"/>
+                <a:cs typeface="Calibri" pitchFamily="34" charset="-120"/>
+              </a:rPr>
+              <a:t>実演のシナリオ</a:t>
+            </a:r>
+            <a:endParaRPr lang="en-US" sz="2400" dirty="0"/>
+          </a:p>
+        </p:txBody>
+      </p:sp>
+      <p:sp>
+        <p:nvSpPr>
+          <p:cNvPr id="6" name="Shape 4"/>
+          <p:cNvSpPr/>
+          <p:nvPr/>
+        </p:nvSpPr>
+        <p:spPr>
+          <a:xfrm>
+            <a:off x="685800" y="4777740"/>
+            <a:ext cx="7772400" cy="0"/>
+          </a:xfrm>
+          <a:prstGeom prst="line">
+            <a:avLst/>
+          </a:prstGeom>
+          <a:noFill/>
+          <a:ln w="6350">
             <a:solidFill>
               <a:srgbClr val="E5E7EB"/>
             </a:solidFill>
@@ -2619,74 +5237,190 @@
       </p:sp>
       <p:sp>
         <p:nvSpPr>
-          <p:cNvPr id="5" name="Text 3"/>
-          <p:cNvSpPr/>
-          <p:nvPr/>
-        </p:nvSpPr>
-        <p:spPr>
-          <a:xfrm>
-            <a:off x="685800" y="2286000"/>
-            <a:ext cx="7772400" cy="1371600"/>
-          </a:xfrm>
-          <a:prstGeom prst="rect">
-            <a:avLst/>
-          </a:prstGeom>
-          <a:noFill/>
-          <a:ln/>
-        </p:spPr>
-        <p:txBody>
-          <a:bodyPr wrap="square" rtlCol="0" anchor="ctr"/>
-          <a:lstStyle/>
-          <a:p>
-            <a:pPr algn="ctr" indent="0" marL="0">
+          <p:cNvPr id="7" name="Text 5"/>
+          <p:cNvSpPr/>
+          <p:nvPr/>
+        </p:nvSpPr>
+        <p:spPr>
+          <a:xfrm>
+            <a:off x="7772400" y="4796028"/>
+            <a:ext cx="1097280" cy="274320"/>
+          </a:xfrm>
+          <a:prstGeom prst="rect">
+            <a:avLst/>
+          </a:prstGeom>
+          <a:noFill/>
+          <a:ln/>
+        </p:spPr>
+        <p:txBody>
+          <a:bodyPr wrap="square" rtlCol="0" anchor="ctr">
+            <a:normAutofit/>
+          </a:bodyPr>
+          <a:lstStyle/>
+          <a:p>
+            <a:pPr algn="r" indent="0" marL="0">
+              <a:buNone/>
+            </a:pPr>
+            <a:r>
+              <a:rPr lang="en-US" sz="1000" dirty="0">
+                <a:solidFill>
+                  <a:srgbClr val="9CA3AF"/>
+                </a:solidFill>
+                <a:latin typeface="Calibri" pitchFamily="34" charset="0"/>
+                <a:ea typeface="Calibri" pitchFamily="34" charset="-122"/>
+                <a:cs typeface="Calibri" pitchFamily="34" charset="-120"/>
+              </a:rPr>
+              <a:t>5 / 12</a:t>
+            </a:r>
+            <a:endParaRPr lang="en-US" sz="1000" dirty="0"/>
+          </a:p>
+        </p:txBody>
+      </p:sp>
+      <p:sp>
+        <p:nvSpPr>
+          <p:cNvPr id="8" name="Text 6"/>
+          <p:cNvSpPr/>
+          <p:nvPr/>
+        </p:nvSpPr>
+        <p:spPr>
+          <a:xfrm>
+            <a:off x="685800" y="4796028"/>
+            <a:ext cx="1828800" cy="274320"/>
+          </a:xfrm>
+          <a:prstGeom prst="rect">
+            <a:avLst/>
+          </a:prstGeom>
+          <a:noFill/>
+          <a:ln/>
+        </p:spPr>
+        <p:txBody>
+          <a:bodyPr wrap="square" rtlCol="0" anchor="ctr">
+            <a:normAutofit/>
+          </a:bodyPr>
+          <a:lstStyle/>
+          <a:p>
+            <a:pPr algn="l" indent="0" marL="0">
+              <a:buNone/>
+            </a:pPr>
+            <a:r>
+              <a:rPr lang="en-US" sz="1000" dirty="0">
+                <a:solidFill>
+                  <a:srgbClr val="9CA3AF"/>
+                </a:solidFill>
+                <a:latin typeface="Calibri" pitchFamily="34" charset="0"/>
+                <a:ea typeface="Calibri" pitchFamily="34" charset="-122"/>
+                <a:cs typeface="Calibri" pitchFamily="34" charset="-120"/>
+              </a:rPr>
+              <a:t>P-03</a:t>
+            </a:r>
+            <a:endParaRPr lang="en-US" sz="1000" dirty="0"/>
+          </a:p>
+        </p:txBody>
+      </p:sp>
+      <p:sp>
+        <p:nvSpPr>
+          <p:cNvPr id="9" name="Shape 7"/>
+          <p:cNvSpPr/>
+          <p:nvPr/>
+        </p:nvSpPr>
+        <p:spPr>
+          <a:xfrm>
+            <a:off x="685800" y="822960"/>
+            <a:ext cx="7772400" cy="1097280"/>
+          </a:xfrm>
+          <a:prstGeom prst="rect">
+            <a:avLst>
+              <a:gd name="adj" fmla="val 4167"/>
+            </a:avLst>
+          </a:prstGeom>
+          <a:solidFill>
+            <a:srgbClr val="DBEAFE"/>
+          </a:solidFill>
+          <a:ln/>
+        </p:spPr>
+      </p:sp>
+      <p:sp>
+        <p:nvSpPr>
+          <p:cNvPr id="10" name="Text 8"/>
+          <p:cNvSpPr/>
+          <p:nvPr/>
+        </p:nvSpPr>
+        <p:spPr>
+          <a:xfrm>
+            <a:off x="960120" y="868680"/>
+            <a:ext cx="7680960" cy="365760"/>
+          </a:xfrm>
+          <a:prstGeom prst="rect">
+            <a:avLst/>
+          </a:prstGeom>
+          <a:noFill/>
+          <a:ln/>
+        </p:spPr>
+        <p:txBody>
+          <a:bodyPr wrap="square" rtlCol="0" anchor="ctr">
+            <a:normAutofit/>
+          </a:bodyPr>
+          <a:lstStyle/>
+          <a:p>
+            <a:pPr indent="0" marL="0">
               <a:buNone/>
             </a:pPr>
             <a:r>
               <a:rPr lang="en-US" sz="1600" dirty="0">
                 <a:solidFill>
-                  <a:srgbClr val="6B7280"/>
-                </a:solidFill>
-                <a:latin typeface="Calibri" pitchFamily="34" charset="0"/>
-                <a:ea typeface="Calibri" pitchFamily="34" charset="-122"/>
-                <a:cs typeface="Calibri" pitchFamily="34" charset="-120"/>
-              </a:rPr>
-              <a:t>【実演動画が挿入されます】</a:t>
+                  <a:srgbClr val="111827"/>
+                </a:solidFill>
+                <a:latin typeface="Calibri" pitchFamily="34" charset="0"/>
+                <a:ea typeface="Calibri" pitchFamily="34" charset="-122"/>
+                <a:cs typeface="Calibri" pitchFamily="34" charset="-120"/>
+              </a:rPr>
+              <a:t>営業チームが新規顧客向けの提案書を 80秒で作成する様子をお見せします。</a:t>
             </a:r>
             <a:endParaRPr lang="en-US" sz="1600" dirty="0"/>
           </a:p>
-          <a:p>
-            <a:pPr algn="ctr" indent="0" marL="0">
-              <a:buNone/>
-            </a:pPr>
-            <a:r>
-              <a:rPr lang="en-US" sz="1600" dirty="0">
-                <a:solidFill>
-                  <a:srgbClr val="6B7280"/>
-                </a:solidFill>
-                <a:latin typeface="Calibri" pitchFamily="34" charset="0"/>
-                <a:ea typeface="Calibri" pitchFamily="34" charset="-122"/>
-                <a:cs typeface="Calibri" pitchFamily="34" charset="-120"/>
-              </a:rPr>
-              <a:t>提案書自動生成デモンストレーション</a:t>
-            </a:r>
-            <a:endParaRPr lang="en-US" sz="1600" dirty="0"/>
-          </a:p>
-          <a:p>
-            <a:pPr algn="ctr" indent="0" marL="0">
-              <a:buNone/>
-            </a:pPr>
-            <a:r>
-              <a:rPr lang="en-US" sz="1600" dirty="0">
-                <a:solidFill>
-                  <a:srgbClr val="6B7280"/>
-                </a:solidFill>
-                <a:latin typeface="Calibri" pitchFamily="34" charset="0"/>
-                <a:ea typeface="Calibri" pitchFamily="34" charset="-122"/>
-                <a:cs typeface="Calibri" pitchFamily="34" charset="-120"/>
-              </a:rPr>
-              <a:t>（80.6秒）</a:t>
-            </a:r>
-            <a:endParaRPr lang="en-US" sz="1600" dirty="0"/>
+        </p:txBody>
+      </p:sp>
+      <p:sp>
+        <p:nvSpPr>
+          <p:cNvPr id="11" name="Text 9"/>
+          <p:cNvSpPr/>
+          <p:nvPr/>
+        </p:nvSpPr>
+        <p:spPr>
+          <a:xfrm>
+            <a:off x="960120" y="1261872"/>
+            <a:ext cx="7680960" cy="640080"/>
+          </a:xfrm>
+          <a:prstGeom prst="rect">
+            <a:avLst/>
+          </a:prstGeom>
+          <a:noFill/>
+          <a:ln/>
+        </p:spPr>
+        <p:txBody>
+          <a:bodyPr wrap="square" rtlCol="0" anchor="ctr">
+            <a:normAutofit/>
+          </a:bodyPr>
+          <a:lstStyle/>
+          <a:p>
+            <a:pPr indent="0" marL="0">
+              <a:lnSpc>
+                <a:spcPct val="120000"/>
+              </a:lnSpc>
+              <a:buNone/>
+            </a:pPr>
+            <a:r>
+              <a:rPr lang="en-US" sz="2000" b="1" dirty="0">
+                <a:solidFill>
+                  <a:srgbClr val="2563EB"/>
+                </a:solidFill>
+                <a:latin typeface="Calibri" pitchFamily="34" charset="0"/>
+                <a:ea typeface="Calibri" pitchFamily="34" charset="-122"/>
+                <a:cs typeface="Calibri" pitchFamily="34" charset="-120"/>
+              </a:rPr>
+              <a:t>従来: 3日 → Gemini: 数分</a:t>
+            </a:r>
+            <a:endParaRPr lang="en-US" sz="2000" dirty="0"/>
           </a:p>
         </p:txBody>
       </p:sp>
@@ -2731,121 +5465,279 @@
         <p:spPr>
           <a:xfrm>
             <a:off x="0" y="0"/>
-            <a:ext cx="9144000" cy="731520"/>
+            <a:ext cx="9144000" cy="32004"/>
           </a:xfrm>
           <a:prstGeom prst="rect">
             <a:avLst/>
           </a:prstGeom>
           <a:solidFill>
-            <a:srgbClr val="1B2A4A"/>
+            <a:srgbClr val="2563EB"/>
           </a:solidFill>
           <a:ln/>
         </p:spPr>
       </p:sp>
       <p:sp>
         <p:nvSpPr>
-          <p:cNvPr id="3" name="Text 1"/>
+          <p:cNvPr id="3" name="Shape 1"/>
           <p:cNvSpPr/>
           <p:nvPr/>
         </p:nvSpPr>
         <p:spPr>
           <a:xfrm>
             <a:off x="685800" y="137160"/>
-            <a:ext cx="7772400" cy="457200"/>
-          </a:xfrm>
-          <a:prstGeom prst="rect">
-            <a:avLst/>
-          </a:prstGeom>
-          <a:noFill/>
-          <a:ln/>
-        </p:spPr>
-        <p:txBody>
-          <a:bodyPr wrap="square" rtlCol="0" anchor="ctr"/>
+            <a:ext cx="1353312" cy="256032"/>
+          </a:xfrm>
+          <a:prstGeom prst="rect">
+            <a:avLst>
+              <a:gd name="adj" fmla="val 17857"/>
+            </a:avLst>
+          </a:prstGeom>
+          <a:solidFill>
+            <a:srgbClr val="DBEAFE"/>
+          </a:solidFill>
+          <a:ln/>
+        </p:spPr>
+      </p:sp>
+      <p:sp>
+        <p:nvSpPr>
+          <p:cNvPr id="4" name="Text 2"/>
+          <p:cNvSpPr/>
+          <p:nvPr/>
+        </p:nvSpPr>
+        <p:spPr>
+          <a:xfrm>
+            <a:off x="685800" y="137160"/>
+            <a:ext cx="1353312" cy="256032"/>
+          </a:xfrm>
+          <a:prstGeom prst="rect">
+            <a:avLst/>
+          </a:prstGeom>
+          <a:noFill/>
+          <a:ln/>
+        </p:spPr>
+        <p:txBody>
+          <a:bodyPr wrap="square" rtlCol="0" anchor="ctr">
+            <a:normAutofit/>
+          </a:bodyPr>
+          <a:lstStyle/>
+          <a:p>
+            <a:pPr algn="ctr" indent="0" marL="0">
+              <a:buNone/>
+            </a:pPr>
+            <a:r>
+              <a:rPr lang="en-US" sz="1000" b="1" dirty="0">
+                <a:solidFill>
+                  <a:srgbClr val="2563EB"/>
+                </a:solidFill>
+                <a:latin typeface="Calibri" pitchFamily="34" charset="0"/>
+                <a:ea typeface="Calibri" pitchFamily="34" charset="-122"/>
+                <a:cs typeface="Calibri" pitchFamily="34" charset="-120"/>
+              </a:rPr>
+              <a:t>DEMO LIVE</a:t>
+            </a:r>
+            <a:endParaRPr lang="en-US" sz="1000" dirty="0"/>
+          </a:p>
+        </p:txBody>
+      </p:sp>
+      <p:sp>
+        <p:nvSpPr>
+          <p:cNvPr id="5" name="Text 3"/>
+          <p:cNvSpPr/>
+          <p:nvPr/>
+        </p:nvSpPr>
+        <p:spPr>
+          <a:xfrm>
+            <a:off x="685800" y="457200"/>
+            <a:ext cx="7772400" cy="411480"/>
+          </a:xfrm>
+          <a:prstGeom prst="rect">
+            <a:avLst/>
+          </a:prstGeom>
+          <a:noFill/>
+          <a:ln/>
+        </p:spPr>
+        <p:txBody>
+          <a:bodyPr wrap="square" rtlCol="0" anchor="ctr">
+            <a:normAutofit/>
+          </a:bodyPr>
+          <a:lstStyle/>
+          <a:p>
+            <a:pPr indent="0" marL="0">
+              <a:buNone/>
+            </a:pPr>
+            <a:r>
+              <a:rPr lang="en-US" sz="2400" b="1" dirty="0">
+                <a:solidFill>
+                  <a:srgbClr val="111827"/>
+                </a:solidFill>
+                <a:latin typeface="Calibri" pitchFamily="34" charset="0"/>
+                <a:ea typeface="Calibri" pitchFamily="34" charset="-122"/>
+                <a:cs typeface="Calibri" pitchFamily="34" charset="-120"/>
+              </a:rPr>
+              <a:t>実演: 提案書自動生成</a:t>
+            </a:r>
+            <a:endParaRPr lang="en-US" sz="2400" dirty="0"/>
+          </a:p>
+        </p:txBody>
+      </p:sp>
+      <p:sp>
+        <p:nvSpPr>
+          <p:cNvPr id="6" name="Shape 4"/>
+          <p:cNvSpPr/>
+          <p:nvPr/>
+        </p:nvSpPr>
+        <p:spPr>
+          <a:xfrm>
+            <a:off x="685800" y="4777740"/>
+            <a:ext cx="7772400" cy="0"/>
+          </a:xfrm>
+          <a:prstGeom prst="line">
+            <a:avLst/>
+          </a:prstGeom>
+          <a:noFill/>
+          <a:ln w="6350">
+            <a:solidFill>
+              <a:srgbClr val="E5E7EB"/>
+            </a:solidFill>
+            <a:prstDash val="solid"/>
+          </a:ln>
+        </p:spPr>
+      </p:sp>
+      <p:sp>
+        <p:nvSpPr>
+          <p:cNvPr id="7" name="Text 5"/>
+          <p:cNvSpPr/>
+          <p:nvPr/>
+        </p:nvSpPr>
+        <p:spPr>
+          <a:xfrm>
+            <a:off x="7772400" y="4796028"/>
+            <a:ext cx="1097280" cy="274320"/>
+          </a:xfrm>
+          <a:prstGeom prst="rect">
+            <a:avLst/>
+          </a:prstGeom>
+          <a:noFill/>
+          <a:ln/>
+        </p:spPr>
+        <p:txBody>
+          <a:bodyPr wrap="square" rtlCol="0" anchor="ctr">
+            <a:normAutofit/>
+          </a:bodyPr>
+          <a:lstStyle/>
+          <a:p>
+            <a:pPr algn="r" indent="0" marL="0">
+              <a:buNone/>
+            </a:pPr>
+            <a:r>
+              <a:rPr lang="en-US" sz="1000" dirty="0">
+                <a:solidFill>
+                  <a:srgbClr val="9CA3AF"/>
+                </a:solidFill>
+                <a:latin typeface="Calibri" pitchFamily="34" charset="0"/>
+                <a:ea typeface="Calibri" pitchFamily="34" charset="-122"/>
+                <a:cs typeface="Calibri" pitchFamily="34" charset="-120"/>
+              </a:rPr>
+              <a:t>6 / 12</a:t>
+            </a:r>
+            <a:endParaRPr lang="en-US" sz="1000" dirty="0"/>
+          </a:p>
+        </p:txBody>
+      </p:sp>
+      <p:sp>
+        <p:nvSpPr>
+          <p:cNvPr id="8" name="Text 6"/>
+          <p:cNvSpPr/>
+          <p:nvPr/>
+        </p:nvSpPr>
+        <p:spPr>
+          <a:xfrm>
+            <a:off x="685800" y="4796028"/>
+            <a:ext cx="1828800" cy="274320"/>
+          </a:xfrm>
+          <a:prstGeom prst="rect">
+            <a:avLst/>
+          </a:prstGeom>
+          <a:noFill/>
+          <a:ln/>
+        </p:spPr>
+        <p:txBody>
+          <a:bodyPr wrap="square" rtlCol="0" anchor="ctr">
+            <a:normAutofit/>
+          </a:bodyPr>
           <a:lstStyle/>
           <a:p>
             <a:pPr algn="l" indent="0" marL="0">
               <a:buNone/>
             </a:pPr>
             <a:r>
-              <a:rPr lang="en-US" sz="3200" b="1" dirty="0">
-                <a:solidFill>
-                  <a:srgbClr val="FFFFFF"/>
-                </a:solidFill>
-                <a:latin typeface="Calibri" pitchFamily="34" charset="0"/>
-                <a:ea typeface="Calibri" pitchFamily="34" charset="-122"/>
-                <a:cs typeface="Calibri" pitchFamily="34" charset="-120"/>
-              </a:rPr>
-              <a:t>精度を上げる 5つのコツ</a:t>
-            </a:r>
-            <a:endParaRPr lang="en-US" sz="3200" dirty="0"/>
-          </a:p>
-        </p:txBody>
-      </p:sp>
-      <p:sp>
-        <p:nvSpPr>
-          <p:cNvPr id="4" name="Text 2"/>
-          <p:cNvSpPr/>
-          <p:nvPr/>
-        </p:nvSpPr>
-        <p:spPr>
-          <a:xfrm>
-            <a:off x="685800" y="1097280"/>
-            <a:ext cx="7772400" cy="365760"/>
-          </a:xfrm>
-          <a:prstGeom prst="rect">
-            <a:avLst/>
-          </a:prstGeom>
-          <a:noFill/>
-          <a:ln/>
-        </p:spPr>
-        <p:txBody>
-          <a:bodyPr wrap="square" rtlCol="0" anchor="ctr"/>
-          <a:lstStyle/>
-          <a:p>
-            <a:pPr algn="l" indent="0" marL="0">
-              <a:buNone/>
-            </a:pPr>
-            <a:r>
-              <a:rPr lang="en-US" sz="1800" b="1" dirty="0">
-                <a:solidFill>
-                  <a:srgbClr val="111827"/>
-                </a:solidFill>
-                <a:latin typeface="Calibri" pitchFamily="34" charset="0"/>
-                <a:ea typeface="Calibri" pitchFamily="34" charset="-122"/>
-                <a:cs typeface="Calibri" pitchFamily="34" charset="-120"/>
-              </a:rPr>
-              <a:t>プロンプトエンジニアリング</a:t>
-            </a:r>
-            <a:endParaRPr lang="en-US" sz="1800" dirty="0"/>
-          </a:p>
-        </p:txBody>
-      </p:sp>
-      <p:sp>
-        <p:nvSpPr>
-          <p:cNvPr id="5" name="Text 3"/>
-          <p:cNvSpPr/>
-          <p:nvPr/>
-        </p:nvSpPr>
-        <p:spPr>
-          <a:xfrm>
-            <a:off x="1097280" y="1554480"/>
-            <a:ext cx="7315200" cy="457200"/>
-          </a:xfrm>
-          <a:prstGeom prst="rect">
-            <a:avLst/>
-          </a:prstGeom>
-          <a:noFill/>
-          <a:ln/>
-        </p:spPr>
-        <p:txBody>
-          <a:bodyPr wrap="square" rtlCol="0" anchor="t"/>
-          <a:lstStyle/>
-          <a:p>
-            <a:pPr algn="l" indent="0" marL="0">
-              <a:buNone/>
-            </a:pPr>
-            <a:r>
-              <a:rPr lang="en-US" sz="1600" dirty="0">
+              <a:rPr lang="en-US" sz="1000" dirty="0">
+                <a:solidFill>
+                  <a:srgbClr val="9CA3AF"/>
+                </a:solidFill>
+                <a:latin typeface="Calibri" pitchFamily="34" charset="0"/>
+                <a:ea typeface="Calibri" pitchFamily="34" charset="-122"/>
+                <a:cs typeface="Calibri" pitchFamily="34" charset="-120"/>
+              </a:rPr>
+              <a:t>P-03</a:t>
+            </a:r>
+            <a:endParaRPr lang="en-US" sz="1000" dirty="0"/>
+          </a:p>
+        </p:txBody>
+      </p:sp>
+      <p:sp>
+        <p:nvSpPr>
+          <p:cNvPr id="9" name="Shape 7"/>
+          <p:cNvSpPr/>
+          <p:nvPr/>
+        </p:nvSpPr>
+        <p:spPr>
+          <a:xfrm>
+            <a:off x="685800" y="868680"/>
+            <a:ext cx="7772400" cy="1645920"/>
+          </a:xfrm>
+          <a:prstGeom prst="rect">
+            <a:avLst>
+              <a:gd name="adj" fmla="val 2778"/>
+            </a:avLst>
+          </a:prstGeom>
+          <a:solidFill>
+            <a:srgbClr val="F3F4F6"/>
+          </a:solidFill>
+          <a:ln/>
+        </p:spPr>
+      </p:sp>
+      <p:sp>
+        <p:nvSpPr>
+          <p:cNvPr id="10" name="Text 8"/>
+          <p:cNvSpPr/>
+          <p:nvPr/>
+        </p:nvSpPr>
+        <p:spPr>
+          <a:xfrm>
+            <a:off x="960120" y="914400"/>
+            <a:ext cx="7680960" cy="1554480"/>
+          </a:xfrm>
+          <a:prstGeom prst="rect">
+            <a:avLst/>
+          </a:prstGeom>
+          <a:noFill/>
+          <a:ln/>
+        </p:spPr>
+        <p:txBody>
+          <a:bodyPr wrap="square" rtlCol="0" anchor="ctr">
+            <a:normAutofit/>
+          </a:bodyPr>
+          <a:lstStyle/>
+          <a:p>
+            <a:pPr indent="0" marL="0">
+              <a:lnSpc>
+                <a:spcPct val="130000"/>
+              </a:lnSpc>
+              <a:buNone/>
+            </a:pPr>
+            <a:r>
+              <a:rPr lang="en-US" sz="1400" dirty="0">
                 <a:solidFill>
                   <a:srgbClr val="374151"/>
                 </a:solidFill>
@@ -2853,38 +5745,28 @@
                 <a:ea typeface="Calibri" pitchFamily="34" charset="-122"/>
                 <a:cs typeface="Calibri" pitchFamily="34" charset="-120"/>
               </a:rPr>
-              <a:t>顧客情報は「できるだけ詳しく」入力する</a:t>
-            </a:r>
-            <a:endParaRPr lang="en-US" sz="1600" dirty="0"/>
-          </a:p>
-        </p:txBody>
-      </p:sp>
-      <p:sp>
-        <p:nvSpPr>
-          <p:cNvPr id="6" name="Text 4"/>
-          <p:cNvSpPr/>
-          <p:nvPr/>
-        </p:nvSpPr>
-        <p:spPr>
-          <a:xfrm>
-            <a:off x="1097280" y="2148840"/>
-            <a:ext cx="7315200" cy="457200"/>
-          </a:xfrm>
-          <a:prstGeom prst="rect">
-            <a:avLst/>
-          </a:prstGeom>
-          <a:noFill/>
-          <a:ln/>
-        </p:spPr>
-        <p:txBody>
-          <a:bodyPr wrap="square" rtlCol="0" anchor="t"/>
-          <a:lstStyle/>
-          <a:p>
-            <a:pPr algn="l" indent="0" marL="0">
-              <a:buNone/>
-            </a:pPr>
-            <a:r>
-              <a:rPr lang="en-US" sz="1600" dirty="0">
+              <a:t>【実演動画: 80.6秒】</a:t>
+            </a:r>
+            <a:endParaRPr lang="en-US" sz="1400" dirty="0"/>
+          </a:p>
+          <a:p>
+            <a:pPr indent="0" marL="0">
+              <a:lnSpc>
+                <a:spcPct val="130000"/>
+              </a:lnSpc>
+              <a:buNone/>
+            </a:pPr>
+            <a:endParaRPr lang="en-US" sz="1400" dirty="0"/>
+          </a:p>
+          <a:p>
+            <a:pPr indent="0" marL="0">
+              <a:lnSpc>
+                <a:spcPct val="130000"/>
+              </a:lnSpc>
+              <a:buNone/>
+            </a:pPr>
+            <a:r>
+              <a:rPr lang="en-US" sz="1400" dirty="0">
                 <a:solidFill>
                   <a:srgbClr val="374151"/>
                 </a:solidFill>
@@ -2892,38 +5774,19 @@
                 <a:ea typeface="Calibri" pitchFamily="34" charset="-122"/>
                 <a:cs typeface="Calibri" pitchFamily="34" charset="-120"/>
               </a:rPr>
-              <a:t>提案書の構成を「箇条書き」で明確に指示</a:t>
-            </a:r>
-            <a:endParaRPr lang="en-US" sz="1600" dirty="0"/>
-          </a:p>
-        </p:txBody>
-      </p:sp>
-      <p:sp>
-        <p:nvSpPr>
-          <p:cNvPr id="7" name="Text 5"/>
-          <p:cNvSpPr/>
-          <p:nvPr/>
-        </p:nvSpPr>
-        <p:spPr>
-          <a:xfrm>
-            <a:off x="1097280" y="2743200"/>
-            <a:ext cx="7315200" cy="457200"/>
-          </a:xfrm>
-          <a:prstGeom prst="rect">
-            <a:avLst/>
-          </a:prstGeom>
-          <a:noFill/>
-          <a:ln/>
-        </p:spPr>
-        <p:txBody>
-          <a:bodyPr wrap="square" rtlCol="0" anchor="t"/>
-          <a:lstStyle/>
-          <a:p>
-            <a:pPr algn="l" indent="0" marL="0">
-              <a:buNone/>
-            </a:pPr>
-            <a:r>
-              <a:rPr lang="en-US" sz="1600" dirty="0">
+              <a:t>1. Google ドキュメントを開く</a:t>
+            </a:r>
+            <a:endParaRPr lang="en-US" sz="1400" dirty="0"/>
+          </a:p>
+          <a:p>
+            <a:pPr indent="0" marL="0">
+              <a:lnSpc>
+                <a:spcPct val="130000"/>
+              </a:lnSpc>
+              <a:buNone/>
+            </a:pPr>
+            <a:r>
+              <a:rPr lang="en-US" sz="1400" dirty="0">
                 <a:solidFill>
                   <a:srgbClr val="374151"/>
                 </a:solidFill>
@@ -2931,38 +5794,19 @@
                 <a:ea typeface="Calibri" pitchFamily="34" charset="-122"/>
                 <a:cs typeface="Calibri" pitchFamily="34" charset="-120"/>
               </a:rPr>
-              <a:t>文字数・形式・トーンを「具体的に」指定する</a:t>
-            </a:r>
-            <a:endParaRPr lang="en-US" sz="1600" dirty="0"/>
-          </a:p>
-        </p:txBody>
-      </p:sp>
-      <p:sp>
-        <p:nvSpPr>
-          <p:cNvPr id="8" name="Text 6"/>
-          <p:cNvSpPr/>
-          <p:nvPr/>
-        </p:nvSpPr>
-        <p:spPr>
-          <a:xfrm>
-            <a:off x="1097280" y="3337560"/>
-            <a:ext cx="7315200" cy="457200"/>
-          </a:xfrm>
-          <a:prstGeom prst="rect">
-            <a:avLst/>
-          </a:prstGeom>
-          <a:noFill/>
-          <a:ln/>
-        </p:spPr>
-        <p:txBody>
-          <a:bodyPr wrap="square" rtlCol="0" anchor="t"/>
-          <a:lstStyle/>
-          <a:p>
-            <a:pPr algn="l" indent="0" marL="0">
-              <a:buNone/>
-            </a:pPr>
-            <a:r>
-              <a:rPr lang="en-US" sz="1600" dirty="0">
+              <a:t>2. 『テンプレートから新提案書』を選択</a:t>
+            </a:r>
+            <a:endParaRPr lang="en-US" sz="1400" dirty="0"/>
+          </a:p>
+          <a:p>
+            <a:pPr indent="0" marL="0">
+              <a:lnSpc>
+                <a:spcPct val="130000"/>
+              </a:lnSpc>
+              <a:buNone/>
+            </a:pPr>
+            <a:r>
+              <a:rPr lang="en-US" sz="1400" dirty="0">
                 <a:solidFill>
                   <a:srgbClr val="374151"/>
                 </a:solidFill>
@@ -2970,38 +5814,19 @@
                 <a:ea typeface="Calibri" pitchFamily="34" charset="-122"/>
                 <a:cs typeface="Calibri" pitchFamily="34" charset="-120"/>
               </a:rPr>
-              <a:t>初稿はレビュー前提（完璧さを求めない）</a:t>
-            </a:r>
-            <a:endParaRPr lang="en-US" sz="1600" dirty="0"/>
-          </a:p>
-        </p:txBody>
-      </p:sp>
-      <p:sp>
-        <p:nvSpPr>
-          <p:cNvPr id="9" name="Text 7"/>
-          <p:cNvSpPr/>
-          <p:nvPr/>
-        </p:nvSpPr>
-        <p:spPr>
-          <a:xfrm>
-            <a:off x="1097280" y="3931920"/>
-            <a:ext cx="7315200" cy="457200"/>
-          </a:xfrm>
-          <a:prstGeom prst="rect">
-            <a:avLst/>
-          </a:prstGeom>
-          <a:noFill/>
-          <a:ln/>
-        </p:spPr>
-        <p:txBody>
-          <a:bodyPr wrap="square" rtlCol="0" anchor="t"/>
-          <a:lstStyle/>
-          <a:p>
-            <a:pPr algn="l" indent="0" marL="0">
-              <a:buNone/>
-            </a:pPr>
-            <a:r>
-              <a:rPr lang="en-US" sz="1600" dirty="0">
+              <a:t>3. 顧客情報を入力（企業名、業界、課題）</a:t>
+            </a:r>
+            <a:endParaRPr lang="en-US" sz="1400" dirty="0"/>
+          </a:p>
+          <a:p>
+            <a:pPr indent="0" marL="0">
+              <a:lnSpc>
+                <a:spcPct val="130000"/>
+              </a:lnSpc>
+              <a:buNone/>
+            </a:pPr>
+            <a:r>
+              <a:rPr lang="en-US" sz="1400" dirty="0">
                 <a:solidFill>
                   <a:srgbClr val="374151"/>
                 </a:solidFill>
@@ -3009,9 +5834,29 @@
                 <a:ea typeface="Calibri" pitchFamily="34" charset="-122"/>
                 <a:cs typeface="Calibri" pitchFamily="34" charset="-120"/>
               </a:rPr>
-              <a:t>複数案は「バリエーション指示」で効率化</a:t>
-            </a:r>
-            <a:endParaRPr lang="en-US" sz="1600" dirty="0"/>
+              <a:t>4. Gemini が 3 パターンの提案を自動生成</a:t>
+            </a:r>
+            <a:endParaRPr lang="en-US" sz="1400" dirty="0"/>
+          </a:p>
+          <a:p>
+            <a:pPr indent="0" marL="0">
+              <a:lnSpc>
+                <a:spcPct val="130000"/>
+              </a:lnSpc>
+              <a:buNone/>
+            </a:pPr>
+            <a:r>
+              <a:rPr lang="en-US" sz="1400" dirty="0">
+                <a:solidFill>
+                  <a:srgbClr val="374151"/>
+                </a:solidFill>
+                <a:latin typeface="Calibri" pitchFamily="34" charset="0"/>
+                <a:ea typeface="Calibri" pitchFamily="34" charset="-122"/>
+                <a:cs typeface="Calibri" pitchFamily="34" charset="-120"/>
+              </a:rPr>
+              <a:t>5. 最適な案を選び、数字を微調整して完成</a:t>
+            </a:r>
+            <a:endParaRPr lang="en-US" sz="1400" dirty="0"/>
           </a:p>
         </p:txBody>
       </p:sp>
@@ -3056,51 +5901,1027 @@
         <p:spPr>
           <a:xfrm>
             <a:off x="0" y="0"/>
-            <a:ext cx="9144000" cy="731520"/>
+            <a:ext cx="9144000" cy="32004"/>
           </a:xfrm>
           <a:prstGeom prst="rect">
             <a:avLst/>
           </a:prstGeom>
           <a:solidFill>
-            <a:srgbClr val="1B2A4A"/>
+            <a:srgbClr val="2563EB"/>
           </a:solidFill>
           <a:ln/>
         </p:spPr>
       </p:sp>
       <p:sp>
         <p:nvSpPr>
-          <p:cNvPr id="3" name="Text 1"/>
+          <p:cNvPr id="3" name="Shape 1"/>
           <p:cNvSpPr/>
           <p:nvPr/>
         </p:nvSpPr>
         <p:spPr>
           <a:xfrm>
             <a:off x="685800" y="137160"/>
-            <a:ext cx="7772400" cy="457200"/>
-          </a:xfrm>
-          <a:prstGeom prst="rect">
-            <a:avLst/>
-          </a:prstGeom>
-          <a:noFill/>
-          <a:ln/>
-        </p:spPr>
-        <p:txBody>
-          <a:bodyPr wrap="square" rtlCol="0" anchor="ctr"/>
+            <a:ext cx="1682496" cy="256032"/>
+          </a:xfrm>
+          <a:prstGeom prst="rect">
+            <a:avLst>
+              <a:gd name="adj" fmla="val 17857"/>
+            </a:avLst>
+          </a:prstGeom>
+          <a:solidFill>
+            <a:srgbClr val="DBEAFE"/>
+          </a:solidFill>
+          <a:ln/>
+        </p:spPr>
+      </p:sp>
+      <p:sp>
+        <p:nvSpPr>
+          <p:cNvPr id="4" name="Text 2"/>
+          <p:cNvSpPr/>
+          <p:nvPr/>
+        </p:nvSpPr>
+        <p:spPr>
+          <a:xfrm>
+            <a:off x="685800" y="137160"/>
+            <a:ext cx="1682496" cy="256032"/>
+          </a:xfrm>
+          <a:prstGeom prst="rect">
+            <a:avLst/>
+          </a:prstGeom>
+          <a:noFill/>
+          <a:ln/>
+        </p:spPr>
+        <p:txBody>
+          <a:bodyPr wrap="square" rtlCol="0" anchor="ctr">
+            <a:normAutofit/>
+          </a:bodyPr>
+          <a:lstStyle/>
+          <a:p>
+            <a:pPr algn="ctr" indent="0" marL="0">
+              <a:buNone/>
+            </a:pPr>
+            <a:r>
+              <a:rPr lang="en-US" sz="1000" b="1" dirty="0">
+                <a:solidFill>
+                  <a:srgbClr val="2563EB"/>
+                </a:solidFill>
+                <a:latin typeface="Calibri" pitchFamily="34" charset="0"/>
+                <a:ea typeface="Calibri" pitchFamily="34" charset="-122"/>
+                <a:cs typeface="Calibri" pitchFamily="34" charset="-120"/>
+              </a:rPr>
+              <a:t>HOW IT WORKS</a:t>
+            </a:r>
+            <a:endParaRPr lang="en-US" sz="1000" dirty="0"/>
+          </a:p>
+        </p:txBody>
+      </p:sp>
+      <p:sp>
+        <p:nvSpPr>
+          <p:cNvPr id="5" name="Text 3"/>
+          <p:cNvSpPr/>
+          <p:nvPr/>
+        </p:nvSpPr>
+        <p:spPr>
+          <a:xfrm>
+            <a:off x="685800" y="457200"/>
+            <a:ext cx="7772400" cy="411480"/>
+          </a:xfrm>
+          <a:prstGeom prst="rect">
+            <a:avLst/>
+          </a:prstGeom>
+          <a:noFill/>
+          <a:ln/>
+        </p:spPr>
+        <p:txBody>
+          <a:bodyPr wrap="square" rtlCol="0" anchor="ctr">
+            <a:normAutofit/>
+          </a:bodyPr>
+          <a:lstStyle/>
+          <a:p>
+            <a:pPr indent="0" marL="0">
+              <a:buNone/>
+            </a:pPr>
+            <a:r>
+              <a:rPr lang="en-US" sz="2400" b="1" dirty="0">
+                <a:solidFill>
+                  <a:srgbClr val="111827"/>
+                </a:solidFill>
+                <a:latin typeface="Calibri" pitchFamily="34" charset="0"/>
+                <a:ea typeface="Calibri" pitchFamily="34" charset="-122"/>
+                <a:cs typeface="Calibri" pitchFamily="34" charset="-120"/>
+              </a:rPr>
+              <a:t>提案書自動生成の仕組み</a:t>
+            </a:r>
+            <a:endParaRPr lang="en-US" sz="2400" dirty="0"/>
+          </a:p>
+        </p:txBody>
+      </p:sp>
+      <p:sp>
+        <p:nvSpPr>
+          <p:cNvPr id="6" name="Shape 4"/>
+          <p:cNvSpPr/>
+          <p:nvPr/>
+        </p:nvSpPr>
+        <p:spPr>
+          <a:xfrm>
+            <a:off x="685800" y="4777740"/>
+            <a:ext cx="7772400" cy="0"/>
+          </a:xfrm>
+          <a:prstGeom prst="line">
+            <a:avLst/>
+          </a:prstGeom>
+          <a:noFill/>
+          <a:ln w="6350">
+            <a:solidFill>
+              <a:srgbClr val="E5E7EB"/>
+            </a:solidFill>
+            <a:prstDash val="solid"/>
+          </a:ln>
+        </p:spPr>
+      </p:sp>
+      <p:sp>
+        <p:nvSpPr>
+          <p:cNvPr id="7" name="Text 5"/>
+          <p:cNvSpPr/>
+          <p:nvPr/>
+        </p:nvSpPr>
+        <p:spPr>
+          <a:xfrm>
+            <a:off x="7772400" y="4796028"/>
+            <a:ext cx="1097280" cy="274320"/>
+          </a:xfrm>
+          <a:prstGeom prst="rect">
+            <a:avLst/>
+          </a:prstGeom>
+          <a:noFill/>
+          <a:ln/>
+        </p:spPr>
+        <p:txBody>
+          <a:bodyPr wrap="square" rtlCol="0" anchor="ctr">
+            <a:normAutofit/>
+          </a:bodyPr>
+          <a:lstStyle/>
+          <a:p>
+            <a:pPr algn="r" indent="0" marL="0">
+              <a:buNone/>
+            </a:pPr>
+            <a:r>
+              <a:rPr lang="en-US" sz="1000" dirty="0">
+                <a:solidFill>
+                  <a:srgbClr val="9CA3AF"/>
+                </a:solidFill>
+                <a:latin typeface="Calibri" pitchFamily="34" charset="0"/>
+                <a:ea typeface="Calibri" pitchFamily="34" charset="-122"/>
+                <a:cs typeface="Calibri" pitchFamily="34" charset="-120"/>
+              </a:rPr>
+              <a:t>7 / 12</a:t>
+            </a:r>
+            <a:endParaRPr lang="en-US" sz="1000" dirty="0"/>
+          </a:p>
+        </p:txBody>
+      </p:sp>
+      <p:sp>
+        <p:nvSpPr>
+          <p:cNvPr id="8" name="Text 6"/>
+          <p:cNvSpPr/>
+          <p:nvPr/>
+        </p:nvSpPr>
+        <p:spPr>
+          <a:xfrm>
+            <a:off x="685800" y="4796028"/>
+            <a:ext cx="1828800" cy="274320"/>
+          </a:xfrm>
+          <a:prstGeom prst="rect">
+            <a:avLst/>
+          </a:prstGeom>
+          <a:noFill/>
+          <a:ln/>
+        </p:spPr>
+        <p:txBody>
+          <a:bodyPr wrap="square" rtlCol="0" anchor="ctr">
+            <a:normAutofit/>
+          </a:bodyPr>
           <a:lstStyle/>
           <a:p>
             <a:pPr algn="l" indent="0" marL="0">
               <a:buNone/>
             </a:pPr>
             <a:r>
+              <a:rPr lang="en-US" sz="1000" dirty="0">
+                <a:solidFill>
+                  <a:srgbClr val="9CA3AF"/>
+                </a:solidFill>
+                <a:latin typeface="Calibri" pitchFamily="34" charset="0"/>
+                <a:ea typeface="Calibri" pitchFamily="34" charset="-122"/>
+                <a:cs typeface="Calibri" pitchFamily="34" charset="-120"/>
+              </a:rPr>
+              <a:t>P-03</a:t>
+            </a:r>
+            <a:endParaRPr lang="en-US" sz="1000" dirty="0"/>
+          </a:p>
+        </p:txBody>
+      </p:sp>
+      <p:sp>
+        <p:nvSpPr>
+          <p:cNvPr id="9" name="Shape 7"/>
+          <p:cNvSpPr/>
+          <p:nvPr/>
+        </p:nvSpPr>
+        <p:spPr>
+          <a:xfrm>
+            <a:off x="685800" y="868680"/>
+            <a:ext cx="7772400" cy="777240"/>
+          </a:xfrm>
+          <a:prstGeom prst="rect">
+            <a:avLst>
+              <a:gd name="adj" fmla="val 5882"/>
+            </a:avLst>
+          </a:prstGeom>
+          <a:solidFill>
+            <a:srgbClr val="FAFBFC"/>
+          </a:solidFill>
+          <a:ln w="6350">
+            <a:solidFill>
+              <a:srgbClr val="E5E7EB"/>
+            </a:solidFill>
+            <a:prstDash val="solid"/>
+          </a:ln>
+        </p:spPr>
+      </p:sp>
+      <p:sp>
+        <p:nvSpPr>
+          <p:cNvPr id="10" name="Text 8"/>
+          <p:cNvSpPr/>
+          <p:nvPr/>
+        </p:nvSpPr>
+        <p:spPr>
+          <a:xfrm>
+            <a:off x="960120" y="941832"/>
+            <a:ext cx="3200400" cy="274320"/>
+          </a:xfrm>
+          <a:prstGeom prst="rect">
+            <a:avLst/>
+          </a:prstGeom>
+          <a:noFill/>
+          <a:ln/>
+        </p:spPr>
+        <p:txBody>
+          <a:bodyPr wrap="square" rtlCol="0" anchor="ctr">
+            <a:normAutofit/>
+          </a:bodyPr>
+          <a:lstStyle/>
+          <a:p>
+            <a:pPr indent="0" marL="0">
+              <a:buNone/>
+            </a:pPr>
+            <a:r>
+              <a:rPr lang="en-US" sz="1600" b="1" dirty="0">
+                <a:solidFill>
+                  <a:srgbClr val="2563EB"/>
+                </a:solidFill>
+                <a:latin typeface="Calibri" pitchFamily="34" charset="0"/>
+                <a:ea typeface="Calibri" pitchFamily="34" charset="-122"/>
+                <a:cs typeface="Calibri" pitchFamily="34" charset="-120"/>
+              </a:rPr>
+              <a:t>Step 1: テンプレート選択</a:t>
+            </a:r>
+            <a:endParaRPr lang="en-US" sz="1600" dirty="0"/>
+          </a:p>
+        </p:txBody>
+      </p:sp>
+      <p:sp>
+        <p:nvSpPr>
+          <p:cNvPr id="11" name="Text 9"/>
+          <p:cNvSpPr/>
+          <p:nvPr/>
+        </p:nvSpPr>
+        <p:spPr>
+          <a:xfrm>
+            <a:off x="960120" y="1234440"/>
+            <a:ext cx="7680960" cy="320040"/>
+          </a:xfrm>
+          <a:prstGeom prst="rect">
+            <a:avLst/>
+          </a:prstGeom>
+          <a:noFill/>
+          <a:ln/>
+        </p:spPr>
+        <p:txBody>
+          <a:bodyPr wrap="square" rtlCol="0" anchor="ctr">
+            <a:normAutofit/>
+          </a:bodyPr>
+          <a:lstStyle/>
+          <a:p>
+            <a:pPr indent="0" marL="0">
+              <a:buNone/>
+            </a:pPr>
+            <a:r>
+              <a:rPr lang="en-US" sz="1400" dirty="0">
+                <a:solidFill>
+                  <a:srgbClr val="374151"/>
+                </a:solidFill>
+                <a:latin typeface="Calibri" pitchFamily="34" charset="0"/>
+                <a:ea typeface="Calibri" pitchFamily="34" charset="-122"/>
+                <a:cs typeface="Calibri" pitchFamily="34" charset="-120"/>
+              </a:rPr>
+              <a:t>過去の成功提案書から最適なフォーマットを選ぶ</a:t>
+            </a:r>
+            <a:endParaRPr lang="en-US" sz="1400" dirty="0"/>
+          </a:p>
+        </p:txBody>
+      </p:sp>
+      <p:sp>
+        <p:nvSpPr>
+          <p:cNvPr id="12" name="Shape 10"/>
+          <p:cNvSpPr/>
+          <p:nvPr/>
+        </p:nvSpPr>
+        <p:spPr>
+          <a:xfrm>
+            <a:off x="685800" y="1783080"/>
+            <a:ext cx="7772400" cy="777240"/>
+          </a:xfrm>
+          <a:prstGeom prst="rect">
+            <a:avLst>
+              <a:gd name="adj" fmla="val 5882"/>
+            </a:avLst>
+          </a:prstGeom>
+          <a:solidFill>
+            <a:srgbClr val="FAFBFC"/>
+          </a:solidFill>
+          <a:ln w="6350">
+            <a:solidFill>
+              <a:srgbClr val="E5E7EB"/>
+            </a:solidFill>
+            <a:prstDash val="solid"/>
+          </a:ln>
+        </p:spPr>
+      </p:sp>
+      <p:sp>
+        <p:nvSpPr>
+          <p:cNvPr id="13" name="Text 11"/>
+          <p:cNvSpPr/>
+          <p:nvPr/>
+        </p:nvSpPr>
+        <p:spPr>
+          <a:xfrm>
+            <a:off x="960120" y="1856232"/>
+            <a:ext cx="3200400" cy="274320"/>
+          </a:xfrm>
+          <a:prstGeom prst="rect">
+            <a:avLst/>
+          </a:prstGeom>
+          <a:noFill/>
+          <a:ln/>
+        </p:spPr>
+        <p:txBody>
+          <a:bodyPr wrap="square" rtlCol="0" anchor="ctr">
+            <a:normAutofit/>
+          </a:bodyPr>
+          <a:lstStyle/>
+          <a:p>
+            <a:pPr indent="0" marL="0">
+              <a:buNone/>
+            </a:pPr>
+            <a:r>
+              <a:rPr lang="en-US" sz="1600" b="1" dirty="0">
+                <a:solidFill>
+                  <a:srgbClr val="2563EB"/>
+                </a:solidFill>
+                <a:latin typeface="Calibri" pitchFamily="34" charset="0"/>
+                <a:ea typeface="Calibri" pitchFamily="34" charset="-122"/>
+                <a:cs typeface="Calibri" pitchFamily="34" charset="-120"/>
+              </a:rPr>
+              <a:t>Step 2: 顧客情報入力</a:t>
+            </a:r>
+            <a:endParaRPr lang="en-US" sz="1600" dirty="0"/>
+          </a:p>
+        </p:txBody>
+      </p:sp>
+      <p:sp>
+        <p:nvSpPr>
+          <p:cNvPr id="14" name="Text 12"/>
+          <p:cNvSpPr/>
+          <p:nvPr/>
+        </p:nvSpPr>
+        <p:spPr>
+          <a:xfrm>
+            <a:off x="960120" y="2148840"/>
+            <a:ext cx="7680960" cy="320040"/>
+          </a:xfrm>
+          <a:prstGeom prst="rect">
+            <a:avLst/>
+          </a:prstGeom>
+          <a:noFill/>
+          <a:ln/>
+        </p:spPr>
+        <p:txBody>
+          <a:bodyPr wrap="square" rtlCol="0" anchor="ctr">
+            <a:normAutofit/>
+          </a:bodyPr>
+          <a:lstStyle/>
+          <a:p>
+            <a:pPr indent="0" marL="0">
+              <a:buNone/>
+            </a:pPr>
+            <a:r>
+              <a:rPr lang="en-US" sz="1400" dirty="0">
+                <a:solidFill>
+                  <a:srgbClr val="374151"/>
+                </a:solidFill>
+                <a:latin typeface="Calibri" pitchFamily="34" charset="0"/>
+                <a:ea typeface="Calibri" pitchFamily="34" charset="-122"/>
+                <a:cs typeface="Calibri" pitchFamily="34" charset="-120"/>
+              </a:rPr>
+              <a:t>企業名、課題、予算などを簡潔に入力</a:t>
+            </a:r>
+            <a:endParaRPr lang="en-US" sz="1400" dirty="0"/>
+          </a:p>
+        </p:txBody>
+      </p:sp>
+      <p:sp>
+        <p:nvSpPr>
+          <p:cNvPr id="15" name="Shape 13"/>
+          <p:cNvSpPr/>
+          <p:nvPr/>
+        </p:nvSpPr>
+        <p:spPr>
+          <a:xfrm>
+            <a:off x="685800" y="2697480"/>
+            <a:ext cx="7772400" cy="777240"/>
+          </a:xfrm>
+          <a:prstGeom prst="rect">
+            <a:avLst>
+              <a:gd name="adj" fmla="val 5882"/>
+            </a:avLst>
+          </a:prstGeom>
+          <a:solidFill>
+            <a:srgbClr val="FAFBFC"/>
+          </a:solidFill>
+          <a:ln w="6350">
+            <a:solidFill>
+              <a:srgbClr val="E5E7EB"/>
+            </a:solidFill>
+            <a:prstDash val="solid"/>
+          </a:ln>
+        </p:spPr>
+      </p:sp>
+      <p:sp>
+        <p:nvSpPr>
+          <p:cNvPr id="16" name="Text 14"/>
+          <p:cNvSpPr/>
+          <p:nvPr/>
+        </p:nvSpPr>
+        <p:spPr>
+          <a:xfrm>
+            <a:off x="960120" y="2770632"/>
+            <a:ext cx="3200400" cy="274320"/>
+          </a:xfrm>
+          <a:prstGeom prst="rect">
+            <a:avLst/>
+          </a:prstGeom>
+          <a:noFill/>
+          <a:ln/>
+        </p:spPr>
+        <p:txBody>
+          <a:bodyPr wrap="square" rtlCol="0" anchor="ctr">
+            <a:normAutofit/>
+          </a:bodyPr>
+          <a:lstStyle/>
+          <a:p>
+            <a:pPr indent="0" marL="0">
+              <a:buNone/>
+            </a:pPr>
+            <a:r>
+              <a:rPr lang="en-US" sz="1600" b="1" dirty="0">
+                <a:solidFill>
+                  <a:srgbClr val="2563EB"/>
+                </a:solidFill>
+                <a:latin typeface="Calibri" pitchFamily="34" charset="0"/>
+                <a:ea typeface="Calibri" pitchFamily="34" charset="-122"/>
+                <a:cs typeface="Calibri" pitchFamily="34" charset="-120"/>
+              </a:rPr>
+              <a:t>Step 3: AI 分析・生成</a:t>
+            </a:r>
+            <a:endParaRPr lang="en-US" sz="1600" dirty="0"/>
+          </a:p>
+        </p:txBody>
+      </p:sp>
+      <p:sp>
+        <p:nvSpPr>
+          <p:cNvPr id="17" name="Text 15"/>
+          <p:cNvSpPr/>
+          <p:nvPr/>
+        </p:nvSpPr>
+        <p:spPr>
+          <a:xfrm>
+            <a:off x="960120" y="3063240"/>
+            <a:ext cx="7680960" cy="320040"/>
+          </a:xfrm>
+          <a:prstGeom prst="rect">
+            <a:avLst/>
+          </a:prstGeom>
+          <a:noFill/>
+          <a:ln/>
+        </p:spPr>
+        <p:txBody>
+          <a:bodyPr wrap="square" rtlCol="0" anchor="ctr">
+            <a:normAutofit/>
+          </a:bodyPr>
+          <a:lstStyle/>
+          <a:p>
+            <a:pPr indent="0" marL="0">
+              <a:buNone/>
+            </a:pPr>
+            <a:r>
+              <a:rPr lang="en-US" sz="1400" dirty="0">
+                <a:solidFill>
+                  <a:srgbClr val="374151"/>
+                </a:solidFill>
+                <a:latin typeface="Calibri" pitchFamily="34" charset="0"/>
+                <a:ea typeface="Calibri" pitchFamily="34" charset="-122"/>
+                <a:cs typeface="Calibri" pitchFamily="34" charset="-120"/>
+              </a:rPr>
+              <a:t>Gemini が顧客に合わせた最適な提案内容を複数案生成</a:t>
+            </a:r>
+            <a:endParaRPr lang="en-US" sz="1400" dirty="0"/>
+          </a:p>
+        </p:txBody>
+      </p:sp>
+      <p:sp>
+        <p:nvSpPr>
+          <p:cNvPr id="18" name="Shape 16"/>
+          <p:cNvSpPr/>
+          <p:nvPr/>
+        </p:nvSpPr>
+        <p:spPr>
+          <a:xfrm>
+            <a:off x="685800" y="3611880"/>
+            <a:ext cx="7772400" cy="777240"/>
+          </a:xfrm>
+          <a:prstGeom prst="rect">
+            <a:avLst>
+              <a:gd name="adj" fmla="val 5882"/>
+            </a:avLst>
+          </a:prstGeom>
+          <a:solidFill>
+            <a:srgbClr val="FAFBFC"/>
+          </a:solidFill>
+          <a:ln w="6350">
+            <a:solidFill>
+              <a:srgbClr val="E5E7EB"/>
+            </a:solidFill>
+            <a:prstDash val="solid"/>
+          </a:ln>
+        </p:spPr>
+      </p:sp>
+      <p:sp>
+        <p:nvSpPr>
+          <p:cNvPr id="19" name="Text 17"/>
+          <p:cNvSpPr/>
+          <p:nvPr/>
+        </p:nvSpPr>
+        <p:spPr>
+          <a:xfrm>
+            <a:off x="960120" y="3685032"/>
+            <a:ext cx="3200400" cy="274320"/>
+          </a:xfrm>
+          <a:prstGeom prst="rect">
+            <a:avLst/>
+          </a:prstGeom>
+          <a:noFill/>
+          <a:ln/>
+        </p:spPr>
+        <p:txBody>
+          <a:bodyPr wrap="square" rtlCol="0" anchor="ctr">
+            <a:normAutofit/>
+          </a:bodyPr>
+          <a:lstStyle/>
+          <a:p>
+            <a:pPr indent="0" marL="0">
+              <a:buNone/>
+            </a:pPr>
+            <a:r>
+              <a:rPr lang="en-US" sz="1600" b="1" dirty="0">
+                <a:solidFill>
+                  <a:srgbClr val="2563EB"/>
+                </a:solidFill>
+                <a:latin typeface="Calibri" pitchFamily="34" charset="0"/>
+                <a:ea typeface="Calibri" pitchFamily="34" charset="-122"/>
+                <a:cs typeface="Calibri" pitchFamily="34" charset="-120"/>
+              </a:rPr>
+              <a:t>Step 4: 選択・カスタマイズ</a:t>
+            </a:r>
+            <a:endParaRPr lang="en-US" sz="1600" dirty="0"/>
+          </a:p>
+        </p:txBody>
+      </p:sp>
+      <p:sp>
+        <p:nvSpPr>
+          <p:cNvPr id="20" name="Text 18"/>
+          <p:cNvSpPr/>
+          <p:nvPr/>
+        </p:nvSpPr>
+        <p:spPr>
+          <a:xfrm>
+            <a:off x="960120" y="3977640"/>
+            <a:ext cx="7680960" cy="320040"/>
+          </a:xfrm>
+          <a:prstGeom prst="rect">
+            <a:avLst/>
+          </a:prstGeom>
+          <a:noFill/>
+          <a:ln/>
+        </p:spPr>
+        <p:txBody>
+          <a:bodyPr wrap="square" rtlCol="0" anchor="ctr">
+            <a:normAutofit/>
+          </a:bodyPr>
+          <a:lstStyle/>
+          <a:p>
+            <a:pPr indent="0" marL="0">
+              <a:buNone/>
+            </a:pPr>
+            <a:r>
+              <a:rPr lang="en-US" sz="1400" dirty="0">
+                <a:solidFill>
+                  <a:srgbClr val="374151"/>
+                </a:solidFill>
+                <a:latin typeface="Calibri" pitchFamily="34" charset="0"/>
+                <a:ea typeface="Calibri" pitchFamily="34" charset="-122"/>
+                <a:cs typeface="Calibri" pitchFamily="34" charset="-120"/>
+              </a:rPr>
+              <a:t>提案の方向性を選び、細部を微調整</a:t>
+            </a:r>
+            <a:endParaRPr lang="en-US" sz="1400" dirty="0"/>
+          </a:p>
+        </p:txBody>
+      </p:sp>
+    </p:spTree>
+  </p:cSld>
+  <p:clrMapOvr>
+    <a:masterClrMapping/>
+  </p:clrMapOvr>
+</p:sld>
+</file>
+
+<file path=ppt/slides/slide8.xml><?xml version="1.0" encoding="utf-8"?>
+<p:sld xmlns:a="http://schemas.openxmlformats.org/drawingml/2006/main" xmlns:r="http://schemas.openxmlformats.org/officeDocument/2006/relationships" xmlns:p="http://schemas.openxmlformats.org/presentationml/2006/main">
+  <p:cSld name="Slide 8">
+    <p:bg>
+      <p:bgPr>
+        <a:solidFill>
+          <a:srgbClr val="FFFFFF"/>
+        </a:solidFill>
+      </p:bgPr>
+    </p:bg>
+    <p:spTree>
+      <p:nvGrpSpPr>
+        <p:cNvPr id="1" name=""/>
+        <p:cNvGrpSpPr/>
+        <p:nvPr/>
+      </p:nvGrpSpPr>
+      <p:grpSpPr>
+        <a:xfrm>
+          <a:off x="0" y="0"/>
+          <a:ext cx="0" cy="0"/>
+          <a:chOff x="0" y="0"/>
+          <a:chExt cx="0" cy="0"/>
+        </a:xfrm>
+      </p:grpSpPr>
+      <p:sp>
+        <p:nvSpPr>
+          <p:cNvPr id="2" name="Shape 0"/>
+          <p:cNvSpPr/>
+          <p:nvPr/>
+        </p:nvSpPr>
+        <p:spPr>
+          <a:xfrm>
+            <a:off x="0" y="0"/>
+            <a:ext cx="9144000" cy="32004"/>
+          </a:xfrm>
+          <a:prstGeom prst="rect">
+            <a:avLst/>
+          </a:prstGeom>
+          <a:solidFill>
+            <a:srgbClr val="2563EB"/>
+          </a:solidFill>
+          <a:ln/>
+        </p:spPr>
+      </p:sp>
+      <p:sp>
+        <p:nvSpPr>
+          <p:cNvPr id="3" name="Shape 1"/>
+          <p:cNvSpPr/>
+          <p:nvPr/>
+        </p:nvSpPr>
+        <p:spPr>
+          <a:xfrm>
+            <a:off x="685800" y="137160"/>
+            <a:ext cx="1682496" cy="256032"/>
+          </a:xfrm>
+          <a:prstGeom prst="rect">
+            <a:avLst>
+              <a:gd name="adj" fmla="val 17857"/>
+            </a:avLst>
+          </a:prstGeom>
+          <a:solidFill>
+            <a:srgbClr val="DBEAFE"/>
+          </a:solidFill>
+          <a:ln/>
+        </p:spPr>
+      </p:sp>
+      <p:sp>
+        <p:nvSpPr>
+          <p:cNvPr id="4" name="Text 2"/>
+          <p:cNvSpPr/>
+          <p:nvPr/>
+        </p:nvSpPr>
+        <p:spPr>
+          <a:xfrm>
+            <a:off x="685800" y="137160"/>
+            <a:ext cx="1682496" cy="256032"/>
+          </a:xfrm>
+          <a:prstGeom prst="rect">
+            <a:avLst/>
+          </a:prstGeom>
+          <a:noFill/>
+          <a:ln/>
+        </p:spPr>
+        <p:txBody>
+          <a:bodyPr wrap="square" rtlCol="0" anchor="ctr">
+            <a:normAutofit/>
+          </a:bodyPr>
+          <a:lstStyle/>
+          <a:p>
+            <a:pPr algn="ctr" indent="0" marL="0">
+              <a:buNone/>
+            </a:pPr>
+            <a:r>
+              <a:rPr lang="en-US" sz="1000" b="1" dirty="0">
+                <a:solidFill>
+                  <a:srgbClr val="2563EB"/>
+                </a:solidFill>
+                <a:latin typeface="Calibri" pitchFamily="34" charset="0"/>
+                <a:ea typeface="Calibri" pitchFamily="34" charset="-122"/>
+                <a:cs typeface="Calibri" pitchFamily="34" charset="-120"/>
+              </a:rPr>
+              <a:t>SALES IMPACT</a:t>
+            </a:r>
+            <a:endParaRPr lang="en-US" sz="1000" dirty="0"/>
+          </a:p>
+        </p:txBody>
+      </p:sp>
+      <p:sp>
+        <p:nvSpPr>
+          <p:cNvPr id="5" name="Text 3"/>
+          <p:cNvSpPr/>
+          <p:nvPr/>
+        </p:nvSpPr>
+        <p:spPr>
+          <a:xfrm>
+            <a:off x="685800" y="457200"/>
+            <a:ext cx="7772400" cy="411480"/>
+          </a:xfrm>
+          <a:prstGeom prst="rect">
+            <a:avLst/>
+          </a:prstGeom>
+          <a:noFill/>
+          <a:ln/>
+        </p:spPr>
+        <p:txBody>
+          <a:bodyPr wrap="square" rtlCol="0" anchor="ctr">
+            <a:normAutofit/>
+          </a:bodyPr>
+          <a:lstStyle/>
+          <a:p>
+            <a:pPr indent="0" marL="0">
+              <a:buNone/>
+            </a:pPr>
+            <a:r>
+              <a:rPr lang="en-US" sz="2400" b="1" dirty="0">
+                <a:solidFill>
+                  <a:srgbClr val="111827"/>
+                </a:solidFill>
+                <a:latin typeface="Calibri" pitchFamily="34" charset="0"/>
+                <a:ea typeface="Calibri" pitchFamily="34" charset="-122"/>
+                <a:cs typeface="Calibri" pitchFamily="34" charset="-120"/>
+              </a:rPr>
+              <a:t>営業効率化の実績</a:t>
+            </a:r>
+            <a:endParaRPr lang="en-US" sz="2400" dirty="0"/>
+          </a:p>
+        </p:txBody>
+      </p:sp>
+      <p:sp>
+        <p:nvSpPr>
+          <p:cNvPr id="6" name="Shape 4"/>
+          <p:cNvSpPr/>
+          <p:nvPr/>
+        </p:nvSpPr>
+        <p:spPr>
+          <a:xfrm>
+            <a:off x="685800" y="4777740"/>
+            <a:ext cx="7772400" cy="0"/>
+          </a:xfrm>
+          <a:prstGeom prst="line">
+            <a:avLst/>
+          </a:prstGeom>
+          <a:noFill/>
+          <a:ln w="6350">
+            <a:solidFill>
+              <a:srgbClr val="E5E7EB"/>
+            </a:solidFill>
+            <a:prstDash val="solid"/>
+          </a:ln>
+        </p:spPr>
+      </p:sp>
+      <p:sp>
+        <p:nvSpPr>
+          <p:cNvPr id="7" name="Text 5"/>
+          <p:cNvSpPr/>
+          <p:nvPr/>
+        </p:nvSpPr>
+        <p:spPr>
+          <a:xfrm>
+            <a:off x="7772400" y="4796028"/>
+            <a:ext cx="1097280" cy="274320"/>
+          </a:xfrm>
+          <a:prstGeom prst="rect">
+            <a:avLst/>
+          </a:prstGeom>
+          <a:noFill/>
+          <a:ln/>
+        </p:spPr>
+        <p:txBody>
+          <a:bodyPr wrap="square" rtlCol="0" anchor="ctr">
+            <a:normAutofit/>
+          </a:bodyPr>
+          <a:lstStyle/>
+          <a:p>
+            <a:pPr algn="r" indent="0" marL="0">
+              <a:buNone/>
+            </a:pPr>
+            <a:r>
+              <a:rPr lang="en-US" sz="1000" dirty="0">
+                <a:solidFill>
+                  <a:srgbClr val="9CA3AF"/>
+                </a:solidFill>
+                <a:latin typeface="Calibri" pitchFamily="34" charset="0"/>
+                <a:ea typeface="Calibri" pitchFamily="34" charset="-122"/>
+                <a:cs typeface="Calibri" pitchFamily="34" charset="-120"/>
+              </a:rPr>
+              <a:t>8 / 12</a:t>
+            </a:r>
+            <a:endParaRPr lang="en-US" sz="1000" dirty="0"/>
+          </a:p>
+        </p:txBody>
+      </p:sp>
+      <p:sp>
+        <p:nvSpPr>
+          <p:cNvPr id="8" name="Text 6"/>
+          <p:cNvSpPr/>
+          <p:nvPr/>
+        </p:nvSpPr>
+        <p:spPr>
+          <a:xfrm>
+            <a:off x="685800" y="4796028"/>
+            <a:ext cx="1828800" cy="274320"/>
+          </a:xfrm>
+          <a:prstGeom prst="rect">
+            <a:avLst/>
+          </a:prstGeom>
+          <a:noFill/>
+          <a:ln/>
+        </p:spPr>
+        <p:txBody>
+          <a:bodyPr wrap="square" rtlCol="0" anchor="ctr">
+            <a:normAutofit/>
+          </a:bodyPr>
+          <a:lstStyle/>
+          <a:p>
+            <a:pPr algn="l" indent="0" marL="0">
+              <a:buNone/>
+            </a:pPr>
+            <a:r>
+              <a:rPr lang="en-US" sz="1000" dirty="0">
+                <a:solidFill>
+                  <a:srgbClr val="9CA3AF"/>
+                </a:solidFill>
+                <a:latin typeface="Calibri" pitchFamily="34" charset="0"/>
+                <a:ea typeface="Calibri" pitchFamily="34" charset="-122"/>
+                <a:cs typeface="Calibri" pitchFamily="34" charset="-120"/>
+              </a:rPr>
+              <a:t>P-03</a:t>
+            </a:r>
+            <a:endParaRPr lang="en-US" sz="1000" dirty="0"/>
+          </a:p>
+        </p:txBody>
+      </p:sp>
+      <p:sp>
+        <p:nvSpPr>
+          <p:cNvPr id="9" name="Shape 7"/>
+          <p:cNvSpPr/>
+          <p:nvPr/>
+        </p:nvSpPr>
+        <p:spPr>
+          <a:xfrm>
+            <a:off x="685800" y="914400"/>
+            <a:ext cx="2560320" cy="2926080"/>
+          </a:xfrm>
+          <a:prstGeom prst="rect">
+            <a:avLst>
+              <a:gd name="adj" fmla="val 1786"/>
+            </a:avLst>
+          </a:prstGeom>
+          <a:solidFill>
+            <a:srgbClr val="D1FAE5"/>
+          </a:solidFill>
+          <a:ln w="12700">
+            <a:solidFill>
+              <a:srgbClr val="059669"/>
+            </a:solidFill>
+            <a:prstDash val="solid"/>
+          </a:ln>
+        </p:spPr>
+      </p:sp>
+      <p:sp>
+        <p:nvSpPr>
+          <p:cNvPr id="10" name="Text 8"/>
+          <p:cNvSpPr/>
+          <p:nvPr/>
+        </p:nvSpPr>
+        <p:spPr>
+          <a:xfrm>
+            <a:off x="822960" y="1051560"/>
+            <a:ext cx="2286000" cy="320040"/>
+          </a:xfrm>
+          <a:prstGeom prst="rect">
+            <a:avLst/>
+          </a:prstGeom>
+          <a:noFill/>
+          <a:ln/>
+        </p:spPr>
+        <p:txBody>
+          <a:bodyPr wrap="square" rtlCol="0" anchor="ctr">
+            <a:normAutofit/>
+          </a:bodyPr>
+          <a:lstStyle/>
+          <a:p>
+            <a:pPr algn="ctr" indent="0" marL="0">
+              <a:buNone/>
+            </a:pPr>
+            <a:r>
+              <a:rPr lang="en-US" sz="1600" b="1" dirty="0">
+                <a:solidFill>
+                  <a:srgbClr val="111827"/>
+                </a:solidFill>
+                <a:latin typeface="Calibri" pitchFamily="34" charset="0"/>
+                <a:ea typeface="Calibri" pitchFamily="34" charset="-122"/>
+                <a:cs typeface="Calibri" pitchFamily="34" charset="-120"/>
+              </a:rPr>
+              <a:t>作成時間削減</a:t>
+            </a:r>
+            <a:endParaRPr lang="en-US" sz="1600" dirty="0"/>
+          </a:p>
+        </p:txBody>
+      </p:sp>
+      <p:sp>
+        <p:nvSpPr>
+          <p:cNvPr id="11" name="Text 9"/>
+          <p:cNvSpPr/>
+          <p:nvPr/>
+        </p:nvSpPr>
+        <p:spPr>
+          <a:xfrm>
+            <a:off x="822960" y="1463040"/>
+            <a:ext cx="2286000" cy="502920"/>
+          </a:xfrm>
+          <a:prstGeom prst="rect">
+            <a:avLst/>
+          </a:prstGeom>
+          <a:noFill/>
+          <a:ln/>
+        </p:spPr>
+        <p:txBody>
+          <a:bodyPr wrap="square" rtlCol="0" anchor="ctr">
+            <a:normAutofit/>
+          </a:bodyPr>
+          <a:lstStyle/>
+          <a:p>
+            <a:pPr algn="ctr" indent="0" marL="0">
+              <a:buNone/>
+            </a:pPr>
+            <a:r>
               <a:rPr lang="en-US" sz="3200" b="1" dirty="0">
                 <a:solidFill>
-                  <a:srgbClr val="FFFFFF"/>
-                </a:solidFill>
-                <a:latin typeface="Calibri" pitchFamily="34" charset="0"/>
-                <a:ea typeface="Calibri" pitchFamily="34" charset="-122"/>
-                <a:cs typeface="Calibri" pitchFamily="34" charset="-120"/>
-              </a:rPr>
-              <a:t>コースのまとめ</a:t>
+                  <a:srgbClr val="059669"/>
+                </a:solidFill>
+                <a:latin typeface="Calibri" pitchFamily="34" charset="0"/>
+                <a:ea typeface="Calibri" pitchFamily="34" charset="-122"/>
+                <a:cs typeface="Calibri" pitchFamily="34" charset="-120"/>
+              </a:rPr>
+              <a:t>70-80%</a:t>
             </a:r>
             <a:endParaRPr lang="en-US" sz="3200" dirty="0"/>
           </a:p>
@@ -3108,69 +6929,684 @@
       </p:sp>
       <p:sp>
         <p:nvSpPr>
+          <p:cNvPr id="12" name="Text 10"/>
+          <p:cNvSpPr/>
+          <p:nvPr/>
+        </p:nvSpPr>
+        <p:spPr>
+          <a:xfrm>
+            <a:off x="822960" y="2011680"/>
+            <a:ext cx="2286000" cy="914400"/>
+          </a:xfrm>
+          <a:prstGeom prst="rect">
+            <a:avLst/>
+          </a:prstGeom>
+          <a:noFill/>
+          <a:ln/>
+        </p:spPr>
+        <p:txBody>
+          <a:bodyPr wrap="square" rtlCol="0" anchor="ctr">
+            <a:normAutofit/>
+          </a:bodyPr>
+          <a:lstStyle/>
+          <a:p>
+            <a:pPr algn="ctr" indent="0" marL="0">
+              <a:lnSpc>
+                <a:spcPct val="120000"/>
+              </a:lnSpc>
+              <a:buNone/>
+            </a:pPr>
+            <a:r>
+              <a:rPr lang="en-US" sz="1400" dirty="0">
+                <a:solidFill>
+                  <a:srgbClr val="374151"/>
+                </a:solidFill>
+                <a:latin typeface="Calibri" pitchFamily="34" charset="0"/>
+                <a:ea typeface="Calibri" pitchFamily="34" charset="-122"/>
+                <a:cs typeface="Calibri" pitchFamily="34" charset="-120"/>
+              </a:rPr>
+              <a:t>3日 → 数分</a:t>
+            </a:r>
+            <a:endParaRPr lang="en-US" sz="1400" dirty="0"/>
+          </a:p>
+        </p:txBody>
+      </p:sp>
+      <p:sp>
+        <p:nvSpPr>
+          <p:cNvPr id="13" name="Shape 11"/>
+          <p:cNvSpPr/>
+          <p:nvPr/>
+        </p:nvSpPr>
+        <p:spPr>
+          <a:xfrm>
+            <a:off x="3520440" y="914400"/>
+            <a:ext cx="2560320" cy="2926080"/>
+          </a:xfrm>
+          <a:prstGeom prst="rect">
+            <a:avLst>
+              <a:gd name="adj" fmla="val 1786"/>
+            </a:avLst>
+          </a:prstGeom>
+          <a:solidFill>
+            <a:srgbClr val="D1FAE5"/>
+          </a:solidFill>
+          <a:ln w="12700">
+            <a:solidFill>
+              <a:srgbClr val="059669"/>
+            </a:solidFill>
+            <a:prstDash val="solid"/>
+          </a:ln>
+        </p:spPr>
+      </p:sp>
+      <p:sp>
+        <p:nvSpPr>
+          <p:cNvPr id="14" name="Text 12"/>
+          <p:cNvSpPr/>
+          <p:nvPr/>
+        </p:nvSpPr>
+        <p:spPr>
+          <a:xfrm>
+            <a:off x="3657600" y="1051560"/>
+            <a:ext cx="2286000" cy="320040"/>
+          </a:xfrm>
+          <a:prstGeom prst="rect">
+            <a:avLst/>
+          </a:prstGeom>
+          <a:noFill/>
+          <a:ln/>
+        </p:spPr>
+        <p:txBody>
+          <a:bodyPr wrap="square" rtlCol="0" anchor="ctr">
+            <a:normAutofit/>
+          </a:bodyPr>
+          <a:lstStyle/>
+          <a:p>
+            <a:pPr algn="ctr" indent="0" marL="0">
+              <a:buNone/>
+            </a:pPr>
+            <a:r>
+              <a:rPr lang="en-US" sz="1600" b="1" dirty="0">
+                <a:solidFill>
+                  <a:srgbClr val="111827"/>
+                </a:solidFill>
+                <a:latin typeface="Calibri" pitchFamily="34" charset="0"/>
+                <a:ea typeface="Calibri" pitchFamily="34" charset="-122"/>
+                <a:cs typeface="Calibri" pitchFamily="34" charset="-120"/>
+              </a:rPr>
+              <a:t>提案件数増加</a:t>
+            </a:r>
+            <a:endParaRPr lang="en-US" sz="1600" dirty="0"/>
+          </a:p>
+        </p:txBody>
+      </p:sp>
+      <p:sp>
+        <p:nvSpPr>
+          <p:cNvPr id="15" name="Text 13"/>
+          <p:cNvSpPr/>
+          <p:nvPr/>
+        </p:nvSpPr>
+        <p:spPr>
+          <a:xfrm>
+            <a:off x="3657600" y="1463040"/>
+            <a:ext cx="2286000" cy="502920"/>
+          </a:xfrm>
+          <a:prstGeom prst="rect">
+            <a:avLst/>
+          </a:prstGeom>
+          <a:noFill/>
+          <a:ln/>
+        </p:spPr>
+        <p:txBody>
+          <a:bodyPr wrap="square" rtlCol="0" anchor="ctr">
+            <a:normAutofit/>
+          </a:bodyPr>
+          <a:lstStyle/>
+          <a:p>
+            <a:pPr algn="ctr" indent="0" marL="0">
+              <a:buNone/>
+            </a:pPr>
+            <a:r>
+              <a:rPr lang="en-US" sz="3200" b="1" dirty="0">
+                <a:solidFill>
+                  <a:srgbClr val="059669"/>
+                </a:solidFill>
+                <a:latin typeface="Calibri" pitchFamily="34" charset="0"/>
+                <a:ea typeface="Calibri" pitchFamily="34" charset="-122"/>
+                <a:cs typeface="Calibri" pitchFamily="34" charset="-120"/>
+              </a:rPr>
+              <a:t>2.5倍</a:t>
+            </a:r>
+            <a:endParaRPr lang="en-US" sz="3200" dirty="0"/>
+          </a:p>
+        </p:txBody>
+      </p:sp>
+      <p:sp>
+        <p:nvSpPr>
+          <p:cNvPr id="16" name="Text 14"/>
+          <p:cNvSpPr/>
+          <p:nvPr/>
+        </p:nvSpPr>
+        <p:spPr>
+          <a:xfrm>
+            <a:off x="3657600" y="2011680"/>
+            <a:ext cx="2286000" cy="914400"/>
+          </a:xfrm>
+          <a:prstGeom prst="rect">
+            <a:avLst/>
+          </a:prstGeom>
+          <a:noFill/>
+          <a:ln/>
+        </p:spPr>
+        <p:txBody>
+          <a:bodyPr wrap="square" rtlCol="0" anchor="ctr">
+            <a:normAutofit/>
+          </a:bodyPr>
+          <a:lstStyle/>
+          <a:p>
+            <a:pPr algn="ctr" indent="0" marL="0">
+              <a:lnSpc>
+                <a:spcPct val="120000"/>
+              </a:lnSpc>
+              <a:buNone/>
+            </a:pPr>
+            <a:r>
+              <a:rPr lang="en-US" sz="1400" dirty="0">
+                <a:solidFill>
+                  <a:srgbClr val="374151"/>
+                </a:solidFill>
+                <a:latin typeface="Calibri" pitchFamily="34" charset="0"/>
+                <a:ea typeface="Calibri" pitchFamily="34" charset="-122"/>
+                <a:cs typeface="Calibri" pitchFamily="34" charset="-120"/>
+              </a:rPr>
+              <a:t>同じ営業人数で 2.5 倍の提案が可能</a:t>
+            </a:r>
+            <a:endParaRPr lang="en-US" sz="1400" dirty="0"/>
+          </a:p>
+        </p:txBody>
+      </p:sp>
+      <p:sp>
+        <p:nvSpPr>
+          <p:cNvPr id="17" name="Shape 15"/>
+          <p:cNvSpPr/>
+          <p:nvPr/>
+        </p:nvSpPr>
+        <p:spPr>
+          <a:xfrm>
+            <a:off x="6355080" y="914400"/>
+            <a:ext cx="2560320" cy="2926080"/>
+          </a:xfrm>
+          <a:prstGeom prst="rect">
+            <a:avLst>
+              <a:gd name="adj" fmla="val 1786"/>
+            </a:avLst>
+          </a:prstGeom>
+          <a:solidFill>
+            <a:srgbClr val="D1FAE5"/>
+          </a:solidFill>
+          <a:ln w="12700">
+            <a:solidFill>
+              <a:srgbClr val="059669"/>
+            </a:solidFill>
+            <a:prstDash val="solid"/>
+          </a:ln>
+        </p:spPr>
+      </p:sp>
+      <p:sp>
+        <p:nvSpPr>
+          <p:cNvPr id="18" name="Text 16"/>
+          <p:cNvSpPr/>
+          <p:nvPr/>
+        </p:nvSpPr>
+        <p:spPr>
+          <a:xfrm>
+            <a:off x="6492240" y="1051560"/>
+            <a:ext cx="2286000" cy="320040"/>
+          </a:xfrm>
+          <a:prstGeom prst="rect">
+            <a:avLst/>
+          </a:prstGeom>
+          <a:noFill/>
+          <a:ln/>
+        </p:spPr>
+        <p:txBody>
+          <a:bodyPr wrap="square" rtlCol="0" anchor="ctr">
+            <a:normAutofit/>
+          </a:bodyPr>
+          <a:lstStyle/>
+          <a:p>
+            <a:pPr algn="ctr" indent="0" marL="0">
+              <a:buNone/>
+            </a:pPr>
+            <a:r>
+              <a:rPr lang="en-US" sz="1600" b="1" dirty="0">
+                <a:solidFill>
+                  <a:srgbClr val="111827"/>
+                </a:solidFill>
+                <a:latin typeface="Calibri" pitchFamily="34" charset="0"/>
+                <a:ea typeface="Calibri" pitchFamily="34" charset="-122"/>
+                <a:cs typeface="Calibri" pitchFamily="34" charset="-120"/>
+              </a:rPr>
+              <a:t>成約率向上</a:t>
+            </a:r>
+            <a:endParaRPr lang="en-US" sz="1600" dirty="0"/>
+          </a:p>
+        </p:txBody>
+      </p:sp>
+      <p:sp>
+        <p:nvSpPr>
+          <p:cNvPr id="19" name="Text 17"/>
+          <p:cNvSpPr/>
+          <p:nvPr/>
+        </p:nvSpPr>
+        <p:spPr>
+          <a:xfrm>
+            <a:off x="6492240" y="1463040"/>
+            <a:ext cx="2286000" cy="502920"/>
+          </a:xfrm>
+          <a:prstGeom prst="rect">
+            <a:avLst/>
+          </a:prstGeom>
+          <a:noFill/>
+          <a:ln/>
+        </p:spPr>
+        <p:txBody>
+          <a:bodyPr wrap="square" rtlCol="0" anchor="ctr">
+            <a:normAutofit/>
+          </a:bodyPr>
+          <a:lstStyle/>
+          <a:p>
+            <a:pPr algn="ctr" indent="0" marL="0">
+              <a:buNone/>
+            </a:pPr>
+            <a:r>
+              <a:rPr lang="en-US" sz="3200" b="1" dirty="0">
+                <a:solidFill>
+                  <a:srgbClr val="059669"/>
+                </a:solidFill>
+                <a:latin typeface="Calibri" pitchFamily="34" charset="0"/>
+                <a:ea typeface="Calibri" pitchFamily="34" charset="-122"/>
+                <a:cs typeface="Calibri" pitchFamily="34" charset="-120"/>
+              </a:rPr>
+              <a:t>15%UP</a:t>
+            </a:r>
+            <a:endParaRPr lang="en-US" sz="3200" dirty="0"/>
+          </a:p>
+        </p:txBody>
+      </p:sp>
+      <p:sp>
+        <p:nvSpPr>
+          <p:cNvPr id="20" name="Text 18"/>
+          <p:cNvSpPr/>
+          <p:nvPr/>
+        </p:nvSpPr>
+        <p:spPr>
+          <a:xfrm>
+            <a:off x="6492240" y="2011680"/>
+            <a:ext cx="2286000" cy="914400"/>
+          </a:xfrm>
+          <a:prstGeom prst="rect">
+            <a:avLst/>
+          </a:prstGeom>
+          <a:noFill/>
+          <a:ln/>
+        </p:spPr>
+        <p:txBody>
+          <a:bodyPr wrap="square" rtlCol="0" anchor="ctr">
+            <a:normAutofit/>
+          </a:bodyPr>
+          <a:lstStyle/>
+          <a:p>
+            <a:pPr algn="ctr" indent="0" marL="0">
+              <a:lnSpc>
+                <a:spcPct val="120000"/>
+              </a:lnSpc>
+              <a:buNone/>
+            </a:pPr>
+            <a:r>
+              <a:rPr lang="en-US" sz="1400" dirty="0">
+                <a:solidFill>
+                  <a:srgbClr val="374151"/>
+                </a:solidFill>
+                <a:latin typeface="Calibri" pitchFamily="34" charset="0"/>
+                <a:ea typeface="Calibri" pitchFamily="34" charset="-122"/>
+                <a:cs typeface="Calibri" pitchFamily="34" charset="-120"/>
+              </a:rPr>
+              <a:t>テンプレートの質がより高まるため</a:t>
+            </a:r>
+            <a:endParaRPr lang="en-US" sz="1400" dirty="0"/>
+          </a:p>
+        </p:txBody>
+      </p:sp>
+    </p:spTree>
+  </p:cSld>
+  <p:clrMapOvr>
+    <a:masterClrMapping/>
+  </p:clrMapOvr>
+</p:sld>
+</file>
+
+<file path=ppt/slides/slide9.xml><?xml version="1.0" encoding="utf-8"?>
+<p:sld xmlns:a="http://schemas.openxmlformats.org/drawingml/2006/main" xmlns:r="http://schemas.openxmlformats.org/officeDocument/2006/relationships" xmlns:p="http://schemas.openxmlformats.org/presentationml/2006/main">
+  <p:cSld name="Slide 9">
+    <p:bg>
+      <p:bgPr>
+        <a:solidFill>
+          <a:srgbClr val="FFFFFF"/>
+        </a:solidFill>
+      </p:bgPr>
+    </p:bg>
+    <p:spTree>
+      <p:nvGrpSpPr>
+        <p:cNvPr id="1" name=""/>
+        <p:cNvGrpSpPr/>
+        <p:nvPr/>
+      </p:nvGrpSpPr>
+      <p:grpSpPr>
+        <a:xfrm>
+          <a:off x="0" y="0"/>
+          <a:ext cx="0" cy="0"/>
+          <a:chOff x="0" y="0"/>
+          <a:chExt cx="0" cy="0"/>
+        </a:xfrm>
+      </p:grpSpPr>
+      <p:sp>
+        <p:nvSpPr>
+          <p:cNvPr id="2" name="Shape 0"/>
+          <p:cNvSpPr/>
+          <p:nvPr/>
+        </p:nvSpPr>
+        <p:spPr>
+          <a:xfrm>
+            <a:off x="0" y="0"/>
+            <a:ext cx="9144000" cy="32004"/>
+          </a:xfrm>
+          <a:prstGeom prst="rect">
+            <a:avLst/>
+          </a:prstGeom>
+          <a:solidFill>
+            <a:srgbClr val="2563EB"/>
+          </a:solidFill>
+          <a:ln/>
+        </p:spPr>
+      </p:sp>
+      <p:sp>
+        <p:nvSpPr>
+          <p:cNvPr id="3" name="Shape 1"/>
+          <p:cNvSpPr/>
+          <p:nvPr/>
+        </p:nvSpPr>
+        <p:spPr>
+          <a:xfrm>
+            <a:off x="685800" y="137160"/>
+            <a:ext cx="1572768" cy="256032"/>
+          </a:xfrm>
+          <a:prstGeom prst="rect">
+            <a:avLst>
+              <a:gd name="adj" fmla="val 17857"/>
+            </a:avLst>
+          </a:prstGeom>
+          <a:solidFill>
+            <a:srgbClr val="DBEAFE"/>
+          </a:solidFill>
+          <a:ln/>
+        </p:spPr>
+      </p:sp>
+      <p:sp>
+        <p:nvSpPr>
           <p:cNvPr id="4" name="Text 2"/>
           <p:cNvSpPr/>
           <p:nvPr/>
         </p:nvSpPr>
         <p:spPr>
           <a:xfrm>
-            <a:off x="685800" y="1097280"/>
-            <a:ext cx="7772400" cy="365760"/>
-          </a:xfrm>
-          <a:prstGeom prst="rect">
-            <a:avLst/>
-          </a:prstGeom>
-          <a:noFill/>
-          <a:ln/>
-        </p:spPr>
-        <p:txBody>
-          <a:bodyPr wrap="square" rtlCol="0" anchor="ctr"/>
+            <a:off x="685800" y="137160"/>
+            <a:ext cx="1572768" cy="256032"/>
+          </a:xfrm>
+          <a:prstGeom prst="rect">
+            <a:avLst/>
+          </a:prstGeom>
+          <a:noFill/>
+          <a:ln/>
+        </p:spPr>
+        <p:txBody>
+          <a:bodyPr wrap="square" rtlCol="0" anchor="ctr">
+            <a:normAutofit/>
+          </a:bodyPr>
+          <a:lstStyle/>
+          <a:p>
+            <a:pPr algn="ctr" indent="0" marL="0">
+              <a:buNone/>
+            </a:pPr>
+            <a:r>
+              <a:rPr lang="en-US" sz="1000" b="1" dirty="0">
+                <a:solidFill>
+                  <a:srgbClr val="2563EB"/>
+                </a:solidFill>
+                <a:latin typeface="Calibri" pitchFamily="34" charset="0"/>
+                <a:ea typeface="Calibri" pitchFamily="34" charset="-122"/>
+                <a:cs typeface="Calibri" pitchFamily="34" charset="-120"/>
+              </a:rPr>
+              <a:t>KEY FACTORS</a:t>
+            </a:r>
+            <a:endParaRPr lang="en-US" sz="1000" dirty="0"/>
+          </a:p>
+        </p:txBody>
+      </p:sp>
+      <p:sp>
+        <p:nvSpPr>
+          <p:cNvPr id="5" name="Text 3"/>
+          <p:cNvSpPr/>
+          <p:nvPr/>
+        </p:nvSpPr>
+        <p:spPr>
+          <a:xfrm>
+            <a:off x="685800" y="457200"/>
+            <a:ext cx="7772400" cy="411480"/>
+          </a:xfrm>
+          <a:prstGeom prst="rect">
+            <a:avLst/>
+          </a:prstGeom>
+          <a:noFill/>
+          <a:ln/>
+        </p:spPr>
+        <p:txBody>
+          <a:bodyPr wrap="square" rtlCol="0" anchor="ctr">
+            <a:normAutofit/>
+          </a:bodyPr>
+          <a:lstStyle/>
+          <a:p>
+            <a:pPr indent="0" marL="0">
+              <a:buNone/>
+            </a:pPr>
+            <a:r>
+              <a:rPr lang="en-US" sz="2400" b="1" dirty="0">
+                <a:solidFill>
+                  <a:srgbClr val="111827"/>
+                </a:solidFill>
+                <a:latin typeface="Calibri" pitchFamily="34" charset="0"/>
+                <a:ea typeface="Calibri" pitchFamily="34" charset="-122"/>
+                <a:cs typeface="Calibri" pitchFamily="34" charset="-120"/>
+              </a:rPr>
+              <a:t>成功のポイント</a:t>
+            </a:r>
+            <a:endParaRPr lang="en-US" sz="2400" dirty="0"/>
+          </a:p>
+        </p:txBody>
+      </p:sp>
+      <p:sp>
+        <p:nvSpPr>
+          <p:cNvPr id="6" name="Shape 4"/>
+          <p:cNvSpPr/>
+          <p:nvPr/>
+        </p:nvSpPr>
+        <p:spPr>
+          <a:xfrm>
+            <a:off x="685800" y="4777740"/>
+            <a:ext cx="7772400" cy="0"/>
+          </a:xfrm>
+          <a:prstGeom prst="line">
+            <a:avLst/>
+          </a:prstGeom>
+          <a:noFill/>
+          <a:ln w="6350">
+            <a:solidFill>
+              <a:srgbClr val="E5E7EB"/>
+            </a:solidFill>
+            <a:prstDash val="solid"/>
+          </a:ln>
+        </p:spPr>
+      </p:sp>
+      <p:sp>
+        <p:nvSpPr>
+          <p:cNvPr id="7" name="Text 5"/>
+          <p:cNvSpPr/>
+          <p:nvPr/>
+        </p:nvSpPr>
+        <p:spPr>
+          <a:xfrm>
+            <a:off x="7772400" y="4796028"/>
+            <a:ext cx="1097280" cy="274320"/>
+          </a:xfrm>
+          <a:prstGeom prst="rect">
+            <a:avLst/>
+          </a:prstGeom>
+          <a:noFill/>
+          <a:ln/>
+        </p:spPr>
+        <p:txBody>
+          <a:bodyPr wrap="square" rtlCol="0" anchor="ctr">
+            <a:normAutofit/>
+          </a:bodyPr>
+          <a:lstStyle/>
+          <a:p>
+            <a:pPr algn="r" indent="0" marL="0">
+              <a:buNone/>
+            </a:pPr>
+            <a:r>
+              <a:rPr lang="en-US" sz="1000" dirty="0">
+                <a:solidFill>
+                  <a:srgbClr val="9CA3AF"/>
+                </a:solidFill>
+                <a:latin typeface="Calibri" pitchFamily="34" charset="0"/>
+                <a:ea typeface="Calibri" pitchFamily="34" charset="-122"/>
+                <a:cs typeface="Calibri" pitchFamily="34" charset="-120"/>
+              </a:rPr>
+              <a:t>9 / 12</a:t>
+            </a:r>
+            <a:endParaRPr lang="en-US" sz="1000" dirty="0"/>
+          </a:p>
+        </p:txBody>
+      </p:sp>
+      <p:sp>
+        <p:nvSpPr>
+          <p:cNvPr id="8" name="Text 6"/>
+          <p:cNvSpPr/>
+          <p:nvPr/>
+        </p:nvSpPr>
+        <p:spPr>
+          <a:xfrm>
+            <a:off x="685800" y="4796028"/>
+            <a:ext cx="1828800" cy="274320"/>
+          </a:xfrm>
+          <a:prstGeom prst="rect">
+            <a:avLst/>
+          </a:prstGeom>
+          <a:noFill/>
+          <a:ln/>
+        </p:spPr>
+        <p:txBody>
+          <a:bodyPr wrap="square" rtlCol="0" anchor="ctr">
+            <a:normAutofit/>
+          </a:bodyPr>
           <a:lstStyle/>
           <a:p>
             <a:pPr algn="l" indent="0" marL="0">
               <a:buNone/>
             </a:pPr>
             <a:r>
-              <a:rPr lang="en-US" sz="1800" b="1" dirty="0">
-                <a:solidFill>
-                  <a:srgbClr val="111827"/>
-                </a:solidFill>
-                <a:latin typeface="Calibri" pitchFamily="34" charset="0"/>
-                <a:ea typeface="Calibri" pitchFamily="34" charset="-122"/>
-                <a:cs typeface="Calibri" pitchFamily="34" charset="-120"/>
-              </a:rPr>
-              <a:t>4つの重要なポイント</a:t>
-            </a:r>
-            <a:endParaRPr lang="en-US" sz="1800" dirty="0"/>
-          </a:p>
-        </p:txBody>
-      </p:sp>
-      <p:sp>
-        <p:nvSpPr>
-          <p:cNvPr id="5" name="Text 3"/>
-          <p:cNvSpPr/>
-          <p:nvPr/>
-        </p:nvSpPr>
-        <p:spPr>
-          <a:xfrm>
-            <a:off x="1097280" y="1554480"/>
-            <a:ext cx="7315200" cy="457200"/>
-          </a:xfrm>
-          <a:prstGeom prst="rect">
-            <a:avLst/>
-          </a:prstGeom>
-          <a:noFill/>
-          <a:ln/>
-        </p:spPr>
-        <p:txBody>
-          <a:bodyPr wrap="square" rtlCol="0" anchor="t"/>
-          <a:lstStyle/>
-          <a:p>
-            <a:pPr algn="l" indent="0" marL="0">
-              <a:buNone/>
-            </a:pPr>
-            <a:r>
-              <a:rPr lang="en-US" sz="1600" dirty="0">
+              <a:rPr lang="en-US" sz="1000" dirty="0">
+                <a:solidFill>
+                  <a:srgbClr val="9CA3AF"/>
+                </a:solidFill>
+                <a:latin typeface="Calibri" pitchFamily="34" charset="0"/>
+                <a:ea typeface="Calibri" pitchFamily="34" charset="-122"/>
+                <a:cs typeface="Calibri" pitchFamily="34" charset="-120"/>
+              </a:rPr>
+              <a:t>P-03</a:t>
+            </a:r>
+            <a:endParaRPr lang="en-US" sz="1000" dirty="0"/>
+          </a:p>
+        </p:txBody>
+      </p:sp>
+      <p:sp>
+        <p:nvSpPr>
+          <p:cNvPr id="9" name="Text 7"/>
+          <p:cNvSpPr/>
+          <p:nvPr/>
+        </p:nvSpPr>
+        <p:spPr>
+          <a:xfrm>
+            <a:off x="960120" y="914400"/>
+            <a:ext cx="2286000" cy="320040"/>
+          </a:xfrm>
+          <a:prstGeom prst="rect">
+            <a:avLst/>
+          </a:prstGeom>
+          <a:noFill/>
+          <a:ln/>
+        </p:spPr>
+        <p:txBody>
+          <a:bodyPr wrap="square" rtlCol="0" anchor="ctr">
+            <a:normAutofit/>
+          </a:bodyPr>
+          <a:lstStyle/>
+          <a:p>
+            <a:pPr indent="0" marL="0">
+              <a:buNone/>
+            </a:pPr>
+            <a:r>
+              <a:rPr lang="en-US" sz="1600" b="1" dirty="0">
+                <a:solidFill>
+                  <a:srgbClr val="059669"/>
+                </a:solidFill>
+                <a:latin typeface="Calibri" pitchFamily="34" charset="0"/>
+                <a:ea typeface="Calibri" pitchFamily="34" charset="-122"/>
+                <a:cs typeface="Calibri" pitchFamily="34" charset="-120"/>
+              </a:rPr>
+              <a:t>✓ テンプレート整備が鍵</a:t>
+            </a:r>
+            <a:endParaRPr lang="en-US" sz="1600" dirty="0"/>
+          </a:p>
+        </p:txBody>
+      </p:sp>
+      <p:sp>
+        <p:nvSpPr>
+          <p:cNvPr id="10" name="Text 8"/>
+          <p:cNvSpPr/>
+          <p:nvPr/>
+        </p:nvSpPr>
+        <p:spPr>
+          <a:xfrm>
+            <a:off x="3429000" y="914400"/>
+            <a:ext cx="5669280" cy="320040"/>
+          </a:xfrm>
+          <a:prstGeom prst="rect">
+            <a:avLst/>
+          </a:prstGeom>
+          <a:noFill/>
+          <a:ln/>
+        </p:spPr>
+        <p:txBody>
+          <a:bodyPr wrap="square" rtlCol="0" anchor="ctr">
+            <a:normAutofit/>
+          </a:bodyPr>
+          <a:lstStyle/>
+          <a:p>
+            <a:pPr indent="0" marL="0">
+              <a:buNone/>
+            </a:pPr>
+            <a:r>
+              <a:rPr lang="en-US" sz="1400" dirty="0">
                 <a:solidFill>
                   <a:srgbClr val="374151"/>
                 </a:solidFill>
@@ -3178,7 +7614,48 @@
                 <a:ea typeface="Calibri" pitchFamily="34" charset="-122"/>
                 <a:cs typeface="Calibri" pitchFamily="34" charset="-120"/>
               </a:rPr>
-              <a:t>提案書作成は AI で 80～90% 高速化できる</a:t>
+              <a:t>成功事例の提案書を体系的に整理・保管すること</a:t>
+            </a:r>
+            <a:endParaRPr lang="en-US" sz="1400" dirty="0"/>
+          </a:p>
+        </p:txBody>
+      </p:sp>
+      <p:sp>
+        <p:nvSpPr>
+          <p:cNvPr id="11" name="Text 9"/>
+          <p:cNvSpPr/>
+          <p:nvPr/>
+        </p:nvSpPr>
+        <p:spPr>
+          <a:xfrm>
+            <a:off x="960120" y="2011680"/>
+            <a:ext cx="2286000" cy="320040"/>
+          </a:xfrm>
+          <a:prstGeom prst="rect">
+            <a:avLst/>
+          </a:prstGeom>
+          <a:noFill/>
+          <a:ln/>
+        </p:spPr>
+        <p:txBody>
+          <a:bodyPr wrap="square" rtlCol="0" anchor="ctr">
+            <a:normAutofit/>
+          </a:bodyPr>
+          <a:lstStyle/>
+          <a:p>
+            <a:pPr indent="0" marL="0">
+              <a:buNone/>
+            </a:pPr>
+            <a:r>
+              <a:rPr lang="en-US" sz="1600" b="1" dirty="0">
+                <a:solidFill>
+                  <a:srgbClr val="059669"/>
+                </a:solidFill>
+                <a:latin typeface="Calibri" pitchFamily="34" charset="0"/>
+                <a:ea typeface="Calibri" pitchFamily="34" charset="-122"/>
+                <a:cs typeface="Calibri" pitchFamily="34" charset="-120"/>
+              </a:rPr>
+              <a:t>✓ 顧客情報を正確に入力</a:t>
             </a:r>
             <a:endParaRPr lang="en-US" sz="1600" dirty="0"/>
           </a:p>
@@ -3186,30 +7663,32 @@
       </p:sp>
       <p:sp>
         <p:nvSpPr>
-          <p:cNvPr id="6" name="Text 4"/>
-          <p:cNvSpPr/>
-          <p:nvPr/>
-        </p:nvSpPr>
-        <p:spPr>
-          <a:xfrm>
-            <a:off x="1097280" y="2148840"/>
-            <a:ext cx="7315200" cy="457200"/>
-          </a:xfrm>
-          <a:prstGeom prst="rect">
-            <a:avLst/>
-          </a:prstGeom>
-          <a:noFill/>
-          <a:ln/>
-        </p:spPr>
-        <p:txBody>
-          <a:bodyPr wrap="square" rtlCol="0" anchor="t"/>
-          <a:lstStyle/>
-          <a:p>
-            <a:pPr algn="l" indent="0" marL="0">
-              <a:buNone/>
-            </a:pPr>
-            <a:r>
-              <a:rPr lang="en-US" sz="1600" dirty="0">
+          <p:cNvPr id="12" name="Text 10"/>
+          <p:cNvSpPr/>
+          <p:nvPr/>
+        </p:nvSpPr>
+        <p:spPr>
+          <a:xfrm>
+            <a:off x="3429000" y="2011680"/>
+            <a:ext cx="5669280" cy="320040"/>
+          </a:xfrm>
+          <a:prstGeom prst="rect">
+            <a:avLst/>
+          </a:prstGeom>
+          <a:noFill/>
+          <a:ln/>
+        </p:spPr>
+        <p:txBody>
+          <a:bodyPr wrap="square" rtlCol="0" anchor="ctr">
+            <a:normAutofit/>
+          </a:bodyPr>
+          <a:lstStyle/>
+          <a:p>
+            <a:pPr indent="0" marL="0">
+              <a:buNone/>
+            </a:pPr>
+            <a:r>
+              <a:rPr lang="en-US" sz="1400" dirty="0">
                 <a:solidFill>
                   <a:srgbClr val="374151"/>
                 </a:solidFill>
@@ -3217,7 +7696,48 @@
                 <a:ea typeface="Calibri" pitchFamily="34" charset="-122"/>
                 <a:cs typeface="Calibri" pitchFamily="34" charset="-120"/>
               </a:rPr>
-              <a:t>プロンプトの質で出力の質が大きく変わる</a:t>
+              <a:t>課題・ニーズを詳しく入力するほど提案精度が上がる</a:t>
+            </a:r>
+            <a:endParaRPr lang="en-US" sz="1400" dirty="0"/>
+          </a:p>
+        </p:txBody>
+      </p:sp>
+      <p:sp>
+        <p:nvSpPr>
+          <p:cNvPr id="13" name="Text 11"/>
+          <p:cNvSpPr/>
+          <p:nvPr/>
+        </p:nvSpPr>
+        <p:spPr>
+          <a:xfrm>
+            <a:off x="960120" y="3108960"/>
+            <a:ext cx="2286000" cy="320040"/>
+          </a:xfrm>
+          <a:prstGeom prst="rect">
+            <a:avLst/>
+          </a:prstGeom>
+          <a:noFill/>
+          <a:ln/>
+        </p:spPr>
+        <p:txBody>
+          <a:bodyPr wrap="square" rtlCol="0" anchor="ctr">
+            <a:normAutofit/>
+          </a:bodyPr>
+          <a:lstStyle/>
+          <a:p>
+            <a:pPr indent="0" marL="0">
+              <a:buNone/>
+            </a:pPr>
+            <a:r>
+              <a:rPr lang="en-US" sz="1600" b="1" dirty="0">
+                <a:solidFill>
+                  <a:srgbClr val="059669"/>
+                </a:solidFill>
+                <a:latin typeface="Calibri" pitchFamily="34" charset="0"/>
+                <a:ea typeface="Calibri" pitchFamily="34" charset="-122"/>
+                <a:cs typeface="Calibri" pitchFamily="34" charset="-120"/>
+              </a:rPr>
+              <a:t>✓ 提案の方向性を人間が判断</a:t>
             </a:r>
             <a:endParaRPr lang="en-US" sz="1600" dirty="0"/>
           </a:p>
@@ -3225,30 +7745,32 @@
       </p:sp>
       <p:sp>
         <p:nvSpPr>
-          <p:cNvPr id="7" name="Text 5"/>
-          <p:cNvSpPr/>
-          <p:nvPr/>
-        </p:nvSpPr>
-        <p:spPr>
-          <a:xfrm>
-            <a:off x="1097280" y="2743200"/>
-            <a:ext cx="7315200" cy="457200"/>
-          </a:xfrm>
-          <a:prstGeom prst="rect">
-            <a:avLst/>
-          </a:prstGeom>
-          <a:noFill/>
-          <a:ln/>
-        </p:spPr>
-        <p:txBody>
-          <a:bodyPr wrap="square" rtlCol="0" anchor="t"/>
-          <a:lstStyle/>
-          <a:p>
-            <a:pPr algn="l" indent="0" marL="0">
-              <a:buNone/>
-            </a:pPr>
-            <a:r>
-              <a:rPr lang="en-US" sz="1600" dirty="0">
+          <p:cNvPr id="14" name="Text 12"/>
+          <p:cNvSpPr/>
+          <p:nvPr/>
+        </p:nvSpPr>
+        <p:spPr>
+          <a:xfrm>
+            <a:off x="3429000" y="3108960"/>
+            <a:ext cx="5669280" cy="320040"/>
+          </a:xfrm>
+          <a:prstGeom prst="rect">
+            <a:avLst/>
+          </a:prstGeom>
+          <a:noFill/>
+          <a:ln/>
+        </p:spPr>
+        <p:txBody>
+          <a:bodyPr wrap="square" rtlCol="0" anchor="ctr">
+            <a:normAutofit/>
+          </a:bodyPr>
+          <a:lstStyle/>
+          <a:p>
+            <a:pPr indent="0" marL="0">
+              <a:buNone/>
+            </a:pPr>
+            <a:r>
+              <a:rPr lang="en-US" sz="1400" dirty="0">
                 <a:solidFill>
                   <a:srgbClr val="374151"/>
                 </a:solidFill>
@@ -3256,87 +7778,9 @@
                 <a:ea typeface="Calibri" pitchFamily="34" charset="-122"/>
                 <a:cs typeface="Calibri" pitchFamily="34" charset="-120"/>
               </a:rPr>
-              <a:t>JSON 形式で Google Docs/PowerPoint との自動連携が可能</a:t>
-            </a:r>
-            <a:endParaRPr lang="en-US" sz="1600" dirty="0"/>
-          </a:p>
-        </p:txBody>
-      </p:sp>
-      <p:sp>
-        <p:nvSpPr>
-          <p:cNvPr id="8" name="Text 6"/>
-          <p:cNvSpPr/>
-          <p:nvPr/>
-        </p:nvSpPr>
-        <p:spPr>
-          <a:xfrm>
-            <a:off x="1097280" y="3337560"/>
-            <a:ext cx="7315200" cy="457200"/>
-          </a:xfrm>
-          <a:prstGeom prst="rect">
-            <a:avLst/>
-          </a:prstGeom>
-          <a:noFill/>
-          <a:ln/>
-        </p:spPr>
-        <p:txBody>
-          <a:bodyPr wrap="square" rtlCol="0" anchor="t"/>
-          <a:lstStyle/>
-          <a:p>
-            <a:pPr algn="l" indent="0" marL="0">
-              <a:buNone/>
-            </a:pPr>
-            <a:r>
-              <a:rPr lang="en-US" sz="1600" dirty="0">
-                <a:solidFill>
-                  <a:srgbClr val="374151"/>
-                </a:solidFill>
-                <a:latin typeface="Calibri" pitchFamily="34" charset="0"/>
-                <a:ea typeface="Calibri" pitchFamily="34" charset="-122"/>
-                <a:cs typeface="Calibri" pitchFamily="34" charset="-120"/>
-              </a:rPr>
-              <a:t>最終品質は人間の創造的修正が決める</a:t>
-            </a:r>
-            <a:endParaRPr lang="en-US" sz="1600" dirty="0"/>
-          </a:p>
-        </p:txBody>
-      </p:sp>
-      <p:sp>
-        <p:nvSpPr>
-          <p:cNvPr id="9" name="Text 7"/>
-          <p:cNvSpPr/>
-          <p:nvPr/>
-        </p:nvSpPr>
-        <p:spPr>
-          <a:xfrm>
-            <a:off x="685800" y="3931920"/>
-            <a:ext cx="7772400" cy="320040"/>
-          </a:xfrm>
-          <a:prstGeom prst="rect">
-            <a:avLst/>
-          </a:prstGeom>
-          <a:noFill/>
-          <a:ln/>
-        </p:spPr>
-        <p:txBody>
-          <a:bodyPr wrap="square" rtlCol="0" anchor="ctr"/>
-          <a:lstStyle/>
-          <a:p>
-            <a:pPr algn="l" indent="0" marL="0">
-              <a:buNone/>
-            </a:pPr>
-            <a:r>
-              <a:rPr lang="en-US" sz="1800" dirty="0">
-                <a:solidFill>
-                  <a:srgbClr val="2563EB"/>
-                </a:solidFill>
-                <a:latin typeface="Calibri" pitchFamily="34" charset="0"/>
-                <a:ea typeface="Calibri" pitchFamily="34" charset="-122"/>
-                <a:cs typeface="Calibri" pitchFamily="34" charset="-120"/>
-              </a:rPr>
-              <a:t>次のステップ：実務で実践 → チーム全体で共有</a:t>
-            </a:r>
-            <a:endParaRPr lang="en-US" sz="1800" dirty="0"/>
+              <a:t>複数案から『どのアプローチがベストか』は営業経験値で選ぶ</a:t>
+            </a:r>
+            <a:endParaRPr lang="en-US" sz="1400" dirty="0"/>
           </a:p>
         </p:txBody>
       </p:sp>

--- a/黒崎/AI研修一覧/Gemini/P-03_営業企画効率化/スライド.pptx
+++ b/黒崎/AI研修一覧/Gemini/P-03_営業企画効率化/スライド.pptx
@@ -3087,47 +3087,6 @@
           </a:p>
         </p:txBody>
       </p:sp>
-      <p:sp>
-        <p:nvSpPr>
-          <p:cNvPr id="12" name="Text 10"/>
-          <p:cNvSpPr/>
-          <p:nvPr/>
-        </p:nvSpPr>
-        <p:spPr>
-          <a:xfrm>
-            <a:off x="685800" y="4796028"/>
-            <a:ext cx="1828800" cy="274320"/>
-          </a:xfrm>
-          <a:prstGeom prst="rect">
-            <a:avLst/>
-          </a:prstGeom>
-          <a:noFill/>
-          <a:ln/>
-        </p:spPr>
-        <p:txBody>
-          <a:bodyPr wrap="square" rtlCol="0" anchor="ctr">
-            <a:normAutofit/>
-          </a:bodyPr>
-          <a:lstStyle/>
-          <a:p>
-            <a:pPr algn="l" indent="0" marL="0">
-              <a:buNone/>
-            </a:pPr>
-            <a:r>
-              <a:rPr lang="en-US" sz="1000" dirty="0">
-                <a:solidFill>
-                  <a:srgbClr val="9CA3AF"/>
-                </a:solidFill>
-                <a:latin typeface="Calibri" pitchFamily="34" charset="0"/>
-                <a:ea typeface="Calibri" pitchFamily="34" charset="-122"/>
-                <a:cs typeface="Calibri" pitchFamily="34" charset="-120"/>
-              </a:rPr>
-              <a:t>P-03</a:t>
-            </a:r>
-            <a:endParaRPr lang="en-US" sz="1000" dirty="0"/>
-          </a:p>
-        </p:txBody>
-      </p:sp>
     </p:spTree>
   </p:cSld>
   <p:clrMapOvr>
